--- a/presentation/Soutenance_PFE_Oussema_Korbosli.pptx
+++ b/presentation/Soutenance_PFE_Oussema_Korbosli.pptx
@@ -45,8 +45,8 @@
   <p:notesMasterIdLst>
     <p:notesMasterId r:id="rId38"/>
   </p:notesMasterIdLst>
-  <p:sldSz cx="9144000" cy="5143500"/>
-  <p:notesSz cx="5143500" cy="9144000"/>
+  <p:sldSz cx="12191695" cy="6858000"/>
+  <p:notesSz cx="6858000" cy="12191695"/>
   <p:defaultTextStyle>
     <a:lvl1pPr marL="0" algn="l" defTabSz="914400" rtl="0" eaLnBrk="1" latinLnBrk="0" hangingPunct="1">
       <a:defRPr sz="1800" kern="1200">
@@ -14929,7 +14929,7 @@
                 <a:ea typeface="Georgia" pitchFamily="34" charset="-122"/>
                 <a:cs typeface="Georgia" pitchFamily="34" charset="-120"/>
               </a:rPr>
-              <a:t>49</a:t>
+              <a:t>45</a:t>
             </a:r>
             <a:endParaRPr lang="en-US" sz="2600" dirty="0"/>
           </a:p>
@@ -25971,7 +25971,7 @@
                 <a:ea typeface="Calibri" pitchFamily="34" charset="-122"/>
                 <a:cs typeface="Calibri" pitchFamily="34" charset="-120"/>
               </a:rPr>
-              <a:t>Un réseau de 49 agences réparties sur tout le territoire tunisien</a:t>
+              <a:t>Un réseau de 45 agences réparties sur tout le territoire tunisien</a:t>
             </a:r>
             <a:endParaRPr lang="en-US" sz="1400" dirty="0"/>
           </a:p>
@@ -27578,7 +27578,7 @@
                 <a:ea typeface="Georgia" pitchFamily="34" charset="-122"/>
                 <a:cs typeface="Georgia" pitchFamily="34" charset="-120"/>
               </a:rPr>
-              <a:t>49</a:t>
+              <a:t>45</a:t>
             </a:r>
             <a:endParaRPr lang="en-US" sz="2600" dirty="0"/>
           </a:p>

--- a/presentation/Soutenance_PFE_Oussema_Korbosli.pptx
+++ b/presentation/Soutenance_PFE_Oussema_Korbosli.pptx
@@ -21419,7 +21419,7 @@
                 <a:ea typeface="Calibri" pitchFamily="34" charset="-122"/>
                 <a:cs typeface="Calibri" pitchFamily="34" charset="-120"/>
               </a:rPr>
-              <a:t>Principe : regrouper les agences en profils homogènes à partir de leurs sept indicateurs, sans étiquette préalable (apprentissage non supervisé).</a:t>
+              <a:t>Principe : regrouper les agences en profils homogènes à partir de six indicateurs réels, sans étiquette préalable (apprentissage non supervisé).</a:t>
             </a:r>
             <a:endParaRPr lang="en-US" sz="1300" dirty="0"/>
           </a:p>
@@ -21546,7 +21546,7 @@
                 <a:ea typeface="Georgia" pitchFamily="34" charset="-122"/>
                 <a:cs typeface="Georgia" pitchFamily="34" charset="-120"/>
               </a:rPr>
-              <a:t>Standardisation</a:t>
+              <a:t>Prétraitement</a:t>
             </a:r>
             <a:endParaRPr lang="en-US" sz="1400" dirty="0"/>
           </a:p>
@@ -21585,7 +21585,7 @@
                 <a:ea typeface="Calibri" pitchFamily="34" charset="-122"/>
                 <a:cs typeface="Calibri" pitchFamily="34" charset="-120"/>
               </a:rPr>
-              <a:t>Centrage-réduction des 7 variables (StandardScaler)</a:t>
+              <a:t>Log sur les montants puis centrage-réduction (6 variables)</a:t>
             </a:r>
             <a:endParaRPr lang="en-US" sz="1150" dirty="0"/>
           </a:p>
@@ -21751,7 +21751,7 @@
                 <a:ea typeface="Calibri" pitchFamily="34" charset="-122"/>
                 <a:cs typeface="Calibri" pitchFamily="34" charset="-120"/>
               </a:rPr>
-              <a:t>Méthode du coude et score de silhouette → k = 3</a:t>
+              <a:t>Coude et silhouette → k = 3, exploitable pour le pilotage</a:t>
             </a:r>
             <a:endParaRPr lang="en-US" sz="1150" dirty="0"/>
           </a:p>
@@ -22083,7 +22083,7 @@
                 <a:ea typeface="Calibri" pitchFamily="34" charset="-122"/>
                 <a:cs typeface="Calibri" pitchFamily="34" charset="-120"/>
               </a:rPr>
-              <a:t>K-Means : silhouette 0,736 · Davies-Bouldin 0,350</a:t>
+              <a:t>K-Means : silhouette 0,604, classe toutes les agences</a:t>
             </a:r>
             <a:endParaRPr lang="en-US" sz="1150" dirty="0"/>
           </a:p>
@@ -22105,8 +22105,8 @@
         </p:blipFill>
         <p:spPr>
           <a:xfrm>
-            <a:off x="6446520" y="2150269"/>
-            <a:ext cx="5212080" cy="3746183"/>
+            <a:off x="6446520" y="2216506"/>
+            <a:ext cx="5212080" cy="3613709"/>
           </a:xfrm>
           <a:prstGeom prst="rect">
             <a:avLst/>
@@ -22382,7 +22382,7 @@
                 <a:ea typeface="Georgia" pitchFamily="34" charset="-122"/>
                 <a:cs typeface="Georgia" pitchFamily="34" charset="-120"/>
               </a:rPr>
-              <a:t>7</a:t>
+              <a:t>34</a:t>
             </a:r>
             <a:endParaRPr lang="en-US" sz="3400" dirty="0"/>
           </a:p>
@@ -22421,7 +22421,7 @@
                 <a:ea typeface="Georgia" pitchFamily="34" charset="-122"/>
                 <a:cs typeface="Georgia" pitchFamily="34" charset="-120"/>
               </a:rPr>
-              <a:t>Grandes agences</a:t>
+              <a:t>Agences d'exploitation</a:t>
             </a:r>
             <a:endParaRPr lang="en-US" sz="1550" dirty="0"/>
           </a:p>
@@ -22463,7 +22463,7 @@
                 <a:ea typeface="Calibri" pitchFamily="34" charset="-122"/>
                 <a:cs typeface="Calibri" pitchFamily="34" charset="-120"/>
               </a:rPr>
-              <a:t>Effectif et production élevés · présence 0,98</a:t>
+              <a:t>880 clients · 12 employés · 7,80 MDT de crédits</a:t>
             </a:r>
             <a:endParaRPr lang="en-US" sz="1150" dirty="0"/>
           </a:p>
@@ -22525,7 +22525,7 @@
                 <a:ea typeface="Calibri" pitchFamily="34" charset="-122"/>
                 <a:cs typeface="Calibri" pitchFamily="34" charset="-120"/>
               </a:rPr>
-              <a:t>Objectifs ambitieux, agences de référence</a:t>
+              <a:t>Objectifs différenciés, diffusion des bonnes pratiques</a:t>
             </a:r>
             <a:endParaRPr lang="en-US" sz="1200" dirty="0"/>
           </a:p>
@@ -22611,7 +22611,7 @@
                 <a:ea typeface="Georgia" pitchFamily="34" charset="-122"/>
                 <a:cs typeface="Georgia" pitchFamily="34" charset="-120"/>
               </a:rPr>
-              <a:t>16</a:t>
+              <a:t>6</a:t>
             </a:r>
             <a:endParaRPr lang="en-US" sz="3400" dirty="0"/>
           </a:p>
@@ -22650,7 +22650,7 @@
                 <a:ea typeface="Georgia" pitchFamily="34" charset="-122"/>
                 <a:cs typeface="Georgia" pitchFamily="34" charset="-120"/>
               </a:rPr>
-              <a:t>Agences moyennes</a:t>
+              <a:t>Entités de production</a:t>
             </a:r>
             <a:endParaRPr lang="en-US" sz="1550" dirty="0"/>
           </a:p>
@@ -22692,7 +22692,7 @@
                 <a:ea typeface="Calibri" pitchFamily="34" charset="-122"/>
                 <a:cs typeface="Calibri" pitchFamily="34" charset="-120"/>
               </a:rPr>
-              <a:t>Activité intermédiaire · présence 0,94</a:t>
+              <a:t>Quasi aucun client · 14,61 MDT de crédits</a:t>
             </a:r>
             <a:endParaRPr lang="en-US" sz="1150" dirty="0"/>
           </a:p>
@@ -22754,7 +22754,7 @@
                 <a:ea typeface="Calibri" pitchFamily="34" charset="-122"/>
                 <a:cs typeface="Calibri" pitchFamily="34" charset="-120"/>
               </a:rPr>
-              <a:t>Fort potentiel : équipement et collecte</a:t>
+              <a:t>Analyser ces financements réalisés hors guichet</a:t>
             </a:r>
             <a:endParaRPr lang="en-US" sz="1200" dirty="0"/>
           </a:p>
@@ -22840,7 +22840,7 @@
                 <a:ea typeface="Georgia" pitchFamily="34" charset="-122"/>
                 <a:cs typeface="Georgia" pitchFamily="34" charset="-120"/>
               </a:rPr>
-              <a:t>22</a:t>
+              <a:t>8</a:t>
             </a:r>
             <a:endParaRPr lang="en-US" sz="3400" dirty="0"/>
           </a:p>
@@ -22879,7 +22879,7 @@
                 <a:ea typeface="Georgia" pitchFamily="34" charset="-122"/>
                 <a:cs typeface="Georgia" pitchFamily="34" charset="-120"/>
               </a:rPr>
-              <a:t>Petites agences</a:t>
+              <a:t>Entités sans activité</a:t>
             </a:r>
             <a:endParaRPr lang="en-US" sz="1550" dirty="0"/>
           </a:p>
@@ -22921,7 +22921,7 @@
                 <a:ea typeface="Calibri" pitchFamily="34" charset="-122"/>
                 <a:cs typeface="Calibri" pitchFamily="34" charset="-120"/>
               </a:rPr>
-              <a:t>Effectif et activité réduits · présence 0,87</a:t>
+              <a:t>Ni clientèle, ni comptes, ni production</a:t>
             </a:r>
             <a:endParaRPr lang="en-US" sz="1150" dirty="0"/>
           </a:p>
@@ -22983,7 +22983,7 @@
                 <a:ea typeface="Calibri" pitchFamily="34" charset="-122"/>
                 <a:cs typeface="Calibri" pitchFamily="34" charset="-120"/>
               </a:rPr>
-              <a:t>Accompagnement ciblé et suivi de l'assiduité</a:t>
+              <a:t>Statuer : ouverture, rattachement ou intégration</a:t>
             </a:r>
             <a:endParaRPr lang="en-US" sz="1200" dirty="0"/>
           </a:p>
@@ -23049,7 +23049,7 @@
                 <a:ea typeface="Calibri" pitchFamily="34" charset="-122"/>
                 <a:cs typeface="Calibri" pitchFamily="34" charset="-120"/>
               </a:rPr>
-              <a:t>Apport décisionnel : allouer les ressources selon la taille, différencier les objectifs et accompagner les agences les plus fragiles</a:t>
+              <a:t>Apport décisionnel : différencier les objectifs selon le régime d'activité réel et fiabiliser le référentiel</a:t>
             </a:r>
             <a:endParaRPr lang="en-US" sz="1250" dirty="0"/>
           </a:p>

--- a/presentation/Soutenance_PFE_Oussema_Korbosli.pptx
+++ b/presentation/Soutenance_PFE_Oussema_Korbosli.pptx
@@ -22083,7 +22083,7 @@
                 <a:ea typeface="Calibri" pitchFamily="34" charset="-122"/>
                 <a:cs typeface="Calibri" pitchFamily="34" charset="-120"/>
               </a:rPr>
-              <a:t>K-Means : silhouette 0,604, classe toutes les agences</a:t>
+              <a:t>K-Means : meilleure silhouette (0,604) et cohésion (95,2)</a:t>
             </a:r>
             <a:endParaRPr lang="en-US" sz="1150" dirty="0"/>
           </a:p>

--- a/presentation/Soutenance_PFE_Oussema_Korbosli.pptx
+++ b/presentation/Soutenance_PFE_Oussema_Korbosli.pptx
@@ -4777,7 +4777,7 @@
         </p:nvSpPr>
         <p:spPr>
           <a:xfrm>
-            <a:off x="566928" y="1417320"/>
+            <a:off x="566928" y="1298448"/>
             <a:ext cx="11064240" cy="457200"/>
           </a:xfrm>
           <a:prstGeom prst="rect">
@@ -4808,747 +4808,63 @@
           </a:p>
         </p:txBody>
       </p:sp>
-      <p:sp>
-        <p:nvSpPr>
-          <p:cNvPr id="8" name="Shape 6"/>
-          <p:cNvSpPr/>
-          <p:nvPr/>
-        </p:nvSpPr>
-        <p:spPr>
-          <a:xfrm>
-            <a:off x="566928" y="2011680"/>
-            <a:ext cx="1691640" cy="1417320"/>
-          </a:xfrm>
-          <a:prstGeom prst="roundRect">
-            <a:avLst>
-              <a:gd name="adj" fmla="val 5161"/>
-            </a:avLst>
-          </a:prstGeom>
-          <a:solidFill>
-            <a:srgbClr val="0A2558"/>
-          </a:solidFill>
-          <a:ln w="12700">
-            <a:solidFill>
-              <a:srgbClr val="0A2558"/>
-            </a:solidFill>
-            <a:prstDash val="solid"/>
-          </a:ln>
-        </p:spPr>
-      </p:sp>
-      <p:sp>
-        <p:nvSpPr>
-          <p:cNvPr id="9" name="Text 7"/>
-          <p:cNvSpPr/>
-          <p:nvPr/>
-        </p:nvSpPr>
-        <p:spPr>
-          <a:xfrm>
-            <a:off x="566928" y="2139696"/>
-            <a:ext cx="1691640" cy="310896"/>
-          </a:xfrm>
-          <a:prstGeom prst="rect">
-            <a:avLst/>
-          </a:prstGeom>
-          <a:noFill/>
-          <a:ln/>
-        </p:spPr>
-        <p:txBody>
-          <a:bodyPr wrap="square" lIns="0" tIns="0" rIns="0" bIns="0" rtlCol="0" anchor="ctr"/>
-          <a:lstStyle/>
-          <a:p>
-            <a:pPr algn="ctr" indent="0" marL="0">
-              <a:buNone/>
-            </a:pPr>
-            <a:r>
-              <a:rPr lang="en-US" sz="1400" b="1" dirty="0">
+      <p:pic>
+        <p:nvPicPr>
+          <p:cNvPr id="8" name="Image 0" descr="/home/user/oussema_korbosli/rapport-latex/images/crispdm.png">    </p:cNvPr>
+          <p:cNvPicPr>
+            <a:picLocks noChangeAspect="1"/>
+          </p:cNvPicPr>
+          <p:nvPr/>
+        </p:nvPicPr>
+        <p:blipFill>
+          <a:blip r:embed="rId1"/>
+          <a:stretch>
+            <a:fillRect/>
+          </a:stretch>
+        </p:blipFill>
+        <p:spPr>
+          <a:xfrm>
+            <a:off x="888073" y="1783080"/>
+            <a:ext cx="5301310" cy="4343400"/>
+          </a:xfrm>
+          <a:prstGeom prst="rect">
+            <a:avLst/>
+          </a:prstGeom>
+        </p:spPr>
+      </p:pic>
+      <p:sp>
+        <p:nvSpPr>
+          <p:cNvPr id="9" name="Text 6"/>
+          <p:cNvSpPr/>
+          <p:nvPr/>
+        </p:nvSpPr>
+        <p:spPr>
+          <a:xfrm>
+            <a:off x="6720840" y="1828800"/>
+            <a:ext cx="4937760" cy="274320"/>
+          </a:xfrm>
+          <a:prstGeom prst="rect">
+            <a:avLst/>
+          </a:prstGeom>
+          <a:noFill/>
+          <a:ln/>
+        </p:spPr>
+        <p:txBody>
+          <a:bodyPr wrap="square" lIns="0" tIns="0" rIns="0" bIns="0" rtlCol="0" anchor="ctr"/>
+          <a:lstStyle/>
+          <a:p>
+            <a:pPr indent="0" marL="0">
+              <a:buNone/>
+            </a:pPr>
+            <a:r>
+              <a:rPr lang="en-US" sz="1050" b="1" spc="200" kern="0" dirty="0">
                 <a:solidFill>
                   <a:srgbClr val="3C6FC3"/>
-                </a:solidFill>
-                <a:latin typeface="Georgia" pitchFamily="34" charset="0"/>
-                <a:ea typeface="Georgia" pitchFamily="34" charset="-122"/>
-                <a:cs typeface="Georgia" pitchFamily="34" charset="-120"/>
-              </a:rPr>
-              <a:t>01</a:t>
-            </a:r>
-            <a:endParaRPr lang="en-US" sz="1400" dirty="0"/>
-          </a:p>
-        </p:txBody>
-      </p:sp>
-      <p:sp>
-        <p:nvSpPr>
-          <p:cNvPr id="10" name="Text 8"/>
-          <p:cNvSpPr/>
-          <p:nvPr/>
-        </p:nvSpPr>
-        <p:spPr>
-          <a:xfrm>
-            <a:off x="640080" y="2487168"/>
-            <a:ext cx="1545336" cy="841248"/>
-          </a:xfrm>
-          <a:prstGeom prst="rect">
-            <a:avLst/>
-          </a:prstGeom>
-          <a:noFill/>
-          <a:ln/>
-        </p:spPr>
-        <p:txBody>
-          <a:bodyPr wrap="square" lIns="0" tIns="0" rIns="0" bIns="0" rtlCol="0" anchor="t"/>
-          <a:lstStyle/>
-          <a:p>
-            <a:pPr algn="ctr" indent="0" marL="0">
-              <a:lnSpc>
-                <a:spcPts val="1500"/>
-              </a:lnSpc>
-              <a:buNone/>
-            </a:pPr>
-            <a:r>
-              <a:rPr lang="en-US" sz="1150" dirty="0">
-                <a:solidFill>
-                  <a:srgbClr val="FFFFFF"/>
                 </a:solidFill>
                 <a:latin typeface="Calibri" pitchFamily="34" charset="0"/>
                 <a:ea typeface="Calibri" pitchFamily="34" charset="-122"/>
                 <a:cs typeface="Calibri" pitchFamily="34" charset="-120"/>
               </a:rPr>
-              <a:t>Compréhension</a:t>
-            </a:r>
-            <a:endParaRPr lang="en-US" sz="1150" dirty="0"/>
-          </a:p>
-          <a:p>
-            <a:pPr algn="ctr" indent="0" marL="0">
-              <a:lnSpc>
-                <a:spcPts val="1500"/>
-              </a:lnSpc>
-              <a:buNone/>
-            </a:pPr>
-            <a:r>
-              <a:rPr lang="en-US" sz="1150" dirty="0">
-                <a:solidFill>
-                  <a:srgbClr val="FFFFFF"/>
-                </a:solidFill>
-                <a:latin typeface="Calibri" pitchFamily="34" charset="0"/>
-                <a:ea typeface="Calibri" pitchFamily="34" charset="-122"/>
-                <a:cs typeface="Calibri" pitchFamily="34" charset="-120"/>
-              </a:rPr>
-              <a:t>métier</a:t>
-            </a:r>
-            <a:endParaRPr lang="en-US" sz="1150" dirty="0"/>
-          </a:p>
-        </p:txBody>
-      </p:sp>
-      <p:sp>
-        <p:nvSpPr>
-          <p:cNvPr id="11" name="Shape 9"/>
-          <p:cNvSpPr/>
-          <p:nvPr/>
-        </p:nvSpPr>
-        <p:spPr>
-          <a:xfrm>
-            <a:off x="2423160" y="2011680"/>
-            <a:ext cx="1691640" cy="1417320"/>
-          </a:xfrm>
-          <a:prstGeom prst="roundRect">
-            <a:avLst>
-              <a:gd name="adj" fmla="val 5161"/>
-            </a:avLst>
-          </a:prstGeom>
-          <a:solidFill>
-            <a:srgbClr val="1D4EA0"/>
-          </a:solidFill>
-          <a:ln w="12700">
-            <a:solidFill>
-              <a:srgbClr val="1D4EA0"/>
-            </a:solidFill>
-            <a:prstDash val="solid"/>
-          </a:ln>
-        </p:spPr>
-      </p:sp>
-      <p:sp>
-        <p:nvSpPr>
-          <p:cNvPr id="12" name="Text 10"/>
-          <p:cNvSpPr/>
-          <p:nvPr/>
-        </p:nvSpPr>
-        <p:spPr>
-          <a:xfrm>
-            <a:off x="2423160" y="2139696"/>
-            <a:ext cx="1691640" cy="310896"/>
-          </a:xfrm>
-          <a:prstGeom prst="rect">
-            <a:avLst/>
-          </a:prstGeom>
-          <a:noFill/>
-          <a:ln/>
-        </p:spPr>
-        <p:txBody>
-          <a:bodyPr wrap="square" lIns="0" tIns="0" rIns="0" bIns="0" rtlCol="0" anchor="ctr"/>
-          <a:lstStyle/>
-          <a:p>
-            <a:pPr algn="ctr" indent="0" marL="0">
-              <a:buNone/>
-            </a:pPr>
-            <a:r>
-              <a:rPr lang="en-US" sz="1400" b="1" dirty="0">
-                <a:solidFill>
-                  <a:srgbClr val="3C6FC3"/>
-                </a:solidFill>
-                <a:latin typeface="Georgia" pitchFamily="34" charset="0"/>
-                <a:ea typeface="Georgia" pitchFamily="34" charset="-122"/>
-                <a:cs typeface="Georgia" pitchFamily="34" charset="-120"/>
-              </a:rPr>
-              <a:t>02</a:t>
-            </a:r>
-            <a:endParaRPr lang="en-US" sz="1400" dirty="0"/>
-          </a:p>
-        </p:txBody>
-      </p:sp>
-      <p:sp>
-        <p:nvSpPr>
-          <p:cNvPr id="13" name="Text 11"/>
-          <p:cNvSpPr/>
-          <p:nvPr/>
-        </p:nvSpPr>
-        <p:spPr>
-          <a:xfrm>
-            <a:off x="2496312" y="2487168"/>
-            <a:ext cx="1545336" cy="841248"/>
-          </a:xfrm>
-          <a:prstGeom prst="rect">
-            <a:avLst/>
-          </a:prstGeom>
-          <a:noFill/>
-          <a:ln/>
-        </p:spPr>
-        <p:txBody>
-          <a:bodyPr wrap="square" lIns="0" tIns="0" rIns="0" bIns="0" rtlCol="0" anchor="t"/>
-          <a:lstStyle/>
-          <a:p>
-            <a:pPr algn="ctr" indent="0" marL="0">
-              <a:lnSpc>
-                <a:spcPts val="1500"/>
-              </a:lnSpc>
-              <a:buNone/>
-            </a:pPr>
-            <a:r>
-              <a:rPr lang="en-US" sz="1150" dirty="0">
-                <a:solidFill>
-                  <a:srgbClr val="FFFFFF"/>
-                </a:solidFill>
-                <a:latin typeface="Calibri" pitchFamily="34" charset="0"/>
-                <a:ea typeface="Calibri" pitchFamily="34" charset="-122"/>
-                <a:cs typeface="Calibri" pitchFamily="34" charset="-120"/>
-              </a:rPr>
-              <a:t>Compréhension</a:t>
-            </a:r>
-            <a:endParaRPr lang="en-US" sz="1150" dirty="0"/>
-          </a:p>
-          <a:p>
-            <a:pPr algn="ctr" indent="0" marL="0">
-              <a:lnSpc>
-                <a:spcPts val="1500"/>
-              </a:lnSpc>
-              <a:buNone/>
-            </a:pPr>
-            <a:r>
-              <a:rPr lang="en-US" sz="1150" dirty="0">
-                <a:solidFill>
-                  <a:srgbClr val="FFFFFF"/>
-                </a:solidFill>
-                <a:latin typeface="Calibri" pitchFamily="34" charset="0"/>
-                <a:ea typeface="Calibri" pitchFamily="34" charset="-122"/>
-                <a:cs typeface="Calibri" pitchFamily="34" charset="-120"/>
-              </a:rPr>
-              <a:t>des données</a:t>
-            </a:r>
-            <a:endParaRPr lang="en-US" sz="1150" dirty="0"/>
-          </a:p>
-        </p:txBody>
-      </p:sp>
-      <p:sp>
-        <p:nvSpPr>
-          <p:cNvPr id="14" name="Shape 12"/>
-          <p:cNvSpPr/>
-          <p:nvPr/>
-        </p:nvSpPr>
-        <p:spPr>
-          <a:xfrm>
-            <a:off x="4279392" y="2011680"/>
-            <a:ext cx="1691640" cy="1417320"/>
-          </a:xfrm>
-          <a:prstGeom prst="roundRect">
-            <a:avLst>
-              <a:gd name="adj" fmla="val 5161"/>
-            </a:avLst>
-          </a:prstGeom>
-          <a:solidFill>
-            <a:srgbClr val="0A2558"/>
-          </a:solidFill>
-          <a:ln w="12700">
-            <a:solidFill>
-              <a:srgbClr val="0A2558"/>
-            </a:solidFill>
-            <a:prstDash val="solid"/>
-          </a:ln>
-        </p:spPr>
-      </p:sp>
-      <p:sp>
-        <p:nvSpPr>
-          <p:cNvPr id="15" name="Text 13"/>
-          <p:cNvSpPr/>
-          <p:nvPr/>
-        </p:nvSpPr>
-        <p:spPr>
-          <a:xfrm>
-            <a:off x="4279392" y="2139696"/>
-            <a:ext cx="1691640" cy="310896"/>
-          </a:xfrm>
-          <a:prstGeom prst="rect">
-            <a:avLst/>
-          </a:prstGeom>
-          <a:noFill/>
-          <a:ln/>
-        </p:spPr>
-        <p:txBody>
-          <a:bodyPr wrap="square" lIns="0" tIns="0" rIns="0" bIns="0" rtlCol="0" anchor="ctr"/>
-          <a:lstStyle/>
-          <a:p>
-            <a:pPr algn="ctr" indent="0" marL="0">
-              <a:buNone/>
-            </a:pPr>
-            <a:r>
-              <a:rPr lang="en-US" sz="1400" b="1" dirty="0">
-                <a:solidFill>
-                  <a:srgbClr val="3C6FC3"/>
-                </a:solidFill>
-                <a:latin typeface="Georgia" pitchFamily="34" charset="0"/>
-                <a:ea typeface="Georgia" pitchFamily="34" charset="-122"/>
-                <a:cs typeface="Georgia" pitchFamily="34" charset="-120"/>
-              </a:rPr>
-              <a:t>03</a:t>
-            </a:r>
-            <a:endParaRPr lang="en-US" sz="1400" dirty="0"/>
-          </a:p>
-        </p:txBody>
-      </p:sp>
-      <p:sp>
-        <p:nvSpPr>
-          <p:cNvPr id="16" name="Text 14"/>
-          <p:cNvSpPr/>
-          <p:nvPr/>
-        </p:nvSpPr>
-        <p:spPr>
-          <a:xfrm>
-            <a:off x="4352544" y="2487168"/>
-            <a:ext cx="1545336" cy="841248"/>
-          </a:xfrm>
-          <a:prstGeom prst="rect">
-            <a:avLst/>
-          </a:prstGeom>
-          <a:noFill/>
-          <a:ln/>
-        </p:spPr>
-        <p:txBody>
-          <a:bodyPr wrap="square" lIns="0" tIns="0" rIns="0" bIns="0" rtlCol="0" anchor="t"/>
-          <a:lstStyle/>
-          <a:p>
-            <a:pPr algn="ctr" indent="0" marL="0">
-              <a:lnSpc>
-                <a:spcPts val="1500"/>
-              </a:lnSpc>
-              <a:buNone/>
-            </a:pPr>
-            <a:r>
-              <a:rPr lang="en-US" sz="1150" dirty="0">
-                <a:solidFill>
-                  <a:srgbClr val="FFFFFF"/>
-                </a:solidFill>
-                <a:latin typeface="Calibri" pitchFamily="34" charset="0"/>
-                <a:ea typeface="Calibri" pitchFamily="34" charset="-122"/>
-                <a:cs typeface="Calibri" pitchFamily="34" charset="-120"/>
-              </a:rPr>
-              <a:t>Préparation</a:t>
-            </a:r>
-            <a:endParaRPr lang="en-US" sz="1150" dirty="0"/>
-          </a:p>
-          <a:p>
-            <a:pPr algn="ctr" indent="0" marL="0">
-              <a:lnSpc>
-                <a:spcPts val="1500"/>
-              </a:lnSpc>
-              <a:buNone/>
-            </a:pPr>
-            <a:r>
-              <a:rPr lang="en-US" sz="1150" dirty="0">
-                <a:solidFill>
-                  <a:srgbClr val="FFFFFF"/>
-                </a:solidFill>
-                <a:latin typeface="Calibri" pitchFamily="34" charset="0"/>
-                <a:ea typeface="Calibri" pitchFamily="34" charset="-122"/>
-                <a:cs typeface="Calibri" pitchFamily="34" charset="-120"/>
-              </a:rPr>
-              <a:t>des données</a:t>
-            </a:r>
-            <a:endParaRPr lang="en-US" sz="1150" dirty="0"/>
-          </a:p>
-        </p:txBody>
-      </p:sp>
-      <p:sp>
-        <p:nvSpPr>
-          <p:cNvPr id="17" name="Shape 15"/>
-          <p:cNvSpPr/>
-          <p:nvPr/>
-        </p:nvSpPr>
-        <p:spPr>
-          <a:xfrm>
-            <a:off x="6135624" y="2011680"/>
-            <a:ext cx="1691640" cy="1417320"/>
-          </a:xfrm>
-          <a:prstGeom prst="roundRect">
-            <a:avLst>
-              <a:gd name="adj" fmla="val 5161"/>
-            </a:avLst>
-          </a:prstGeom>
-          <a:solidFill>
-            <a:srgbClr val="1D4EA0"/>
-          </a:solidFill>
-          <a:ln w="12700">
-            <a:solidFill>
-              <a:srgbClr val="1D4EA0"/>
-            </a:solidFill>
-            <a:prstDash val="solid"/>
-          </a:ln>
-        </p:spPr>
-      </p:sp>
-      <p:sp>
-        <p:nvSpPr>
-          <p:cNvPr id="18" name="Text 16"/>
-          <p:cNvSpPr/>
-          <p:nvPr/>
-        </p:nvSpPr>
-        <p:spPr>
-          <a:xfrm>
-            <a:off x="6135624" y="2139696"/>
-            <a:ext cx="1691640" cy="310896"/>
-          </a:xfrm>
-          <a:prstGeom prst="rect">
-            <a:avLst/>
-          </a:prstGeom>
-          <a:noFill/>
-          <a:ln/>
-        </p:spPr>
-        <p:txBody>
-          <a:bodyPr wrap="square" lIns="0" tIns="0" rIns="0" bIns="0" rtlCol="0" anchor="ctr"/>
-          <a:lstStyle/>
-          <a:p>
-            <a:pPr algn="ctr" indent="0" marL="0">
-              <a:buNone/>
-            </a:pPr>
-            <a:r>
-              <a:rPr lang="en-US" sz="1400" b="1" dirty="0">
-                <a:solidFill>
-                  <a:srgbClr val="3C6FC3"/>
-                </a:solidFill>
-                <a:latin typeface="Georgia" pitchFamily="34" charset="0"/>
-                <a:ea typeface="Georgia" pitchFamily="34" charset="-122"/>
-                <a:cs typeface="Georgia" pitchFamily="34" charset="-120"/>
-              </a:rPr>
-              <a:t>04</a:t>
-            </a:r>
-            <a:endParaRPr lang="en-US" sz="1400" dirty="0"/>
-          </a:p>
-        </p:txBody>
-      </p:sp>
-      <p:sp>
-        <p:nvSpPr>
-          <p:cNvPr id="19" name="Text 17"/>
-          <p:cNvSpPr/>
-          <p:nvPr/>
-        </p:nvSpPr>
-        <p:spPr>
-          <a:xfrm>
-            <a:off x="6208776" y="2487168"/>
-            <a:ext cx="1545336" cy="841248"/>
-          </a:xfrm>
-          <a:prstGeom prst="rect">
-            <a:avLst/>
-          </a:prstGeom>
-          <a:noFill/>
-          <a:ln/>
-        </p:spPr>
-        <p:txBody>
-          <a:bodyPr wrap="square" lIns="0" tIns="0" rIns="0" bIns="0" rtlCol="0" anchor="t"/>
-          <a:lstStyle/>
-          <a:p>
-            <a:pPr algn="ctr" indent="0" marL="0">
-              <a:lnSpc>
-                <a:spcPts val="1500"/>
-              </a:lnSpc>
-              <a:buNone/>
-            </a:pPr>
-            <a:r>
-              <a:rPr lang="en-US" sz="1150" dirty="0">
-                <a:solidFill>
-                  <a:srgbClr val="FFFFFF"/>
-                </a:solidFill>
-                <a:latin typeface="Calibri" pitchFamily="34" charset="0"/>
-                <a:ea typeface="Calibri" pitchFamily="34" charset="-122"/>
-                <a:cs typeface="Calibri" pitchFamily="34" charset="-120"/>
-              </a:rPr>
-              <a:t>Modélisation</a:t>
-            </a:r>
-            <a:endParaRPr lang="en-US" sz="1150" dirty="0"/>
-          </a:p>
-        </p:txBody>
-      </p:sp>
-      <p:sp>
-        <p:nvSpPr>
-          <p:cNvPr id="20" name="Shape 18"/>
-          <p:cNvSpPr/>
-          <p:nvPr/>
-        </p:nvSpPr>
-        <p:spPr>
-          <a:xfrm>
-            <a:off x="7991856" y="2011680"/>
-            <a:ext cx="1691640" cy="1417320"/>
-          </a:xfrm>
-          <a:prstGeom prst="roundRect">
-            <a:avLst>
-              <a:gd name="adj" fmla="val 5161"/>
-            </a:avLst>
-          </a:prstGeom>
-          <a:solidFill>
-            <a:srgbClr val="0A2558"/>
-          </a:solidFill>
-          <a:ln w="12700">
-            <a:solidFill>
-              <a:srgbClr val="0A2558"/>
-            </a:solidFill>
-            <a:prstDash val="solid"/>
-          </a:ln>
-        </p:spPr>
-      </p:sp>
-      <p:sp>
-        <p:nvSpPr>
-          <p:cNvPr id="21" name="Text 19"/>
-          <p:cNvSpPr/>
-          <p:nvPr/>
-        </p:nvSpPr>
-        <p:spPr>
-          <a:xfrm>
-            <a:off x="7991856" y="2139696"/>
-            <a:ext cx="1691640" cy="310896"/>
-          </a:xfrm>
-          <a:prstGeom prst="rect">
-            <a:avLst/>
-          </a:prstGeom>
-          <a:noFill/>
-          <a:ln/>
-        </p:spPr>
-        <p:txBody>
-          <a:bodyPr wrap="square" lIns="0" tIns="0" rIns="0" bIns="0" rtlCol="0" anchor="ctr"/>
-          <a:lstStyle/>
-          <a:p>
-            <a:pPr algn="ctr" indent="0" marL="0">
-              <a:buNone/>
-            </a:pPr>
-            <a:r>
-              <a:rPr lang="en-US" sz="1400" b="1" dirty="0">
-                <a:solidFill>
-                  <a:srgbClr val="3C6FC3"/>
-                </a:solidFill>
-                <a:latin typeface="Georgia" pitchFamily="34" charset="0"/>
-                <a:ea typeface="Georgia" pitchFamily="34" charset="-122"/>
-                <a:cs typeface="Georgia" pitchFamily="34" charset="-120"/>
-              </a:rPr>
-              <a:t>05</a:t>
-            </a:r>
-            <a:endParaRPr lang="en-US" sz="1400" dirty="0"/>
-          </a:p>
-        </p:txBody>
-      </p:sp>
-      <p:sp>
-        <p:nvSpPr>
-          <p:cNvPr id="22" name="Text 20"/>
-          <p:cNvSpPr/>
-          <p:nvPr/>
-        </p:nvSpPr>
-        <p:spPr>
-          <a:xfrm>
-            <a:off x="8065008" y="2487168"/>
-            <a:ext cx="1545336" cy="841248"/>
-          </a:xfrm>
-          <a:prstGeom prst="rect">
-            <a:avLst/>
-          </a:prstGeom>
-          <a:noFill/>
-          <a:ln/>
-        </p:spPr>
-        <p:txBody>
-          <a:bodyPr wrap="square" lIns="0" tIns="0" rIns="0" bIns="0" rtlCol="0" anchor="t"/>
-          <a:lstStyle/>
-          <a:p>
-            <a:pPr algn="ctr" indent="0" marL="0">
-              <a:lnSpc>
-                <a:spcPts val="1500"/>
-              </a:lnSpc>
-              <a:buNone/>
-            </a:pPr>
-            <a:r>
-              <a:rPr lang="en-US" sz="1150" dirty="0">
-                <a:solidFill>
-                  <a:srgbClr val="FFFFFF"/>
-                </a:solidFill>
-                <a:latin typeface="Calibri" pitchFamily="34" charset="0"/>
-                <a:ea typeface="Calibri" pitchFamily="34" charset="-122"/>
-                <a:cs typeface="Calibri" pitchFamily="34" charset="-120"/>
-              </a:rPr>
-              <a:t>Évaluation</a:t>
-            </a:r>
-            <a:endParaRPr lang="en-US" sz="1150" dirty="0"/>
-          </a:p>
-        </p:txBody>
-      </p:sp>
-      <p:sp>
-        <p:nvSpPr>
-          <p:cNvPr id="23" name="Shape 21"/>
-          <p:cNvSpPr/>
-          <p:nvPr/>
-        </p:nvSpPr>
-        <p:spPr>
-          <a:xfrm>
-            <a:off x="9848088" y="2011680"/>
-            <a:ext cx="1691640" cy="1417320"/>
-          </a:xfrm>
-          <a:prstGeom prst="roundRect">
-            <a:avLst>
-              <a:gd name="adj" fmla="val 5161"/>
-            </a:avLst>
-          </a:prstGeom>
-          <a:solidFill>
-            <a:srgbClr val="1D4EA0"/>
-          </a:solidFill>
-          <a:ln w="12700">
-            <a:solidFill>
-              <a:srgbClr val="1D4EA0"/>
-            </a:solidFill>
-            <a:prstDash val="solid"/>
-          </a:ln>
-        </p:spPr>
-      </p:sp>
-      <p:sp>
-        <p:nvSpPr>
-          <p:cNvPr id="24" name="Text 22"/>
-          <p:cNvSpPr/>
-          <p:nvPr/>
-        </p:nvSpPr>
-        <p:spPr>
-          <a:xfrm>
-            <a:off x="9848088" y="2139696"/>
-            <a:ext cx="1691640" cy="310896"/>
-          </a:xfrm>
-          <a:prstGeom prst="rect">
-            <a:avLst/>
-          </a:prstGeom>
-          <a:noFill/>
-          <a:ln/>
-        </p:spPr>
-        <p:txBody>
-          <a:bodyPr wrap="square" lIns="0" tIns="0" rIns="0" bIns="0" rtlCol="0" anchor="ctr"/>
-          <a:lstStyle/>
-          <a:p>
-            <a:pPr algn="ctr" indent="0" marL="0">
-              <a:buNone/>
-            </a:pPr>
-            <a:r>
-              <a:rPr lang="en-US" sz="1400" b="1" dirty="0">
-                <a:solidFill>
-                  <a:srgbClr val="3C6FC3"/>
-                </a:solidFill>
-                <a:latin typeface="Georgia" pitchFamily="34" charset="0"/>
-                <a:ea typeface="Georgia" pitchFamily="34" charset="-122"/>
-                <a:cs typeface="Georgia" pitchFamily="34" charset="-120"/>
-              </a:rPr>
-              <a:t>06</a:t>
-            </a:r>
-            <a:endParaRPr lang="en-US" sz="1400" dirty="0"/>
-          </a:p>
-        </p:txBody>
-      </p:sp>
-      <p:sp>
-        <p:nvSpPr>
-          <p:cNvPr id="25" name="Text 23"/>
-          <p:cNvSpPr/>
-          <p:nvPr/>
-        </p:nvSpPr>
-        <p:spPr>
-          <a:xfrm>
-            <a:off x="9921240" y="2487168"/>
-            <a:ext cx="1545336" cy="841248"/>
-          </a:xfrm>
-          <a:prstGeom prst="rect">
-            <a:avLst/>
-          </a:prstGeom>
-          <a:noFill/>
-          <a:ln/>
-        </p:spPr>
-        <p:txBody>
-          <a:bodyPr wrap="square" lIns="0" tIns="0" rIns="0" bIns="0" rtlCol="0" anchor="t"/>
-          <a:lstStyle/>
-          <a:p>
-            <a:pPr algn="ctr" indent="0" marL="0">
-              <a:lnSpc>
-                <a:spcPts val="1500"/>
-              </a:lnSpc>
-              <a:buNone/>
-            </a:pPr>
-            <a:r>
-              <a:rPr lang="en-US" sz="1150" dirty="0">
-                <a:solidFill>
-                  <a:srgbClr val="FFFFFF"/>
-                </a:solidFill>
-                <a:latin typeface="Calibri" pitchFamily="34" charset="0"/>
-                <a:ea typeface="Calibri" pitchFamily="34" charset="-122"/>
-                <a:cs typeface="Calibri" pitchFamily="34" charset="-120"/>
-              </a:rPr>
-              <a:t>Déploiement</a:t>
-            </a:r>
-            <a:endParaRPr lang="en-US" sz="1150" dirty="0"/>
-          </a:p>
-        </p:txBody>
-      </p:sp>
-      <p:sp>
-        <p:nvSpPr>
-          <p:cNvPr id="26" name="Text 24"/>
-          <p:cNvSpPr/>
-          <p:nvPr/>
-        </p:nvSpPr>
-        <p:spPr>
-          <a:xfrm>
-            <a:off x="566928" y="3703320"/>
-            <a:ext cx="5394960" cy="274320"/>
-          </a:xfrm>
-          <a:prstGeom prst="rect">
-            <a:avLst/>
-          </a:prstGeom>
-          <a:noFill/>
-          <a:ln/>
-        </p:spPr>
-        <p:txBody>
-          <a:bodyPr wrap="square" lIns="0" tIns="0" rIns="0" bIns="0" rtlCol="0" anchor="ctr"/>
-          <a:lstStyle/>
-          <a:p>
-            <a:pPr indent="0" marL="0">
-              <a:buNone/>
-            </a:pPr>
-            <a:r>
-              <a:rPr lang="en-US" sz="1050" b="1" spc="200" kern="0" dirty="0">
-                <a:solidFill>
-                  <a:srgbClr val="3C6FC3"/>
-                </a:solidFill>
-                <a:latin typeface="Calibri" pitchFamily="34" charset="0"/>
-                <a:ea typeface="Calibri" pitchFamily="34" charset="-122"/>
-                <a:cs typeface="Calibri" pitchFamily="34" charset="-120"/>
-              </a:rPr>
               <a:t>POURQUOI CRISP-DM ?</a:t>
             </a:r>
             <a:endParaRPr lang="en-US" sz="1050" dirty="0"/>
@@ -5557,13 +4873,13 @@
       </p:sp>
       <p:sp>
         <p:nvSpPr>
-          <p:cNvPr id="27" name="Shape 25"/>
-          <p:cNvSpPr/>
-          <p:nvPr/>
-        </p:nvSpPr>
-        <p:spPr>
-          <a:xfrm>
-            <a:off x="566928" y="4169664"/>
+          <p:cNvPr id="10" name="Shape 7"/>
+          <p:cNvSpPr/>
+          <p:nvPr/>
+        </p:nvSpPr>
+        <p:spPr>
+          <a:xfrm>
+            <a:off x="6720840" y="2286000"/>
             <a:ext cx="109728" cy="109728"/>
           </a:xfrm>
           <a:prstGeom prst="ellipse">
@@ -5582,14 +4898,14 @@
       </p:sp>
       <p:sp>
         <p:nvSpPr>
-          <p:cNvPr id="28" name="Text 26"/>
-          <p:cNvSpPr/>
-          <p:nvPr/>
-        </p:nvSpPr>
-        <p:spPr>
-          <a:xfrm>
-            <a:off x="841248" y="4023360"/>
-            <a:ext cx="5120640" cy="420624"/>
+          <p:cNvPr id="11" name="Text 8"/>
+          <p:cNvSpPr/>
+          <p:nvPr/>
+        </p:nvSpPr>
+        <p:spPr>
+          <a:xfrm>
+            <a:off x="6995160" y="2139696"/>
+            <a:ext cx="4663440" cy="420624"/>
           </a:xfrm>
           <a:prstGeom prst="rect">
             <a:avLst/>
@@ -5605,7 +4921,7 @@
               <a:buNone/>
             </a:pPr>
             <a:r>
-              <a:rPr lang="en-US" sz="1250" dirty="0">
+              <a:rPr lang="en-US" sz="1200" dirty="0">
                 <a:solidFill>
                   <a:srgbClr val="1B2A44"/>
                 </a:solidFill>
@@ -5615,19 +4931,19 @@
               </a:rPr>
               <a:t>Méthodologie de référence des projets décisionnels</a:t>
             </a:r>
-            <a:endParaRPr lang="en-US" sz="1250" dirty="0"/>
-          </a:p>
-        </p:txBody>
-      </p:sp>
-      <p:sp>
-        <p:nvSpPr>
-          <p:cNvPr id="29" name="Shape 27"/>
-          <p:cNvSpPr/>
-          <p:nvPr/>
-        </p:nvSpPr>
-        <p:spPr>
-          <a:xfrm>
-            <a:off x="566928" y="4626864"/>
+            <a:endParaRPr lang="en-US" sz="1200" dirty="0"/>
+          </a:p>
+        </p:txBody>
+      </p:sp>
+      <p:sp>
+        <p:nvSpPr>
+          <p:cNvPr id="12" name="Shape 9"/>
+          <p:cNvSpPr/>
+          <p:nvPr/>
+        </p:nvSpPr>
+        <p:spPr>
+          <a:xfrm>
+            <a:off x="6720840" y="2743200"/>
             <a:ext cx="109728" cy="109728"/>
           </a:xfrm>
           <a:prstGeom prst="ellipse">
@@ -5646,14 +4962,14 @@
       </p:sp>
       <p:sp>
         <p:nvSpPr>
-          <p:cNvPr id="30" name="Text 28"/>
-          <p:cNvSpPr/>
-          <p:nvPr/>
-        </p:nvSpPr>
-        <p:spPr>
-          <a:xfrm>
-            <a:off x="841248" y="4480560"/>
-            <a:ext cx="5120640" cy="420624"/>
+          <p:cNvPr id="13" name="Text 10"/>
+          <p:cNvSpPr/>
+          <p:nvPr/>
+        </p:nvSpPr>
+        <p:spPr>
+          <a:xfrm>
+            <a:off x="6995160" y="2596896"/>
+            <a:ext cx="4663440" cy="420624"/>
           </a:xfrm>
           <a:prstGeom prst="rect">
             <a:avLst/>
@@ -5669,7 +4985,7 @@
               <a:buNone/>
             </a:pPr>
             <a:r>
-              <a:rPr lang="en-US" sz="1250" dirty="0">
+              <a:rPr lang="en-US" sz="1200" dirty="0">
                 <a:solidFill>
                   <a:srgbClr val="1B2A44"/>
                 </a:solidFill>
@@ -5679,19 +4995,19 @@
               </a:rPr>
               <a:t>Ses six phases épousent le déroulement réel du projet</a:t>
             </a:r>
-            <a:endParaRPr lang="en-US" sz="1250" dirty="0"/>
-          </a:p>
-        </p:txBody>
-      </p:sp>
-      <p:sp>
-        <p:nvSpPr>
-          <p:cNvPr id="31" name="Shape 29"/>
-          <p:cNvSpPr/>
-          <p:nvPr/>
-        </p:nvSpPr>
-        <p:spPr>
-          <a:xfrm>
-            <a:off x="566928" y="5084064"/>
+            <a:endParaRPr lang="en-US" sz="1200" dirty="0"/>
+          </a:p>
+        </p:txBody>
+      </p:sp>
+      <p:sp>
+        <p:nvSpPr>
+          <p:cNvPr id="14" name="Shape 11"/>
+          <p:cNvSpPr/>
+          <p:nvPr/>
+        </p:nvSpPr>
+        <p:spPr>
+          <a:xfrm>
+            <a:off x="6720840" y="3200400"/>
             <a:ext cx="109728" cy="109728"/>
           </a:xfrm>
           <a:prstGeom prst="ellipse">
@@ -5710,14 +5026,14 @@
       </p:sp>
       <p:sp>
         <p:nvSpPr>
-          <p:cNvPr id="32" name="Text 30"/>
-          <p:cNvSpPr/>
-          <p:nvPr/>
-        </p:nvSpPr>
-        <p:spPr>
-          <a:xfrm>
-            <a:off x="841248" y="4937760"/>
-            <a:ext cx="5120640" cy="420624"/>
+          <p:cNvPr id="15" name="Text 12"/>
+          <p:cNvSpPr/>
+          <p:nvPr/>
+        </p:nvSpPr>
+        <p:spPr>
+          <a:xfrm>
+            <a:off x="6995160" y="3054096"/>
+            <a:ext cx="4663440" cy="420624"/>
           </a:xfrm>
           <a:prstGeom prst="rect">
             <a:avLst/>
@@ -5733,7 +5049,7 @@
               <a:buNone/>
             </a:pPr>
             <a:r>
-              <a:rPr lang="en-US" sz="1250" dirty="0">
+              <a:rPr lang="en-US" sz="1200" dirty="0">
                 <a:solidFill>
                   <a:srgbClr val="1B2A44"/>
                 </a:solidFill>
@@ -5743,24 +5059,88 @@
               </a:rPr>
               <a:t>Pratiques agiles conservées : itérations et validations</a:t>
             </a:r>
-            <a:endParaRPr lang="en-US" sz="1250" dirty="0"/>
-          </a:p>
-        </p:txBody>
-      </p:sp>
-      <p:sp>
-        <p:nvSpPr>
-          <p:cNvPr id="33" name="Shape 31"/>
-          <p:cNvSpPr/>
-          <p:nvPr/>
-        </p:nvSpPr>
-        <p:spPr>
-          <a:xfrm>
-            <a:off x="6537960" y="3950208"/>
-            <a:ext cx="5120640" cy="1783080"/>
+            <a:endParaRPr lang="en-US" sz="1200" dirty="0"/>
+          </a:p>
+        </p:txBody>
+      </p:sp>
+      <p:sp>
+        <p:nvSpPr>
+          <p:cNvPr id="16" name="Shape 13"/>
+          <p:cNvSpPr/>
+          <p:nvPr/>
+        </p:nvSpPr>
+        <p:spPr>
+          <a:xfrm>
+            <a:off x="6720840" y="3657600"/>
+            <a:ext cx="109728" cy="109728"/>
+          </a:xfrm>
+          <a:prstGeom prst="ellipse">
+            <a:avLst/>
+          </a:prstGeom>
+          <a:solidFill>
+            <a:srgbClr val="3C6FC3"/>
+          </a:solidFill>
+          <a:ln w="12700">
+            <a:solidFill>
+              <a:srgbClr val="3C6FC3"/>
+            </a:solidFill>
+            <a:prstDash val="solid"/>
+          </a:ln>
+        </p:spPr>
+      </p:sp>
+      <p:sp>
+        <p:nvSpPr>
+          <p:cNvPr id="17" name="Text 14"/>
+          <p:cNvSpPr/>
+          <p:nvPr/>
+        </p:nvSpPr>
+        <p:spPr>
+          <a:xfrm>
+            <a:off x="6995160" y="3511296"/>
+            <a:ext cx="4663440" cy="420624"/>
+          </a:xfrm>
+          <a:prstGeom prst="rect">
+            <a:avLst/>
+          </a:prstGeom>
+          <a:noFill/>
+          <a:ln/>
+        </p:spPr>
+        <p:txBody>
+          <a:bodyPr wrap="square" lIns="0" tIns="0" rIns="0" bIns="0" rtlCol="0" anchor="ctr"/>
+          <a:lstStyle/>
+          <a:p>
+            <a:pPr indent="0" marL="0">
+              <a:buNone/>
+            </a:pPr>
+            <a:r>
+              <a:rPr lang="en-US" sz="1200" dirty="0">
+                <a:solidFill>
+                  <a:srgbClr val="1B2A44"/>
+                </a:solidFill>
+                <a:latin typeface="Calibri" pitchFamily="34" charset="0"/>
+                <a:ea typeface="Calibri" pitchFamily="34" charset="-122"/>
+                <a:cs typeface="Calibri" pitchFamily="34" charset="-120"/>
+              </a:rPr>
+              <a:t>Scrum ne couvre pas l'analyse et la valorisation des données</a:t>
+            </a:r>
+            <a:endParaRPr lang="en-US" sz="1200" dirty="0"/>
+          </a:p>
+        </p:txBody>
+      </p:sp>
+      <p:sp>
+        <p:nvSpPr>
+          <p:cNvPr id="18" name="Shape 15"/>
+          <p:cNvSpPr/>
+          <p:nvPr/>
+        </p:nvSpPr>
+        <p:spPr>
+          <a:xfrm>
+            <a:off x="6720840" y="4224528"/>
+            <a:ext cx="4937760" cy="1874520"/>
           </a:xfrm>
           <a:prstGeom prst="roundRect">
             <a:avLst>
-              <a:gd name="adj" fmla="val 3077"/>
+              <a:gd name="adj" fmla="val 2927"/>
             </a:avLst>
           </a:prstGeom>
           <a:solidFill>
@@ -5776,14 +5156,34 @@
       </p:sp>
       <p:sp>
         <p:nvSpPr>
-          <p:cNvPr id="34" name="Text 32"/>
-          <p:cNvSpPr/>
-          <p:nvPr/>
-        </p:nvSpPr>
-        <p:spPr>
-          <a:xfrm>
-            <a:off x="6784848" y="4114800"/>
-            <a:ext cx="4663440" cy="329184"/>
+          <p:cNvPr id="19" name="Shape 16"/>
+          <p:cNvSpPr/>
+          <p:nvPr/>
+        </p:nvSpPr>
+        <p:spPr>
+          <a:xfrm>
+            <a:off x="6720840" y="4224528"/>
+            <a:ext cx="4937760" cy="73152"/>
+          </a:xfrm>
+          <a:prstGeom prst="rect">
+            <a:avLst/>
+          </a:prstGeom>
+          <a:solidFill>
+            <a:srgbClr val="3C6FC3"/>
+          </a:solidFill>
+          <a:ln/>
+        </p:spPr>
+      </p:sp>
+      <p:sp>
+        <p:nvSpPr>
+          <p:cNvPr id="20" name="Text 17"/>
+          <p:cNvSpPr/>
+          <p:nvPr/>
+        </p:nvSpPr>
+        <p:spPr>
+          <a:xfrm>
+            <a:off x="6967728" y="4407408"/>
+            <a:ext cx="4480560" cy="329184"/>
           </a:xfrm>
           <a:prstGeom prst="rect">
             <a:avLst/>
@@ -5815,14 +5215,14 @@
       </p:sp>
       <p:sp>
         <p:nvSpPr>
-          <p:cNvPr id="35" name="Text 33"/>
-          <p:cNvSpPr/>
-          <p:nvPr/>
-        </p:nvSpPr>
-        <p:spPr>
-          <a:xfrm>
-            <a:off x="6784848" y="4480560"/>
-            <a:ext cx="4663440" cy="1143000"/>
+          <p:cNvPr id="21" name="Text 18"/>
+          <p:cNvSpPr/>
+          <p:nvPr/>
+        </p:nvSpPr>
+        <p:spPr>
+          <a:xfrm>
+            <a:off x="6967728" y="4791456"/>
+            <a:ext cx="4480560" cy="1188720"/>
           </a:xfrm>
           <a:prstGeom prst="rect">
             <a:avLst/>

--- a/presentation/Soutenance_PFE_Oussema_Korbosli.pptx
+++ b/presentation/Soutenance_PFE_Oussema_Korbosli.pptx
@@ -22573,7 +22573,7 @@
         </p:nvSpPr>
         <p:spPr>
           <a:xfrm>
-            <a:off x="566928" y="2514600"/>
+            <a:off x="566928" y="1600200"/>
             <a:ext cx="8229600" cy="329184"/>
           </a:xfrm>
           <a:prstGeom prst="rect">
@@ -22612,7 +22612,7 @@
         </p:nvSpPr>
         <p:spPr>
           <a:xfrm>
-            <a:off x="566928" y="2926080"/>
+            <a:off x="566928" y="1993392"/>
             <a:ext cx="10058400" cy="731520"/>
           </a:xfrm>
           <a:prstGeom prst="rect">
@@ -22637,7 +22637,7 @@
                 <a:ea typeface="Georgia" pitchFamily="34" charset="-122"/>
                 <a:cs typeface="Georgia" pitchFamily="34" charset="-120"/>
               </a:rPr>
-              <a:t>Démonstration en direct</a:t>
+              <a:t>Démonstration de l'application web</a:t>
             </a:r>
             <a:endParaRPr lang="en-US" sz="3400" dirty="0"/>
           </a:p>
@@ -22645,14 +22645,34 @@
       </p:sp>
       <p:sp>
         <p:nvSpPr>
-          <p:cNvPr id="6" name="Text 4"/>
-          <p:cNvSpPr/>
-          <p:nvPr/>
-        </p:nvSpPr>
-        <p:spPr>
-          <a:xfrm>
-            <a:off x="566928" y="3749040"/>
-            <a:ext cx="10058400" cy="365760"/>
+          <p:cNvPr id="6" name="Shape 4"/>
+          <p:cNvSpPr/>
+          <p:nvPr/>
+        </p:nvSpPr>
+        <p:spPr>
+          <a:xfrm>
+            <a:off x="566928" y="2816352"/>
+            <a:ext cx="1234440" cy="27432"/>
+          </a:xfrm>
+          <a:prstGeom prst="rect">
+            <a:avLst/>
+          </a:prstGeom>
+          <a:solidFill>
+            <a:srgbClr val="3C6FC3"/>
+          </a:solidFill>
+          <a:ln/>
+        </p:spPr>
+      </p:sp>
+      <p:sp>
+        <p:nvSpPr>
+          <p:cNvPr id="7" name="Text 5"/>
+          <p:cNvSpPr/>
+          <p:nvPr/>
+        </p:nvSpPr>
+        <p:spPr>
+          <a:xfrm>
+            <a:off x="566928" y="3090672"/>
+            <a:ext cx="10058400" cy="329184"/>
           </a:xfrm>
           <a:prstGeom prst="rect">
             <a:avLst/>
@@ -22668,7 +22688,7 @@
               <a:buNone/>
             </a:pPr>
             <a:r>
-              <a:rPr lang="en-US" sz="1500" dirty="0">
+              <a:rPr lang="en-US" sz="1400" dirty="0">
                 <a:solidFill>
                   <a:srgbClr val="CBD8EE"/>
                 </a:solidFill>
@@ -22676,31 +22696,738 @@
                 <a:ea typeface="Calibri" pitchFamily="34" charset="-122"/>
                 <a:cs typeface="Calibri" pitchFamily="34" charset="-120"/>
               </a:rPr>
-              <a:t>Application web · tableau de bord embarqué · rapport Power BI</a:t>
-            </a:r>
-            <a:endParaRPr lang="en-US" sz="1500" dirty="0"/>
-          </a:p>
-        </p:txBody>
-      </p:sp>
-      <p:sp>
-        <p:nvSpPr>
-          <p:cNvPr id="7" name="Shape 5"/>
-          <p:cNvSpPr/>
-          <p:nvPr/>
-        </p:nvSpPr>
-        <p:spPr>
-          <a:xfrm>
-            <a:off x="566928" y="4343400"/>
-            <a:ext cx="1234440" cy="27432"/>
-          </a:xfrm>
-          <a:prstGeom prst="rect">
-            <a:avLst/>
-          </a:prstGeom>
-          <a:solidFill>
-            <a:srgbClr val="3C6FC3"/>
-          </a:solidFill>
-          <a:ln/>
-        </p:spPr>
+              <a:t>Parcours présenté en direct :</a:t>
+            </a:r>
+            <a:endParaRPr lang="en-US" sz="1400" dirty="0"/>
+          </a:p>
+        </p:txBody>
+      </p:sp>
+      <p:sp>
+        <p:nvSpPr>
+          <p:cNvPr id="8" name="Shape 6"/>
+          <p:cNvSpPr/>
+          <p:nvPr/>
+        </p:nvSpPr>
+        <p:spPr>
+          <a:xfrm>
+            <a:off x="566928" y="3611880"/>
+            <a:ext cx="2468880" cy="1600200"/>
+          </a:xfrm>
+          <a:prstGeom prst="roundRect">
+            <a:avLst>
+              <a:gd name="adj" fmla="val 4571"/>
+            </a:avLst>
+          </a:prstGeom>
+          <a:solidFill>
+            <a:srgbClr val="1D4EA0"/>
+          </a:solidFill>
+          <a:ln w="12700">
+            <a:solidFill>
+              <a:srgbClr val="1D4EA0"/>
+            </a:solidFill>
+            <a:prstDash val="solid"/>
+          </a:ln>
+        </p:spPr>
+      </p:sp>
+      <p:sp>
+        <p:nvSpPr>
+          <p:cNvPr id="9" name="Shape 7"/>
+          <p:cNvSpPr/>
+          <p:nvPr/>
+        </p:nvSpPr>
+        <p:spPr>
+          <a:xfrm>
+            <a:off x="1600200" y="3803904"/>
+            <a:ext cx="402336" cy="402336"/>
+          </a:xfrm>
+          <a:prstGeom prst="ellipse">
+            <a:avLst/>
+          </a:prstGeom>
+          <a:solidFill>
+            <a:srgbClr val="0A2558"/>
+          </a:solidFill>
+          <a:ln w="12700">
+            <a:solidFill>
+              <a:srgbClr val="0A2558"/>
+            </a:solidFill>
+            <a:prstDash val="solid"/>
+          </a:ln>
+        </p:spPr>
+      </p:sp>
+      <p:sp>
+        <p:nvSpPr>
+          <p:cNvPr id="10" name="Text 8"/>
+          <p:cNvSpPr/>
+          <p:nvPr/>
+        </p:nvSpPr>
+        <p:spPr>
+          <a:xfrm>
+            <a:off x="1600200" y="3803904"/>
+            <a:ext cx="402336" cy="402336"/>
+          </a:xfrm>
+          <a:prstGeom prst="rect">
+            <a:avLst/>
+          </a:prstGeom>
+          <a:noFill/>
+          <a:ln/>
+        </p:spPr>
+        <p:txBody>
+          <a:bodyPr wrap="square" lIns="0" tIns="0" rIns="0" bIns="0" rtlCol="0" anchor="ctr"/>
+          <a:lstStyle/>
+          <a:p>
+            <a:pPr algn="ctr" indent="0" marL="0">
+              <a:buNone/>
+            </a:pPr>
+            <a:r>
+              <a:rPr lang="en-US" sz="1300" b="1" dirty="0">
+                <a:solidFill>
+                  <a:srgbClr val="FFFFFF"/>
+                </a:solidFill>
+                <a:latin typeface="Georgia" pitchFamily="34" charset="0"/>
+                <a:ea typeface="Georgia" pitchFamily="34" charset="-122"/>
+                <a:cs typeface="Georgia" pitchFamily="34" charset="-120"/>
+              </a:rPr>
+              <a:t>1</a:t>
+            </a:r>
+            <a:endParaRPr lang="en-US" sz="1300" dirty="0"/>
+          </a:p>
+        </p:txBody>
+      </p:sp>
+      <p:sp>
+        <p:nvSpPr>
+          <p:cNvPr id="11" name="Text 9"/>
+          <p:cNvSpPr/>
+          <p:nvPr/>
+        </p:nvSpPr>
+        <p:spPr>
+          <a:xfrm>
+            <a:off x="713232" y="4297680"/>
+            <a:ext cx="2176272" cy="365760"/>
+          </a:xfrm>
+          <a:prstGeom prst="rect">
+            <a:avLst/>
+          </a:prstGeom>
+          <a:noFill/>
+          <a:ln/>
+        </p:spPr>
+        <p:txBody>
+          <a:bodyPr wrap="square" lIns="0" tIns="0" rIns="0" bIns="0" rtlCol="0" anchor="ctr"/>
+          <a:lstStyle/>
+          <a:p>
+            <a:pPr algn="ctr" indent="0" marL="0">
+              <a:buNone/>
+            </a:pPr>
+            <a:r>
+              <a:rPr lang="en-US" sz="1350" b="1" dirty="0">
+                <a:solidFill>
+                  <a:srgbClr val="FFFFFF"/>
+                </a:solidFill>
+                <a:latin typeface="Georgia" pitchFamily="34" charset="0"/>
+                <a:ea typeface="Georgia" pitchFamily="34" charset="-122"/>
+                <a:cs typeface="Georgia" pitchFamily="34" charset="-120"/>
+              </a:rPr>
+              <a:t>Authentification</a:t>
+            </a:r>
+            <a:endParaRPr lang="en-US" sz="1350" dirty="0"/>
+          </a:p>
+        </p:txBody>
+      </p:sp>
+      <p:sp>
+        <p:nvSpPr>
+          <p:cNvPr id="12" name="Text 10"/>
+          <p:cNvSpPr/>
+          <p:nvPr/>
+        </p:nvSpPr>
+        <p:spPr>
+          <a:xfrm>
+            <a:off x="713232" y="4663440"/>
+            <a:ext cx="2176272" cy="457200"/>
+          </a:xfrm>
+          <a:prstGeom prst="rect">
+            <a:avLst/>
+          </a:prstGeom>
+          <a:noFill/>
+          <a:ln/>
+        </p:spPr>
+        <p:txBody>
+          <a:bodyPr wrap="square" lIns="0" tIns="0" rIns="0" bIns="0" rtlCol="0" anchor="t"/>
+          <a:lstStyle/>
+          <a:p>
+            <a:pPr algn="ctr" indent="0" marL="0">
+              <a:lnSpc>
+                <a:spcPts val="1400"/>
+              </a:lnSpc>
+              <a:buNone/>
+            </a:pPr>
+            <a:r>
+              <a:rPr lang="en-US" sz="1050" dirty="0">
+                <a:solidFill>
+                  <a:srgbClr val="CBD8EE"/>
+                </a:solidFill>
+                <a:latin typeface="Calibri" pitchFamily="34" charset="0"/>
+                <a:ea typeface="Calibri" pitchFamily="34" charset="-122"/>
+                <a:cs typeface="Calibri" pitchFamily="34" charset="-120"/>
+              </a:rPr>
+              <a:t>Connexion et contrôle des rôles</a:t>
+            </a:r>
+            <a:endParaRPr lang="en-US" sz="1050" dirty="0"/>
+          </a:p>
+        </p:txBody>
+      </p:sp>
+      <p:sp>
+        <p:nvSpPr>
+          <p:cNvPr id="13" name="Shape 11"/>
+          <p:cNvSpPr/>
+          <p:nvPr/>
+        </p:nvSpPr>
+        <p:spPr>
+          <a:xfrm>
+            <a:off x="3383280" y="3611880"/>
+            <a:ext cx="2468880" cy="1600200"/>
+          </a:xfrm>
+          <a:prstGeom prst="roundRect">
+            <a:avLst>
+              <a:gd name="adj" fmla="val 4571"/>
+            </a:avLst>
+          </a:prstGeom>
+          <a:solidFill>
+            <a:srgbClr val="1D4EA0"/>
+          </a:solidFill>
+          <a:ln w="12700">
+            <a:solidFill>
+              <a:srgbClr val="1D4EA0"/>
+            </a:solidFill>
+            <a:prstDash val="solid"/>
+          </a:ln>
+        </p:spPr>
+      </p:sp>
+      <p:sp>
+        <p:nvSpPr>
+          <p:cNvPr id="14" name="Shape 12"/>
+          <p:cNvSpPr/>
+          <p:nvPr/>
+        </p:nvSpPr>
+        <p:spPr>
+          <a:xfrm>
+            <a:off x="4416552" y="3803904"/>
+            <a:ext cx="402336" cy="402336"/>
+          </a:xfrm>
+          <a:prstGeom prst="ellipse">
+            <a:avLst/>
+          </a:prstGeom>
+          <a:solidFill>
+            <a:srgbClr val="0A2558"/>
+          </a:solidFill>
+          <a:ln w="12700">
+            <a:solidFill>
+              <a:srgbClr val="0A2558"/>
+            </a:solidFill>
+            <a:prstDash val="solid"/>
+          </a:ln>
+        </p:spPr>
+      </p:sp>
+      <p:sp>
+        <p:nvSpPr>
+          <p:cNvPr id="15" name="Text 13"/>
+          <p:cNvSpPr/>
+          <p:nvPr/>
+        </p:nvSpPr>
+        <p:spPr>
+          <a:xfrm>
+            <a:off x="4416552" y="3803904"/>
+            <a:ext cx="402336" cy="402336"/>
+          </a:xfrm>
+          <a:prstGeom prst="rect">
+            <a:avLst/>
+          </a:prstGeom>
+          <a:noFill/>
+          <a:ln/>
+        </p:spPr>
+        <p:txBody>
+          <a:bodyPr wrap="square" lIns="0" tIns="0" rIns="0" bIns="0" rtlCol="0" anchor="ctr"/>
+          <a:lstStyle/>
+          <a:p>
+            <a:pPr algn="ctr" indent="0" marL="0">
+              <a:buNone/>
+            </a:pPr>
+            <a:r>
+              <a:rPr lang="en-US" sz="1300" b="1" dirty="0">
+                <a:solidFill>
+                  <a:srgbClr val="FFFFFF"/>
+                </a:solidFill>
+                <a:latin typeface="Georgia" pitchFamily="34" charset="0"/>
+                <a:ea typeface="Georgia" pitchFamily="34" charset="-122"/>
+                <a:cs typeface="Georgia" pitchFamily="34" charset="-120"/>
+              </a:rPr>
+              <a:t>2</a:t>
+            </a:r>
+            <a:endParaRPr lang="en-US" sz="1300" dirty="0"/>
+          </a:p>
+        </p:txBody>
+      </p:sp>
+      <p:sp>
+        <p:nvSpPr>
+          <p:cNvPr id="16" name="Text 14"/>
+          <p:cNvSpPr/>
+          <p:nvPr/>
+        </p:nvSpPr>
+        <p:spPr>
+          <a:xfrm>
+            <a:off x="3529584" y="4297680"/>
+            <a:ext cx="2176272" cy="365760"/>
+          </a:xfrm>
+          <a:prstGeom prst="rect">
+            <a:avLst/>
+          </a:prstGeom>
+          <a:noFill/>
+          <a:ln/>
+        </p:spPr>
+        <p:txBody>
+          <a:bodyPr wrap="square" lIns="0" tIns="0" rIns="0" bIns="0" rtlCol="0" anchor="ctr"/>
+          <a:lstStyle/>
+          <a:p>
+            <a:pPr algn="ctr" indent="0" marL="0">
+              <a:buNone/>
+            </a:pPr>
+            <a:r>
+              <a:rPr lang="en-US" sz="1350" b="1" dirty="0">
+                <a:solidFill>
+                  <a:srgbClr val="FFFFFF"/>
+                </a:solidFill>
+                <a:latin typeface="Georgia" pitchFamily="34" charset="0"/>
+                <a:ea typeface="Georgia" pitchFamily="34" charset="-122"/>
+                <a:cs typeface="Georgia" pitchFamily="34" charset="-120"/>
+              </a:rPr>
+              <a:t>Gestion du réseau</a:t>
+            </a:r>
+            <a:endParaRPr lang="en-US" sz="1350" dirty="0"/>
+          </a:p>
+        </p:txBody>
+      </p:sp>
+      <p:sp>
+        <p:nvSpPr>
+          <p:cNvPr id="17" name="Text 15"/>
+          <p:cNvSpPr/>
+          <p:nvPr/>
+        </p:nvSpPr>
+        <p:spPr>
+          <a:xfrm>
+            <a:off x="3529584" y="4663440"/>
+            <a:ext cx="2176272" cy="457200"/>
+          </a:xfrm>
+          <a:prstGeom prst="rect">
+            <a:avLst/>
+          </a:prstGeom>
+          <a:noFill/>
+          <a:ln/>
+        </p:spPr>
+        <p:txBody>
+          <a:bodyPr wrap="square" lIns="0" tIns="0" rIns="0" bIns="0" rtlCol="0" anchor="t"/>
+          <a:lstStyle/>
+          <a:p>
+            <a:pPr algn="ctr" indent="0" marL="0">
+              <a:lnSpc>
+                <a:spcPts val="1400"/>
+              </a:lnSpc>
+              <a:buNone/>
+            </a:pPr>
+            <a:r>
+              <a:rPr lang="en-US" sz="1050" dirty="0">
+                <a:solidFill>
+                  <a:srgbClr val="CBD8EE"/>
+                </a:solidFill>
+                <a:latin typeface="Calibri" pitchFamily="34" charset="0"/>
+                <a:ea typeface="Calibri" pitchFamily="34" charset="-122"/>
+                <a:cs typeface="Calibri" pitchFamily="34" charset="-120"/>
+              </a:rPr>
+              <a:t>Agences, employés, clients et objectifs</a:t>
+            </a:r>
+            <a:endParaRPr lang="en-US" sz="1050" dirty="0"/>
+          </a:p>
+        </p:txBody>
+      </p:sp>
+      <p:sp>
+        <p:nvSpPr>
+          <p:cNvPr id="18" name="Shape 16"/>
+          <p:cNvSpPr/>
+          <p:nvPr/>
+        </p:nvSpPr>
+        <p:spPr>
+          <a:xfrm>
+            <a:off x="6199632" y="3611880"/>
+            <a:ext cx="2468880" cy="1600200"/>
+          </a:xfrm>
+          <a:prstGeom prst="roundRect">
+            <a:avLst>
+              <a:gd name="adj" fmla="val 4571"/>
+            </a:avLst>
+          </a:prstGeom>
+          <a:solidFill>
+            <a:srgbClr val="1D4EA0"/>
+          </a:solidFill>
+          <a:ln w="12700">
+            <a:solidFill>
+              <a:srgbClr val="1D4EA0"/>
+            </a:solidFill>
+            <a:prstDash val="solid"/>
+          </a:ln>
+        </p:spPr>
+      </p:sp>
+      <p:sp>
+        <p:nvSpPr>
+          <p:cNvPr id="19" name="Shape 17"/>
+          <p:cNvSpPr/>
+          <p:nvPr/>
+        </p:nvSpPr>
+        <p:spPr>
+          <a:xfrm>
+            <a:off x="7232904" y="3803904"/>
+            <a:ext cx="402336" cy="402336"/>
+          </a:xfrm>
+          <a:prstGeom prst="ellipse">
+            <a:avLst/>
+          </a:prstGeom>
+          <a:solidFill>
+            <a:srgbClr val="0A2558"/>
+          </a:solidFill>
+          <a:ln w="12700">
+            <a:solidFill>
+              <a:srgbClr val="0A2558"/>
+            </a:solidFill>
+            <a:prstDash val="solid"/>
+          </a:ln>
+        </p:spPr>
+      </p:sp>
+      <p:sp>
+        <p:nvSpPr>
+          <p:cNvPr id="20" name="Text 18"/>
+          <p:cNvSpPr/>
+          <p:nvPr/>
+        </p:nvSpPr>
+        <p:spPr>
+          <a:xfrm>
+            <a:off x="7232904" y="3803904"/>
+            <a:ext cx="402336" cy="402336"/>
+          </a:xfrm>
+          <a:prstGeom prst="rect">
+            <a:avLst/>
+          </a:prstGeom>
+          <a:noFill/>
+          <a:ln/>
+        </p:spPr>
+        <p:txBody>
+          <a:bodyPr wrap="square" lIns="0" tIns="0" rIns="0" bIns="0" rtlCol="0" anchor="ctr"/>
+          <a:lstStyle/>
+          <a:p>
+            <a:pPr algn="ctr" indent="0" marL="0">
+              <a:buNone/>
+            </a:pPr>
+            <a:r>
+              <a:rPr lang="en-US" sz="1300" b="1" dirty="0">
+                <a:solidFill>
+                  <a:srgbClr val="FFFFFF"/>
+                </a:solidFill>
+                <a:latin typeface="Georgia" pitchFamily="34" charset="0"/>
+                <a:ea typeface="Georgia" pitchFamily="34" charset="-122"/>
+                <a:cs typeface="Georgia" pitchFamily="34" charset="-120"/>
+              </a:rPr>
+              <a:t>3</a:t>
+            </a:r>
+            <a:endParaRPr lang="en-US" sz="1300" dirty="0"/>
+          </a:p>
+        </p:txBody>
+      </p:sp>
+      <p:sp>
+        <p:nvSpPr>
+          <p:cNvPr id="21" name="Text 19"/>
+          <p:cNvSpPr/>
+          <p:nvPr/>
+        </p:nvSpPr>
+        <p:spPr>
+          <a:xfrm>
+            <a:off x="6345936" y="4297680"/>
+            <a:ext cx="2176272" cy="365760"/>
+          </a:xfrm>
+          <a:prstGeom prst="rect">
+            <a:avLst/>
+          </a:prstGeom>
+          <a:noFill/>
+          <a:ln/>
+        </p:spPr>
+        <p:txBody>
+          <a:bodyPr wrap="square" lIns="0" tIns="0" rIns="0" bIns="0" rtlCol="0" anchor="ctr"/>
+          <a:lstStyle/>
+          <a:p>
+            <a:pPr algn="ctr" indent="0" marL="0">
+              <a:buNone/>
+            </a:pPr>
+            <a:r>
+              <a:rPr lang="en-US" sz="1350" b="1" dirty="0">
+                <a:solidFill>
+                  <a:srgbClr val="FFFFFF"/>
+                </a:solidFill>
+                <a:latin typeface="Georgia" pitchFamily="34" charset="0"/>
+                <a:ea typeface="Georgia" pitchFamily="34" charset="-122"/>
+                <a:cs typeface="Georgia" pitchFamily="34" charset="-120"/>
+              </a:rPr>
+              <a:t>Pointage</a:t>
+            </a:r>
+            <a:endParaRPr lang="en-US" sz="1350" dirty="0"/>
+          </a:p>
+        </p:txBody>
+      </p:sp>
+      <p:sp>
+        <p:nvSpPr>
+          <p:cNvPr id="22" name="Text 20"/>
+          <p:cNvSpPr/>
+          <p:nvPr/>
+        </p:nvSpPr>
+        <p:spPr>
+          <a:xfrm>
+            <a:off x="6345936" y="4663440"/>
+            <a:ext cx="2176272" cy="457200"/>
+          </a:xfrm>
+          <a:prstGeom prst="rect">
+            <a:avLst/>
+          </a:prstGeom>
+          <a:noFill/>
+          <a:ln/>
+        </p:spPr>
+        <p:txBody>
+          <a:bodyPr wrap="square" lIns="0" tIns="0" rIns="0" bIns="0" rtlCol="0" anchor="t"/>
+          <a:lstStyle/>
+          <a:p>
+            <a:pPr algn="ctr" indent="0" marL="0">
+              <a:lnSpc>
+                <a:spcPts val="1400"/>
+              </a:lnSpc>
+              <a:buNone/>
+            </a:pPr>
+            <a:r>
+              <a:rPr lang="en-US" sz="1050" dirty="0">
+                <a:solidFill>
+                  <a:srgbClr val="CBD8EE"/>
+                </a:solidFill>
+                <a:latin typeface="Calibri" pitchFamily="34" charset="0"/>
+                <a:ea typeface="Calibri" pitchFamily="34" charset="-122"/>
+                <a:cs typeface="Calibri" pitchFamily="34" charset="-120"/>
+              </a:rPr>
+              <a:t>Arrivée, départ et statut de présence</a:t>
+            </a:r>
+            <a:endParaRPr lang="en-US" sz="1050" dirty="0"/>
+          </a:p>
+        </p:txBody>
+      </p:sp>
+      <p:sp>
+        <p:nvSpPr>
+          <p:cNvPr id="23" name="Shape 21"/>
+          <p:cNvSpPr/>
+          <p:nvPr/>
+        </p:nvSpPr>
+        <p:spPr>
+          <a:xfrm>
+            <a:off x="9015984" y="3611880"/>
+            <a:ext cx="2468880" cy="1600200"/>
+          </a:xfrm>
+          <a:prstGeom prst="roundRect">
+            <a:avLst>
+              <a:gd name="adj" fmla="val 4571"/>
+            </a:avLst>
+          </a:prstGeom>
+          <a:solidFill>
+            <a:srgbClr val="1D4EA0"/>
+          </a:solidFill>
+          <a:ln w="12700">
+            <a:solidFill>
+              <a:srgbClr val="1D4EA0"/>
+            </a:solidFill>
+            <a:prstDash val="solid"/>
+          </a:ln>
+        </p:spPr>
+      </p:sp>
+      <p:sp>
+        <p:nvSpPr>
+          <p:cNvPr id="24" name="Shape 22"/>
+          <p:cNvSpPr/>
+          <p:nvPr/>
+        </p:nvSpPr>
+        <p:spPr>
+          <a:xfrm>
+            <a:off x="10049256" y="3803904"/>
+            <a:ext cx="402336" cy="402336"/>
+          </a:xfrm>
+          <a:prstGeom prst="ellipse">
+            <a:avLst/>
+          </a:prstGeom>
+          <a:solidFill>
+            <a:srgbClr val="0A2558"/>
+          </a:solidFill>
+          <a:ln w="12700">
+            <a:solidFill>
+              <a:srgbClr val="0A2558"/>
+            </a:solidFill>
+            <a:prstDash val="solid"/>
+          </a:ln>
+        </p:spPr>
+      </p:sp>
+      <p:sp>
+        <p:nvSpPr>
+          <p:cNvPr id="25" name="Text 23"/>
+          <p:cNvSpPr/>
+          <p:nvPr/>
+        </p:nvSpPr>
+        <p:spPr>
+          <a:xfrm>
+            <a:off x="10049256" y="3803904"/>
+            <a:ext cx="402336" cy="402336"/>
+          </a:xfrm>
+          <a:prstGeom prst="rect">
+            <a:avLst/>
+          </a:prstGeom>
+          <a:noFill/>
+          <a:ln/>
+        </p:spPr>
+        <p:txBody>
+          <a:bodyPr wrap="square" lIns="0" tIns="0" rIns="0" bIns="0" rtlCol="0" anchor="ctr"/>
+          <a:lstStyle/>
+          <a:p>
+            <a:pPr algn="ctr" indent="0" marL="0">
+              <a:buNone/>
+            </a:pPr>
+            <a:r>
+              <a:rPr lang="en-US" sz="1300" b="1" dirty="0">
+                <a:solidFill>
+                  <a:srgbClr val="FFFFFF"/>
+                </a:solidFill>
+                <a:latin typeface="Georgia" pitchFamily="34" charset="0"/>
+                <a:ea typeface="Georgia" pitchFamily="34" charset="-122"/>
+                <a:cs typeface="Georgia" pitchFamily="34" charset="-120"/>
+              </a:rPr>
+              <a:t>4</a:t>
+            </a:r>
+            <a:endParaRPr lang="en-US" sz="1300" dirty="0"/>
+          </a:p>
+        </p:txBody>
+      </p:sp>
+      <p:sp>
+        <p:nvSpPr>
+          <p:cNvPr id="26" name="Text 24"/>
+          <p:cNvSpPr/>
+          <p:nvPr/>
+        </p:nvSpPr>
+        <p:spPr>
+          <a:xfrm>
+            <a:off x="9162288" y="4297680"/>
+            <a:ext cx="2176272" cy="365760"/>
+          </a:xfrm>
+          <a:prstGeom prst="rect">
+            <a:avLst/>
+          </a:prstGeom>
+          <a:noFill/>
+          <a:ln/>
+        </p:spPr>
+        <p:txBody>
+          <a:bodyPr wrap="square" lIns="0" tIns="0" rIns="0" bIns="0" rtlCol="0" anchor="ctr"/>
+          <a:lstStyle/>
+          <a:p>
+            <a:pPr algn="ctr" indent="0" marL="0">
+              <a:buNone/>
+            </a:pPr>
+            <a:r>
+              <a:rPr lang="en-US" sz="1350" b="1" dirty="0">
+                <a:solidFill>
+                  <a:srgbClr val="FFFFFF"/>
+                </a:solidFill>
+                <a:latin typeface="Georgia" pitchFamily="34" charset="0"/>
+                <a:ea typeface="Georgia" pitchFamily="34" charset="-122"/>
+                <a:cs typeface="Georgia" pitchFamily="34" charset="-120"/>
+              </a:rPr>
+              <a:t>Tableau de bord</a:t>
+            </a:r>
+            <a:endParaRPr lang="en-US" sz="1350" dirty="0"/>
+          </a:p>
+        </p:txBody>
+      </p:sp>
+      <p:sp>
+        <p:nvSpPr>
+          <p:cNvPr id="27" name="Text 25"/>
+          <p:cNvSpPr/>
+          <p:nvPr/>
+        </p:nvSpPr>
+        <p:spPr>
+          <a:xfrm>
+            <a:off x="9162288" y="4663440"/>
+            <a:ext cx="2176272" cy="457200"/>
+          </a:xfrm>
+          <a:prstGeom prst="rect">
+            <a:avLst/>
+          </a:prstGeom>
+          <a:noFill/>
+          <a:ln/>
+        </p:spPr>
+        <p:txBody>
+          <a:bodyPr wrap="square" lIns="0" tIns="0" rIns="0" bIns="0" rtlCol="0" anchor="t"/>
+          <a:lstStyle/>
+          <a:p>
+            <a:pPr algn="ctr" indent="0" marL="0">
+              <a:lnSpc>
+                <a:spcPts val="1400"/>
+              </a:lnSpc>
+              <a:buNone/>
+            </a:pPr>
+            <a:r>
+              <a:rPr lang="en-US" sz="1050" dirty="0">
+                <a:solidFill>
+                  <a:srgbClr val="CBD8EE"/>
+                </a:solidFill>
+                <a:latin typeface="Calibri" pitchFamily="34" charset="0"/>
+                <a:ea typeface="Calibri" pitchFamily="34" charset="-122"/>
+                <a:cs typeface="Calibri" pitchFamily="34" charset="-120"/>
+              </a:rPr>
+              <a:t>Indicateurs de synthèse de l'application</a:t>
+            </a:r>
+            <a:endParaRPr lang="en-US" sz="1050" dirty="0"/>
+          </a:p>
+        </p:txBody>
+      </p:sp>
+      <p:sp>
+        <p:nvSpPr>
+          <p:cNvPr id="28" name="Text 26"/>
+          <p:cNvSpPr/>
+          <p:nvPr/>
+        </p:nvSpPr>
+        <p:spPr>
+          <a:xfrm>
+            <a:off x="566928" y="5440680"/>
+            <a:ext cx="10058400" cy="365760"/>
+          </a:xfrm>
+          <a:prstGeom prst="rect">
+            <a:avLst/>
+          </a:prstGeom>
+          <a:noFill/>
+          <a:ln/>
+        </p:spPr>
+        <p:txBody>
+          <a:bodyPr wrap="square" lIns="0" tIns="0" rIns="0" bIns="0" rtlCol="0" anchor="ctr"/>
+          <a:lstStyle/>
+          <a:p>
+            <a:pPr indent="0" marL="0">
+              <a:buNone/>
+            </a:pPr>
+            <a:r>
+              <a:rPr lang="en-US" sz="1200" i="1" dirty="0">
+                <a:solidFill>
+                  <a:srgbClr val="9FB6DC"/>
+                </a:solidFill>
+                <a:latin typeface="Calibri" pitchFamily="34" charset="0"/>
+                <a:ea typeface="Calibri" pitchFamily="34" charset="-122"/>
+                <a:cs typeface="Calibri" pitchFamily="34" charset="-120"/>
+              </a:rPr>
+              <a:t>Les rapports Power BI ont été présentés en images dans la partie précédente.</a:t>
+            </a:r>
+            <a:endParaRPr lang="en-US" sz="1200" dirty="0"/>
+          </a:p>
+        </p:txBody>
       </p:sp>
     </p:spTree>
   </p:cSld>

--- a/presentation/Soutenance_PFE_Oussema_Korbosli.pptx
+++ b/presentation/Soutenance_PFE_Oussema_Korbosli.pptx
@@ -4482,7 +4482,7 @@
                 <a:ea typeface="Calibri" pitchFamily="34" charset="-122"/>
                 <a:cs typeface="Calibri" pitchFamily="34" charset="-120"/>
               </a:rPr>
-              <a:t>M. Melek Aziz Elmoula</a:t>
+              <a:t>M. ELMOULA Melek Aziz</a:t>
             </a:r>
             <a:endParaRPr lang="en-US" sz="1250" dirty="0"/>
           </a:p>
@@ -4535,7 +4535,7 @@
                 <a:ea typeface="Calibri" pitchFamily="34" charset="-122"/>
                 <a:cs typeface="Calibri" pitchFamily="34" charset="-120"/>
               </a:rPr>
-              <a:t>M. Heni Abidi</a:t>
+              <a:t>M. ABIDI Heni</a:t>
             </a:r>
             <a:endParaRPr lang="en-US" sz="1250" dirty="0"/>
           </a:p>
@@ -27430,7 +27430,7 @@
                 <a:ea typeface="Georgia" pitchFamily="34" charset="-122"/>
                 <a:cs typeface="Georgia" pitchFamily="34" charset="-120"/>
               </a:rPr>
-              <a:t>M. Melek Aziz Elmoula</a:t>
+              <a:t>M. ELMOULA Melek Aziz</a:t>
             </a:r>
             <a:endParaRPr lang="en-US" sz="1450" dirty="0"/>
           </a:p>

--- a/presentation/Soutenance_PFE_Oussema_Korbosli.pptx
+++ b/presentation/Soutenance_PFE_Oussema_Korbosli.pptx
@@ -5976,7 +5976,7 @@
                 <a:ea typeface="Calibri" pitchFamily="34" charset="-122"/>
                 <a:cs typeface="Calibri" pitchFamily="34" charset="-120"/>
               </a:rPr>
-              <a:t>Gère les agences, les employés et les clients · valide les demandes · consulte le journal d'audit · supervise le volet décisionnel</a:t>
+              <a:t>Couvre les 13 cas d'utilisation : rôles et droits · agences, employés, clients · demandes · pointage · journal d'audit · volet décisionnel</a:t>
             </a:r>
             <a:endParaRPr lang="en-US" sz="1200" dirty="0"/>
           </a:p>
@@ -6207,7 +6207,7 @@
                 <a:ea typeface="Calibri" pitchFamily="34" charset="-122"/>
                 <a:cs typeface="Calibri" pitchFamily="34" charset="-120"/>
               </a:rPr>
-              <a:t>Soumet les demandes de création · valide les modifications des employés · consulte les objectifs et les indicateurs</a:t>
+              <a:t>Consulte les employés, les objectifs et le tableau de bord · soumet les demandes de création · valide les modifications des employés</a:t>
             </a:r>
             <a:endParaRPr lang="en-US" sz="1200" dirty="0"/>
           </a:p>
@@ -6438,7 +6438,7 @@
                 <a:ea typeface="Calibri" pitchFamily="34" charset="-122"/>
                 <a:cs typeface="Calibri" pitchFamily="34" charset="-120"/>
               </a:rPr>
-              <a:t>Consulte les données autorisées · effectue son pointage · soumet les demandes le concernant</a:t>
+              <a:t>Pointe son arrivée et son départ · soumet les demandes de modification de ses propres informations · reçoit ses notifications</a:t>
             </a:r>
             <a:endParaRPr lang="en-US" sz="1200" dirty="0"/>
           </a:p>
@@ -7496,7 +7496,7 @@
                 <a:ea typeface="Calibri" pitchFamily="34" charset="-122"/>
                 <a:cs typeface="Calibri" pitchFamily="34" charset="-120"/>
               </a:rPr>
-              <a:t>Demandes soumises, validées ou refusées, journalisées</a:t>
+              <a:t>Double validation : approbation du directeur puis exécution par l'admin</a:t>
             </a:r>
             <a:endParaRPr lang="en-US" sz="1200" dirty="0"/>
           </a:p>
@@ -10663,8 +10663,8 @@
         </p:blipFill>
         <p:spPr>
           <a:xfrm>
-            <a:off x="776740" y="1298448"/>
-            <a:ext cx="7444217" cy="4846320"/>
+            <a:off x="1514819" y="1298448"/>
+            <a:ext cx="5968058" cy="4846320"/>
           </a:xfrm>
           <a:prstGeom prst="rect">
             <a:avLst/>
@@ -10768,7 +10768,7 @@
                 <a:ea typeface="Calibri" pitchFamily="34" charset="-122"/>
                 <a:cs typeface="Calibri" pitchFamily="34" charset="-120"/>
               </a:rPr>
-              <a:t>Trois acteurs distincts</a:t>
+              <a:t>Trois acteurs, treize cas d'utilisation</a:t>
             </a:r>
             <a:endParaRPr lang="en-US" sz="1150" dirty="0"/>
           </a:p>
@@ -10832,7 +10832,7 @@
                 <a:ea typeface="Calibri" pitchFamily="34" charset="-122"/>
                 <a:cs typeface="Calibri" pitchFamily="34" charset="-120"/>
               </a:rPr>
-              <a:t>« S'authentifier » commun à tous (include)</a:t>
+              <a:t>Chaque cas inclut « S'authentifier » (include)</a:t>
             </a:r>
             <a:endParaRPr lang="en-US" sz="1150" dirty="0"/>
           </a:p>
@@ -10896,7 +10896,7 @@
                 <a:ea typeface="Calibri" pitchFamily="34" charset="-122"/>
                 <a:cs typeface="Calibri" pitchFamily="34" charset="-120"/>
               </a:rPr>
-              <a:t>L'administrateur concentre la gestion</a:t>
+              <a:t>Administrateur : les 13 cas, sans exception</a:t>
             </a:r>
             <a:endParaRPr lang="en-US" sz="1150" dirty="0"/>
           </a:p>
@@ -10960,7 +10960,7 @@
                 <a:ea typeface="Calibri" pitchFamily="34" charset="-122"/>
                 <a:cs typeface="Calibri" pitchFamily="34" charset="-120"/>
               </a:rPr>
-              <a:t>Le directeur soumet et consulte</a:t>
+              <a:t>Directeur commercial : 5 cas, dont les employés en consultation</a:t>
             </a:r>
             <a:endParaRPr lang="en-US" sz="1150" dirty="0"/>
           </a:p>
@@ -11024,7 +11024,7 @@
                 <a:ea typeface="Calibri" pitchFamily="34" charset="-122"/>
                 <a:cs typeface="Calibri" pitchFamily="34" charset="-120"/>
               </a:rPr>
-              <a:t>L'utilisateur pointe et consulte</a:t>
+              <a:t>Utilisateur : 3 cas — pointage, demandes, notifications</a:t>
             </a:r>
             <a:endParaRPr lang="en-US" sz="1150" dirty="0"/>
           </a:p>
@@ -11609,7 +11609,7 @@
                 <a:ea typeface="Calibri" pitchFamily="34" charset="-122"/>
                 <a:cs typeface="Calibri" pitchFamily="34" charset="-120"/>
               </a:rPr>
-              <a:t>Un grain unique — l'agence — et peu de dimensions : le modèle en étoile offre la lisibilité attendue par un outil libre-service comme Power BI.</a:t>
+              <a:t>Des grains homogènes — l'agence, puis le couple agence × gestionnaire — et peu de dimensions : l'étoile offre la lisibilité attendue par un outil libre-service comme Power BI.</a:t>
             </a:r>
             <a:endParaRPr lang="en-US" sz="1250" dirty="0"/>
           </a:p>
@@ -11650,8 +11650,8 @@
         </p:nvSpPr>
         <p:spPr>
           <a:xfrm>
-            <a:off x="6812280" y="1993392"/>
-            <a:ext cx="4663440" cy="365760"/>
+            <a:off x="6812280" y="1975104"/>
+            <a:ext cx="4663440" cy="256032"/>
           </a:xfrm>
           <a:prstGeom prst="rect">
             <a:avLst/>
@@ -11667,96 +11667,15 @@
               <a:buNone/>
             </a:pPr>
             <a:r>
-              <a:rPr lang="en-US" sz="1400" b="1" dirty="0">
-                <a:solidFill>
-                  <a:srgbClr val="0A2558"/>
-                </a:solidFill>
-                <a:latin typeface="Consolas" pitchFamily="34" charset="0"/>
-                <a:ea typeface="Consolas" pitchFamily="34" charset="-122"/>
-                <a:cs typeface="Consolas" pitchFamily="34" charset="-120"/>
-              </a:rPr>
-              <a:t>fait_agence</a:t>
-            </a:r>
-            <a:endParaRPr lang="en-US" sz="1400" dirty="0"/>
-          </a:p>
-        </p:txBody>
-      </p:sp>
-      <p:sp>
-        <p:nvSpPr>
-          <p:cNvPr id="20" name="Text 18"/>
-          <p:cNvSpPr/>
-          <p:nvPr/>
-        </p:nvSpPr>
-        <p:spPr>
-          <a:xfrm>
-            <a:off x="6812280" y="2377440"/>
-            <a:ext cx="4663440" cy="731520"/>
-          </a:xfrm>
-          <a:prstGeom prst="rect">
-            <a:avLst/>
-          </a:prstGeom>
-          <a:noFill/>
-          <a:ln/>
-        </p:spPr>
-        <p:txBody>
-          <a:bodyPr wrap="square" lIns="0" tIns="0" rIns="0" bIns="0" rtlCol="0" anchor="t"/>
-          <a:lstStyle/>
-          <a:p>
-            <a:pPr indent="0" marL="0">
-              <a:lnSpc>
-                <a:spcPts val="1700"/>
-              </a:lnSpc>
-              <a:buNone/>
-            </a:pPr>
-            <a:r>
-              <a:rPr lang="en-US" sz="1200" dirty="0">
-                <a:solidFill>
-                  <a:srgbClr val="1B2A44"/>
+              <a:rPr lang="en-US" sz="1000" b="1" spc="200" kern="0" dirty="0">
+                <a:solidFill>
+                  <a:srgbClr val="3C6FC3"/>
                 </a:solidFill>
                 <a:latin typeface="Calibri" pitchFamily="34" charset="0"/>
                 <a:ea typeface="Calibri" pitchFamily="34" charset="-122"/>
                 <a:cs typeface="Calibri" pitchFamily="34" charset="-120"/>
               </a:rPr>
-              <a:t>Effectif · gestionnaires · clients · comptes ouverts · production de crédits · collecte d'épargne · taux de présence</a:t>
-            </a:r>
-            <a:endParaRPr lang="en-US" sz="1200" dirty="0"/>
-          </a:p>
-        </p:txBody>
-      </p:sp>
-      <p:sp>
-        <p:nvSpPr>
-          <p:cNvPr id="21" name="Text 19"/>
-          <p:cNvSpPr/>
-          <p:nvPr/>
-        </p:nvSpPr>
-        <p:spPr>
-          <a:xfrm>
-            <a:off x="6812280" y="3200400"/>
-            <a:ext cx="4663440" cy="256032"/>
-          </a:xfrm>
-          <a:prstGeom prst="rect">
-            <a:avLst/>
-          </a:prstGeom>
-          <a:noFill/>
-          <a:ln/>
-        </p:spPr>
-        <p:txBody>
-          <a:bodyPr wrap="square" lIns="0" tIns="0" rIns="0" bIns="0" rtlCol="0" anchor="ctr"/>
-          <a:lstStyle/>
-          <a:p>
-            <a:pPr indent="0" marL="0">
-              <a:buNone/>
-            </a:pPr>
-            <a:r>
-              <a:rPr lang="en-US" sz="1000" b="1" spc="200" kern="0" dirty="0">
-                <a:solidFill>
-                  <a:srgbClr val="3C6FC3"/>
-                </a:solidFill>
-                <a:latin typeface="Calibri" pitchFamily="34" charset="0"/>
-                <a:ea typeface="Calibri" pitchFamily="34" charset="-122"/>
-                <a:cs typeface="Calibri" pitchFamily="34" charset="-120"/>
-              </a:rPr>
-              <a:t>TABLES DE DIMENSIONS</a:t>
+              <a:t>DATAMART CHARGÉ PAR L'ETL</a:t>
             </a:r>
             <a:endParaRPr lang="en-US" sz="1000" dirty="0"/>
           </a:p>
@@ -11764,13 +11683,13 @@
       </p:sp>
       <p:sp>
         <p:nvSpPr>
-          <p:cNvPr id="22" name="Shape 20"/>
-          <p:cNvSpPr/>
-          <p:nvPr/>
-        </p:nvSpPr>
-        <p:spPr>
-          <a:xfrm>
-            <a:off x="6812280" y="3621024"/>
+          <p:cNvPr id="20" name="Shape 18"/>
+          <p:cNvSpPr/>
+          <p:nvPr/>
+        </p:nvSpPr>
+        <p:spPr>
+          <a:xfrm>
+            <a:off x="6812280" y="2395728"/>
             <a:ext cx="109728" cy="109728"/>
           </a:xfrm>
           <a:prstGeom prst="ellipse">
@@ -11789,13 +11708,13 @@
       </p:sp>
       <p:sp>
         <p:nvSpPr>
-          <p:cNvPr id="23" name="Text 21"/>
-          <p:cNvSpPr/>
-          <p:nvPr/>
-        </p:nvSpPr>
-        <p:spPr>
-          <a:xfrm>
-            <a:off x="7086600" y="3474720"/>
+          <p:cNvPr id="21" name="Text 19"/>
+          <p:cNvSpPr/>
+          <p:nvPr/>
+        </p:nvSpPr>
+        <p:spPr>
+          <a:xfrm>
+            <a:off x="7086600" y="2249424"/>
             <a:ext cx="4389120" cy="420624"/>
           </a:xfrm>
           <a:prstGeom prst="rect">
@@ -11820,7 +11739,7 @@
                 <a:ea typeface="Calibri" pitchFamily="34" charset="-122"/>
                 <a:cs typeface="Calibri" pitchFamily="34" charset="-120"/>
               </a:rPr>
-              <a:t>dim_agence — libellé, district, région</a:t>
+              <a:t>fait_agence / dim_agence — 7 indicateurs au grain de l'agence</a:t>
             </a:r>
             <a:endParaRPr lang="en-US" sz="1150" dirty="0"/>
           </a:p>
@@ -11828,13 +11747,13 @@
       </p:sp>
       <p:sp>
         <p:nvSpPr>
-          <p:cNvPr id="24" name="Shape 22"/>
-          <p:cNvSpPr/>
-          <p:nvPr/>
-        </p:nvSpPr>
-        <p:spPr>
-          <a:xfrm>
-            <a:off x="6812280" y="4078224"/>
+          <p:cNvPr id="22" name="Shape 20"/>
+          <p:cNvSpPr/>
+          <p:nvPr/>
+        </p:nvSpPr>
+        <p:spPr>
+          <a:xfrm>
+            <a:off x="6812280" y="2852928"/>
             <a:ext cx="109728" cy="109728"/>
           </a:xfrm>
           <a:prstGeom prst="ellipse">
@@ -11853,13 +11772,13 @@
       </p:sp>
       <p:sp>
         <p:nvSpPr>
-          <p:cNvPr id="25" name="Text 23"/>
-          <p:cNvSpPr/>
-          <p:nvPr/>
-        </p:nvSpPr>
-        <p:spPr>
-          <a:xfrm>
-            <a:off x="7086600" y="3931920"/>
+          <p:cNvPr id="23" name="Text 21"/>
+          <p:cNvSpPr/>
+          <p:nvPr/>
+        </p:nvSpPr>
+        <p:spPr>
+          <a:xfrm>
+            <a:off x="7086600" y="2706624"/>
             <a:ext cx="4389120" cy="420624"/>
           </a:xfrm>
           <a:prstGeom prst="rect">
@@ -11884,7 +11803,7 @@
                 <a:ea typeface="Calibri" pitchFamily="34" charset="-122"/>
                 <a:cs typeface="Calibri" pitchFamily="34" charset="-120"/>
               </a:rPr>
-              <a:t>période — analyse par mois et exercice</a:t>
+              <a:t>fait_objectif / dim_gestionnaire — production au grain agence × gestionnaire</a:t>
             </a:r>
             <a:endParaRPr lang="en-US" sz="1150" dirty="0"/>
           </a:p>
@@ -11892,13 +11811,52 @@
       </p:sp>
       <p:sp>
         <p:nvSpPr>
-          <p:cNvPr id="26" name="Shape 24"/>
-          <p:cNvSpPr/>
-          <p:nvPr/>
-        </p:nvSpPr>
-        <p:spPr>
-          <a:xfrm>
-            <a:off x="6812280" y="4535424"/>
+          <p:cNvPr id="24" name="Text 22"/>
+          <p:cNvSpPr/>
+          <p:nvPr/>
+        </p:nvSpPr>
+        <p:spPr>
+          <a:xfrm>
+            <a:off x="6812280" y="3712464"/>
+            <a:ext cx="4663440" cy="256032"/>
+          </a:xfrm>
+          <a:prstGeom prst="rect">
+            <a:avLst/>
+          </a:prstGeom>
+          <a:noFill/>
+          <a:ln/>
+        </p:spPr>
+        <p:txBody>
+          <a:bodyPr wrap="square" lIns="0" tIns="0" rIns="0" bIns="0" rtlCol="0" anchor="ctr"/>
+          <a:lstStyle/>
+          <a:p>
+            <a:pPr indent="0" marL="0">
+              <a:buNone/>
+            </a:pPr>
+            <a:r>
+              <a:rPr lang="en-US" sz="1000" b="1" spc="200" kern="0" dirty="0">
+                <a:solidFill>
+                  <a:srgbClr val="3C6FC3"/>
+                </a:solidFill>
+                <a:latin typeface="Calibri" pitchFamily="34" charset="0"/>
+                <a:ea typeface="Calibri" pitchFamily="34" charset="-122"/>
+                <a:cs typeface="Calibri" pitchFamily="34" charset="-120"/>
+              </a:rPr>
+              <a:t>COUCHE SÉMANTIQUE POWER BI</a:t>
+            </a:r>
+            <a:endParaRPr lang="en-US" sz="1000" dirty="0"/>
+          </a:p>
+        </p:txBody>
+      </p:sp>
+      <p:sp>
+        <p:nvSpPr>
+          <p:cNvPr id="25" name="Shape 23"/>
+          <p:cNvSpPr/>
+          <p:nvPr/>
+        </p:nvSpPr>
+        <p:spPr>
+          <a:xfrm>
+            <a:off x="6812280" y="4133088"/>
             <a:ext cx="109728" cy="109728"/>
           </a:xfrm>
           <a:prstGeom prst="ellipse">
@@ -11917,13 +11875,13 @@
       </p:sp>
       <p:sp>
         <p:nvSpPr>
-          <p:cNvPr id="27" name="Text 25"/>
-          <p:cNvSpPr/>
-          <p:nvPr/>
-        </p:nvSpPr>
-        <p:spPr>
-          <a:xfrm>
-            <a:off x="7086600" y="4389120"/>
+          <p:cNvPr id="26" name="Text 24"/>
+          <p:cNvSpPr/>
+          <p:nvPr/>
+        </p:nvSpPr>
+        <p:spPr>
+          <a:xfrm>
+            <a:off x="7086600" y="3986784"/>
             <a:ext cx="4389120" cy="420624"/>
           </a:xfrm>
           <a:prstGeom prst="rect">
@@ -11948,7 +11906,7 @@
                 <a:ea typeface="Calibri" pitchFamily="34" charset="-122"/>
                 <a:cs typeface="Calibri" pitchFamily="34" charset="-120"/>
               </a:rPr>
-              <a:t>gestionnaire — portefeuille par responsable</a:t>
+              <a:t>4 vues V_BI_* : production, effectifs, clients, présence</a:t>
             </a:r>
             <a:endParaRPr lang="en-US" sz="1150" dirty="0"/>
           </a:p>
@@ -11956,13 +11914,13 @@
       </p:sp>
       <p:sp>
         <p:nvSpPr>
-          <p:cNvPr id="28" name="Shape 26"/>
-          <p:cNvSpPr/>
-          <p:nvPr/>
-        </p:nvSpPr>
-        <p:spPr>
-          <a:xfrm>
-            <a:off x="6812280" y="4992624"/>
+          <p:cNvPr id="27" name="Shape 25"/>
+          <p:cNvSpPr/>
+          <p:nvPr/>
+        </p:nvSpPr>
+        <p:spPr>
+          <a:xfrm>
+            <a:off x="6812280" y="4590288"/>
             <a:ext cx="109728" cy="109728"/>
           </a:xfrm>
           <a:prstGeom prst="ellipse">
@@ -11981,13 +11939,13 @@
       </p:sp>
       <p:sp>
         <p:nvSpPr>
-          <p:cNvPr id="29" name="Text 27"/>
-          <p:cNvSpPr/>
-          <p:nvPr/>
-        </p:nvSpPr>
-        <p:spPr>
-          <a:xfrm>
-            <a:off x="7086600" y="4846320"/>
+          <p:cNvPr id="28" name="Text 26"/>
+          <p:cNvSpPr/>
+          <p:nvPr/>
+        </p:nvSpPr>
+        <p:spPr>
+          <a:xfrm>
+            <a:off x="7086600" y="4443984"/>
             <a:ext cx="4389120" cy="420624"/>
           </a:xfrm>
           <a:prstGeom prst="rect">
@@ -12012,7 +11970,71 @@
                 <a:ea typeface="Calibri" pitchFamily="34" charset="-122"/>
                 <a:cs typeface="Calibri" pitchFamily="34" charset="-120"/>
               </a:rPr>
-              <a:t>type_client — particulier, société, entreprise</a:t>
+              <a:t>Dimensions conformes AGENCE (SK_AGENCE) et B_UTILISATEURS (SK_UTILISATEUR)</a:t>
+            </a:r>
+            <a:endParaRPr lang="en-US" sz="1150" dirty="0"/>
+          </a:p>
+        </p:txBody>
+      </p:sp>
+      <p:sp>
+        <p:nvSpPr>
+          <p:cNvPr id="29" name="Shape 27"/>
+          <p:cNvSpPr/>
+          <p:nvPr/>
+        </p:nvSpPr>
+        <p:spPr>
+          <a:xfrm>
+            <a:off x="6812280" y="5047488"/>
+            <a:ext cx="109728" cy="109728"/>
+          </a:xfrm>
+          <a:prstGeom prst="ellipse">
+            <a:avLst/>
+          </a:prstGeom>
+          <a:solidFill>
+            <a:srgbClr val="3C6FC3"/>
+          </a:solidFill>
+          <a:ln w="12700">
+            <a:solidFill>
+              <a:srgbClr val="3C6FC3"/>
+            </a:solidFill>
+            <a:prstDash val="solid"/>
+          </a:ln>
+        </p:spPr>
+      </p:sp>
+      <p:sp>
+        <p:nvSpPr>
+          <p:cNvPr id="30" name="Text 28"/>
+          <p:cNvSpPr/>
+          <p:nvPr/>
+        </p:nvSpPr>
+        <p:spPr>
+          <a:xfrm>
+            <a:off x="7086600" y="4901184"/>
+            <a:ext cx="4389120" cy="420624"/>
+          </a:xfrm>
+          <a:prstGeom prst="rect">
+            <a:avLst/>
+          </a:prstGeom>
+          <a:noFill/>
+          <a:ln/>
+        </p:spPr>
+        <p:txBody>
+          <a:bodyPr wrap="square" lIns="0" tIns="0" rIns="0" bIns="0" rtlCol="0" anchor="ctr"/>
+          <a:lstStyle/>
+          <a:p>
+            <a:pPr indent="0" marL="0">
+              <a:buNone/>
+            </a:pPr>
+            <a:r>
+              <a:rPr lang="en-US" sz="1150" dirty="0">
+                <a:solidFill>
+                  <a:srgbClr val="1B2A44"/>
+                </a:solidFill>
+                <a:latin typeface="Calibri" pitchFamily="34" charset="0"/>
+                <a:ea typeface="Calibri" pitchFamily="34" charset="-122"/>
+                <a:cs typeface="Calibri" pitchFamily="34" charset="-120"/>
+              </a:rPr>
+              <a:t>Période et type de client : dimensions dégénérées portées par les vues</a:t>
             </a:r>
             <a:endParaRPr lang="en-US" sz="1150" dirty="0"/>
           </a:p>
@@ -13870,7 +13892,7 @@
                 <a:ea typeface="Calibri" pitchFamily="34" charset="-122"/>
                 <a:cs typeface="Calibri" pitchFamily="34" charset="-120"/>
               </a:rPr>
-              <a:t>Fusion des sources sur la clé SK_AGENCE</a:t>
+              <a:t>Fusion sur SK_AGENCE, puis regroupement sur SK_UTILISATEUR</a:t>
             </a:r>
             <a:endParaRPr lang="en-US" sz="1100" dirty="0"/>
           </a:p>
@@ -14184,7 +14206,7 @@
                 <a:ea typeface="Consolas" pitchFamily="34" charset="-122"/>
                 <a:cs typeface="Consolas" pitchFamily="34" charset="-120"/>
               </a:rPr>
-              <a:t>AGENCE · B_UTILISATEURS · B_CLIENTS</a:t>
+              <a:t>AGENCE · B_UTILISATEURS · CLIENT_BTK</a:t>
             </a:r>
             <a:endParaRPr lang="en-US" sz="1150" dirty="0"/>
           </a:p>
@@ -14329,7 +14351,7 @@
                 <a:ea typeface="Georgia" pitchFamily="34" charset="-122"/>
                 <a:cs typeface="Georgia" pitchFamily="34" charset="-120"/>
               </a:rPr>
-              <a:t>45</a:t>
+              <a:t>49</a:t>
             </a:r>
             <a:endParaRPr lang="en-US" sz="2600" dirty="0"/>
           </a:p>
@@ -14368,7 +14390,7 @@
                 <a:ea typeface="Calibri" pitchFamily="34" charset="-122"/>
                 <a:cs typeface="Calibri" pitchFamily="34" charset="-120"/>
               </a:rPr>
-              <a:t>agences consolidées</a:t>
+              <a:t>entités consolidées</a:t>
             </a:r>
             <a:endParaRPr lang="en-US" sz="1150" dirty="0"/>
           </a:p>

--- a/presentation/Soutenance_PFE_Oussema_Korbosli.pptx
+++ b/presentation/Soutenance_PFE_Oussema_Korbosli.pptx
@@ -10647,9 +10647,48 @@
           </a:p>
         </p:txBody>
       </p:sp>
+      <p:sp>
+        <p:nvSpPr>
+          <p:cNvPr id="7" name="Text 5"/>
+          <p:cNvSpPr/>
+          <p:nvPr/>
+        </p:nvSpPr>
+        <p:spPr>
+          <a:xfrm>
+            <a:off x="566928" y="1115568"/>
+            <a:ext cx="11064240" cy="475488"/>
+          </a:xfrm>
+          <a:prstGeom prst="rect">
+            <a:avLst/>
+          </a:prstGeom>
+          <a:noFill/>
+          <a:ln/>
+        </p:spPr>
+        <p:txBody>
+          <a:bodyPr wrap="square" lIns="0" tIns="0" rIns="0" bIns="0" rtlCol="0" anchor="ctr"/>
+          <a:lstStyle/>
+          <a:p>
+            <a:pPr algn="ctr" indent="0" marL="0">
+              <a:buNone/>
+            </a:pPr>
+            <a:r>
+              <a:rPr lang="en-US" sz="1350" dirty="0">
+                <a:solidFill>
+                  <a:srgbClr val="1B2A44"/>
+                </a:solidFill>
+                <a:latin typeface="Calibri" pitchFamily="34" charset="0"/>
+                <a:ea typeface="Calibri" pitchFamily="34" charset="-122"/>
+                <a:cs typeface="Calibri" pitchFamily="34" charset="-120"/>
+              </a:rPr>
+              <a:t>Administrateur : les 13 cas   ·   Directeur commercial : 5 cas   ·   Utilisateur : 3 cas   ·   chaque cas inclut « S'authentifier »</a:t>
+            </a:r>
+            <a:endParaRPr lang="en-US" sz="1350" dirty="0"/>
+          </a:p>
+        </p:txBody>
+      </p:sp>
       <p:pic>
         <p:nvPicPr>
-          <p:cNvPr id="7" name="Image 0" descr="/home/user/oussema_korbosli/rapport-latex/diagrams/uc_global.png">    </p:cNvPr>
+          <p:cNvPr id="8" name="Image 0" descr="/home/user/oussema_korbosli/presentation/uc_global_slide.png">    </p:cNvPr>
           <p:cNvPicPr>
             <a:picLocks noChangeAspect="1"/>
           </p:cNvPicPr>
@@ -10663,373 +10702,14 @@
         </p:blipFill>
         <p:spPr>
           <a:xfrm>
-            <a:off x="1514819" y="1298448"/>
-            <a:ext cx="5968058" cy="4846320"/>
+            <a:off x="1149342" y="1645920"/>
+            <a:ext cx="9899411" cy="4681728"/>
           </a:xfrm>
           <a:prstGeom prst="rect">
             <a:avLst/>
           </a:prstGeom>
         </p:spPr>
       </p:pic>
-      <p:sp>
-        <p:nvSpPr>
-          <p:cNvPr id="8" name="Text 5"/>
-          <p:cNvSpPr/>
-          <p:nvPr/>
-        </p:nvSpPr>
-        <p:spPr>
-          <a:xfrm>
-            <a:off x="8641080" y="1572768"/>
-            <a:ext cx="3017520" cy="274320"/>
-          </a:xfrm>
-          <a:prstGeom prst="rect">
-            <a:avLst/>
-          </a:prstGeom>
-          <a:noFill/>
-          <a:ln/>
-        </p:spPr>
-        <p:txBody>
-          <a:bodyPr wrap="square" lIns="0" tIns="0" rIns="0" bIns="0" rtlCol="0" anchor="ctr"/>
-          <a:lstStyle/>
-          <a:p>
-            <a:pPr indent="0" marL="0">
-              <a:buNone/>
-            </a:pPr>
-            <a:r>
-              <a:rPr lang="en-US" sz="1050" b="1" spc="200" kern="0" dirty="0">
-                <a:solidFill>
-                  <a:srgbClr val="3C6FC3"/>
-                </a:solidFill>
-                <a:latin typeface="Calibri" pitchFamily="34" charset="0"/>
-                <a:ea typeface="Calibri" pitchFamily="34" charset="-122"/>
-                <a:cs typeface="Calibri" pitchFamily="34" charset="-120"/>
-              </a:rPr>
-              <a:t>LECTURE DU DIAGRAMME</a:t>
-            </a:r>
-            <a:endParaRPr lang="en-US" sz="1050" dirty="0"/>
-          </a:p>
-        </p:txBody>
-      </p:sp>
-      <p:sp>
-        <p:nvSpPr>
-          <p:cNvPr id="9" name="Shape 6"/>
-          <p:cNvSpPr/>
-          <p:nvPr/>
-        </p:nvSpPr>
-        <p:spPr>
-          <a:xfrm>
-            <a:off x="8641080" y="2048256"/>
-            <a:ext cx="109728" cy="109728"/>
-          </a:xfrm>
-          <a:prstGeom prst="ellipse">
-            <a:avLst/>
-          </a:prstGeom>
-          <a:solidFill>
-            <a:srgbClr val="3C6FC3"/>
-          </a:solidFill>
-          <a:ln w="12700">
-            <a:solidFill>
-              <a:srgbClr val="3C6FC3"/>
-            </a:solidFill>
-            <a:prstDash val="solid"/>
-          </a:ln>
-        </p:spPr>
-      </p:sp>
-      <p:sp>
-        <p:nvSpPr>
-          <p:cNvPr id="10" name="Text 7"/>
-          <p:cNvSpPr/>
-          <p:nvPr/>
-        </p:nvSpPr>
-        <p:spPr>
-          <a:xfrm>
-            <a:off x="8915400" y="1901952"/>
-            <a:ext cx="2743200" cy="420624"/>
-          </a:xfrm>
-          <a:prstGeom prst="rect">
-            <a:avLst/>
-          </a:prstGeom>
-          <a:noFill/>
-          <a:ln/>
-        </p:spPr>
-        <p:txBody>
-          <a:bodyPr wrap="square" lIns="0" tIns="0" rIns="0" bIns="0" rtlCol="0" anchor="ctr"/>
-          <a:lstStyle/>
-          <a:p>
-            <a:pPr indent="0" marL="0">
-              <a:buNone/>
-            </a:pPr>
-            <a:r>
-              <a:rPr lang="en-US" sz="1150" dirty="0">
-                <a:solidFill>
-                  <a:srgbClr val="1B2A44"/>
-                </a:solidFill>
-                <a:latin typeface="Calibri" pitchFamily="34" charset="0"/>
-                <a:ea typeface="Calibri" pitchFamily="34" charset="-122"/>
-                <a:cs typeface="Calibri" pitchFamily="34" charset="-120"/>
-              </a:rPr>
-              <a:t>Trois acteurs, treize cas d'utilisation</a:t>
-            </a:r>
-            <a:endParaRPr lang="en-US" sz="1150" dirty="0"/>
-          </a:p>
-        </p:txBody>
-      </p:sp>
-      <p:sp>
-        <p:nvSpPr>
-          <p:cNvPr id="11" name="Shape 8"/>
-          <p:cNvSpPr/>
-          <p:nvPr/>
-        </p:nvSpPr>
-        <p:spPr>
-          <a:xfrm>
-            <a:off x="8641080" y="2505456"/>
-            <a:ext cx="109728" cy="109728"/>
-          </a:xfrm>
-          <a:prstGeom prst="ellipse">
-            <a:avLst/>
-          </a:prstGeom>
-          <a:solidFill>
-            <a:srgbClr val="3C6FC3"/>
-          </a:solidFill>
-          <a:ln w="12700">
-            <a:solidFill>
-              <a:srgbClr val="3C6FC3"/>
-            </a:solidFill>
-            <a:prstDash val="solid"/>
-          </a:ln>
-        </p:spPr>
-      </p:sp>
-      <p:sp>
-        <p:nvSpPr>
-          <p:cNvPr id="12" name="Text 9"/>
-          <p:cNvSpPr/>
-          <p:nvPr/>
-        </p:nvSpPr>
-        <p:spPr>
-          <a:xfrm>
-            <a:off x="8915400" y="2359152"/>
-            <a:ext cx="2743200" cy="420624"/>
-          </a:xfrm>
-          <a:prstGeom prst="rect">
-            <a:avLst/>
-          </a:prstGeom>
-          <a:noFill/>
-          <a:ln/>
-        </p:spPr>
-        <p:txBody>
-          <a:bodyPr wrap="square" lIns="0" tIns="0" rIns="0" bIns="0" rtlCol="0" anchor="ctr"/>
-          <a:lstStyle/>
-          <a:p>
-            <a:pPr indent="0" marL="0">
-              <a:buNone/>
-            </a:pPr>
-            <a:r>
-              <a:rPr lang="en-US" sz="1150" dirty="0">
-                <a:solidFill>
-                  <a:srgbClr val="1B2A44"/>
-                </a:solidFill>
-                <a:latin typeface="Calibri" pitchFamily="34" charset="0"/>
-                <a:ea typeface="Calibri" pitchFamily="34" charset="-122"/>
-                <a:cs typeface="Calibri" pitchFamily="34" charset="-120"/>
-              </a:rPr>
-              <a:t>Chaque cas inclut « S'authentifier » (include)</a:t>
-            </a:r>
-            <a:endParaRPr lang="en-US" sz="1150" dirty="0"/>
-          </a:p>
-        </p:txBody>
-      </p:sp>
-      <p:sp>
-        <p:nvSpPr>
-          <p:cNvPr id="13" name="Shape 10"/>
-          <p:cNvSpPr/>
-          <p:nvPr/>
-        </p:nvSpPr>
-        <p:spPr>
-          <a:xfrm>
-            <a:off x="8641080" y="2962656"/>
-            <a:ext cx="109728" cy="109728"/>
-          </a:xfrm>
-          <a:prstGeom prst="ellipse">
-            <a:avLst/>
-          </a:prstGeom>
-          <a:solidFill>
-            <a:srgbClr val="3C6FC3"/>
-          </a:solidFill>
-          <a:ln w="12700">
-            <a:solidFill>
-              <a:srgbClr val="3C6FC3"/>
-            </a:solidFill>
-            <a:prstDash val="solid"/>
-          </a:ln>
-        </p:spPr>
-      </p:sp>
-      <p:sp>
-        <p:nvSpPr>
-          <p:cNvPr id="14" name="Text 11"/>
-          <p:cNvSpPr/>
-          <p:nvPr/>
-        </p:nvSpPr>
-        <p:spPr>
-          <a:xfrm>
-            <a:off x="8915400" y="2816352"/>
-            <a:ext cx="2743200" cy="420624"/>
-          </a:xfrm>
-          <a:prstGeom prst="rect">
-            <a:avLst/>
-          </a:prstGeom>
-          <a:noFill/>
-          <a:ln/>
-        </p:spPr>
-        <p:txBody>
-          <a:bodyPr wrap="square" lIns="0" tIns="0" rIns="0" bIns="0" rtlCol="0" anchor="ctr"/>
-          <a:lstStyle/>
-          <a:p>
-            <a:pPr indent="0" marL="0">
-              <a:buNone/>
-            </a:pPr>
-            <a:r>
-              <a:rPr lang="en-US" sz="1150" dirty="0">
-                <a:solidFill>
-                  <a:srgbClr val="1B2A44"/>
-                </a:solidFill>
-                <a:latin typeface="Calibri" pitchFamily="34" charset="0"/>
-                <a:ea typeface="Calibri" pitchFamily="34" charset="-122"/>
-                <a:cs typeface="Calibri" pitchFamily="34" charset="-120"/>
-              </a:rPr>
-              <a:t>Administrateur : les 13 cas, sans exception</a:t>
-            </a:r>
-            <a:endParaRPr lang="en-US" sz="1150" dirty="0"/>
-          </a:p>
-        </p:txBody>
-      </p:sp>
-      <p:sp>
-        <p:nvSpPr>
-          <p:cNvPr id="15" name="Shape 12"/>
-          <p:cNvSpPr/>
-          <p:nvPr/>
-        </p:nvSpPr>
-        <p:spPr>
-          <a:xfrm>
-            <a:off x="8641080" y="3419856"/>
-            <a:ext cx="109728" cy="109728"/>
-          </a:xfrm>
-          <a:prstGeom prst="ellipse">
-            <a:avLst/>
-          </a:prstGeom>
-          <a:solidFill>
-            <a:srgbClr val="3C6FC3"/>
-          </a:solidFill>
-          <a:ln w="12700">
-            <a:solidFill>
-              <a:srgbClr val="3C6FC3"/>
-            </a:solidFill>
-            <a:prstDash val="solid"/>
-          </a:ln>
-        </p:spPr>
-      </p:sp>
-      <p:sp>
-        <p:nvSpPr>
-          <p:cNvPr id="16" name="Text 13"/>
-          <p:cNvSpPr/>
-          <p:nvPr/>
-        </p:nvSpPr>
-        <p:spPr>
-          <a:xfrm>
-            <a:off x="8915400" y="3273552"/>
-            <a:ext cx="2743200" cy="420624"/>
-          </a:xfrm>
-          <a:prstGeom prst="rect">
-            <a:avLst/>
-          </a:prstGeom>
-          <a:noFill/>
-          <a:ln/>
-        </p:spPr>
-        <p:txBody>
-          <a:bodyPr wrap="square" lIns="0" tIns="0" rIns="0" bIns="0" rtlCol="0" anchor="ctr"/>
-          <a:lstStyle/>
-          <a:p>
-            <a:pPr indent="0" marL="0">
-              <a:buNone/>
-            </a:pPr>
-            <a:r>
-              <a:rPr lang="en-US" sz="1150" dirty="0">
-                <a:solidFill>
-                  <a:srgbClr val="1B2A44"/>
-                </a:solidFill>
-                <a:latin typeface="Calibri" pitchFamily="34" charset="0"/>
-                <a:ea typeface="Calibri" pitchFamily="34" charset="-122"/>
-                <a:cs typeface="Calibri" pitchFamily="34" charset="-120"/>
-              </a:rPr>
-              <a:t>Directeur commercial : 5 cas, dont les employés en consultation</a:t>
-            </a:r>
-            <a:endParaRPr lang="en-US" sz="1150" dirty="0"/>
-          </a:p>
-        </p:txBody>
-      </p:sp>
-      <p:sp>
-        <p:nvSpPr>
-          <p:cNvPr id="17" name="Shape 14"/>
-          <p:cNvSpPr/>
-          <p:nvPr/>
-        </p:nvSpPr>
-        <p:spPr>
-          <a:xfrm>
-            <a:off x="8641080" y="3877056"/>
-            <a:ext cx="109728" cy="109728"/>
-          </a:xfrm>
-          <a:prstGeom prst="ellipse">
-            <a:avLst/>
-          </a:prstGeom>
-          <a:solidFill>
-            <a:srgbClr val="3C6FC3"/>
-          </a:solidFill>
-          <a:ln w="12700">
-            <a:solidFill>
-              <a:srgbClr val="3C6FC3"/>
-            </a:solidFill>
-            <a:prstDash val="solid"/>
-          </a:ln>
-        </p:spPr>
-      </p:sp>
-      <p:sp>
-        <p:nvSpPr>
-          <p:cNvPr id="18" name="Text 15"/>
-          <p:cNvSpPr/>
-          <p:nvPr/>
-        </p:nvSpPr>
-        <p:spPr>
-          <a:xfrm>
-            <a:off x="8915400" y="3730752"/>
-            <a:ext cx="2743200" cy="420624"/>
-          </a:xfrm>
-          <a:prstGeom prst="rect">
-            <a:avLst/>
-          </a:prstGeom>
-          <a:noFill/>
-          <a:ln/>
-        </p:spPr>
-        <p:txBody>
-          <a:bodyPr wrap="square" lIns="0" tIns="0" rIns="0" bIns="0" rtlCol="0" anchor="ctr"/>
-          <a:lstStyle/>
-          <a:p>
-            <a:pPr indent="0" marL="0">
-              <a:buNone/>
-            </a:pPr>
-            <a:r>
-              <a:rPr lang="en-US" sz="1150" dirty="0">
-                <a:solidFill>
-                  <a:srgbClr val="1B2A44"/>
-                </a:solidFill>
-                <a:latin typeface="Calibri" pitchFamily="34" charset="0"/>
-                <a:ea typeface="Calibri" pitchFamily="34" charset="-122"/>
-                <a:cs typeface="Calibri" pitchFamily="34" charset="-120"/>
-              </a:rPr>
-              <a:t>Utilisateur : 3 cas — pointage, demandes, notifications</a:t>
-            </a:r>
-            <a:endParaRPr lang="en-US" sz="1150" dirty="0"/>
-          </a:p>
-        </p:txBody>
-      </p:sp>
     </p:spTree>
   </p:cSld>
   <p:clrMapOvr>

--- a/presentation/Soutenance_PFE_Oussema_Korbosli.pptx
+++ b/presentation/Soutenance_PFE_Oussema_Korbosli.pptx
@@ -10647,48 +10647,9 @@
           </a:p>
         </p:txBody>
       </p:sp>
-      <p:sp>
-        <p:nvSpPr>
-          <p:cNvPr id="7" name="Text 5"/>
-          <p:cNvSpPr/>
-          <p:nvPr/>
-        </p:nvSpPr>
-        <p:spPr>
-          <a:xfrm>
-            <a:off x="566928" y="1115568"/>
-            <a:ext cx="11064240" cy="475488"/>
-          </a:xfrm>
-          <a:prstGeom prst="rect">
-            <a:avLst/>
-          </a:prstGeom>
-          <a:noFill/>
-          <a:ln/>
-        </p:spPr>
-        <p:txBody>
-          <a:bodyPr wrap="square" lIns="0" tIns="0" rIns="0" bIns="0" rtlCol="0" anchor="ctr"/>
-          <a:lstStyle/>
-          <a:p>
-            <a:pPr algn="ctr" indent="0" marL="0">
-              <a:buNone/>
-            </a:pPr>
-            <a:r>
-              <a:rPr lang="en-US" sz="1350" dirty="0">
-                <a:solidFill>
-                  <a:srgbClr val="1B2A44"/>
-                </a:solidFill>
-                <a:latin typeface="Calibri" pitchFamily="34" charset="0"/>
-                <a:ea typeface="Calibri" pitchFamily="34" charset="-122"/>
-                <a:cs typeface="Calibri" pitchFamily="34" charset="-120"/>
-              </a:rPr>
-              <a:t>Administrateur : les 13 cas   ·   Directeur commercial : 5 cas   ·   Utilisateur : 3 cas   ·   chaque cas inclut « S'authentifier »</a:t>
-            </a:r>
-            <a:endParaRPr lang="en-US" sz="1350" dirty="0"/>
-          </a:p>
-        </p:txBody>
-      </p:sp>
       <p:pic>
         <p:nvPicPr>
-          <p:cNvPr id="8" name="Image 0" descr="/home/user/oussema_korbosli/presentation/uc_global_slide.png">    </p:cNvPr>
+          <p:cNvPr id="7" name="Image 0" descr="/home/user/oussema_korbosli/rapport-latex/diagrams/uc_global.png">    </p:cNvPr>
           <p:cNvPicPr>
             <a:picLocks noChangeAspect="1"/>
           </p:cNvPicPr>
@@ -10702,14 +10663,373 @@
         </p:blipFill>
         <p:spPr>
           <a:xfrm>
-            <a:off x="1149342" y="1645920"/>
-            <a:ext cx="9899411" cy="4681728"/>
+            <a:off x="1056006" y="1298448"/>
+            <a:ext cx="6885683" cy="4846320"/>
           </a:xfrm>
           <a:prstGeom prst="rect">
             <a:avLst/>
           </a:prstGeom>
         </p:spPr>
       </p:pic>
+      <p:sp>
+        <p:nvSpPr>
+          <p:cNvPr id="8" name="Text 5"/>
+          <p:cNvSpPr/>
+          <p:nvPr/>
+        </p:nvSpPr>
+        <p:spPr>
+          <a:xfrm>
+            <a:off x="8641080" y="1572768"/>
+            <a:ext cx="3017520" cy="274320"/>
+          </a:xfrm>
+          <a:prstGeom prst="rect">
+            <a:avLst/>
+          </a:prstGeom>
+          <a:noFill/>
+          <a:ln/>
+        </p:spPr>
+        <p:txBody>
+          <a:bodyPr wrap="square" lIns="0" tIns="0" rIns="0" bIns="0" rtlCol="0" anchor="ctr"/>
+          <a:lstStyle/>
+          <a:p>
+            <a:pPr indent="0" marL="0">
+              <a:buNone/>
+            </a:pPr>
+            <a:r>
+              <a:rPr lang="en-US" sz="1050" b="1" spc="200" kern="0" dirty="0">
+                <a:solidFill>
+                  <a:srgbClr val="3C6FC3"/>
+                </a:solidFill>
+                <a:latin typeface="Calibri" pitchFamily="34" charset="0"/>
+                <a:ea typeface="Calibri" pitchFamily="34" charset="-122"/>
+                <a:cs typeface="Calibri" pitchFamily="34" charset="-120"/>
+              </a:rPr>
+              <a:t>LECTURE DU DIAGRAMME</a:t>
+            </a:r>
+            <a:endParaRPr lang="en-US" sz="1050" dirty="0"/>
+          </a:p>
+        </p:txBody>
+      </p:sp>
+      <p:sp>
+        <p:nvSpPr>
+          <p:cNvPr id="9" name="Shape 6"/>
+          <p:cNvSpPr/>
+          <p:nvPr/>
+        </p:nvSpPr>
+        <p:spPr>
+          <a:xfrm>
+            <a:off x="8641080" y="2048256"/>
+            <a:ext cx="109728" cy="109728"/>
+          </a:xfrm>
+          <a:prstGeom prst="ellipse">
+            <a:avLst/>
+          </a:prstGeom>
+          <a:solidFill>
+            <a:srgbClr val="3C6FC3"/>
+          </a:solidFill>
+          <a:ln w="12700">
+            <a:solidFill>
+              <a:srgbClr val="3C6FC3"/>
+            </a:solidFill>
+            <a:prstDash val="solid"/>
+          </a:ln>
+        </p:spPr>
+      </p:sp>
+      <p:sp>
+        <p:nvSpPr>
+          <p:cNvPr id="10" name="Text 7"/>
+          <p:cNvSpPr/>
+          <p:nvPr/>
+        </p:nvSpPr>
+        <p:spPr>
+          <a:xfrm>
+            <a:off x="8915400" y="1901952"/>
+            <a:ext cx="2743200" cy="420624"/>
+          </a:xfrm>
+          <a:prstGeom prst="rect">
+            <a:avLst/>
+          </a:prstGeom>
+          <a:noFill/>
+          <a:ln/>
+        </p:spPr>
+        <p:txBody>
+          <a:bodyPr wrap="square" lIns="0" tIns="0" rIns="0" bIns="0" rtlCol="0" anchor="ctr"/>
+          <a:lstStyle/>
+          <a:p>
+            <a:pPr indent="0" marL="0">
+              <a:buNone/>
+            </a:pPr>
+            <a:r>
+              <a:rPr lang="en-US" sz="1150" dirty="0">
+                <a:solidFill>
+                  <a:srgbClr val="1B2A44"/>
+                </a:solidFill>
+                <a:latin typeface="Calibri" pitchFamily="34" charset="0"/>
+                <a:ea typeface="Calibri" pitchFamily="34" charset="-122"/>
+                <a:cs typeface="Calibri" pitchFamily="34" charset="-120"/>
+              </a:rPr>
+              <a:t>Trois acteurs, treize cas d'utilisation</a:t>
+            </a:r>
+            <a:endParaRPr lang="en-US" sz="1150" dirty="0"/>
+          </a:p>
+        </p:txBody>
+      </p:sp>
+      <p:sp>
+        <p:nvSpPr>
+          <p:cNvPr id="11" name="Shape 8"/>
+          <p:cNvSpPr/>
+          <p:nvPr/>
+        </p:nvSpPr>
+        <p:spPr>
+          <a:xfrm>
+            <a:off x="8641080" y="2505456"/>
+            <a:ext cx="109728" cy="109728"/>
+          </a:xfrm>
+          <a:prstGeom prst="ellipse">
+            <a:avLst/>
+          </a:prstGeom>
+          <a:solidFill>
+            <a:srgbClr val="3C6FC3"/>
+          </a:solidFill>
+          <a:ln w="12700">
+            <a:solidFill>
+              <a:srgbClr val="3C6FC3"/>
+            </a:solidFill>
+            <a:prstDash val="solid"/>
+          </a:ln>
+        </p:spPr>
+      </p:sp>
+      <p:sp>
+        <p:nvSpPr>
+          <p:cNvPr id="12" name="Text 9"/>
+          <p:cNvSpPr/>
+          <p:nvPr/>
+        </p:nvSpPr>
+        <p:spPr>
+          <a:xfrm>
+            <a:off x="8915400" y="2359152"/>
+            <a:ext cx="2743200" cy="420624"/>
+          </a:xfrm>
+          <a:prstGeom prst="rect">
+            <a:avLst/>
+          </a:prstGeom>
+          <a:noFill/>
+          <a:ln/>
+        </p:spPr>
+        <p:txBody>
+          <a:bodyPr wrap="square" lIns="0" tIns="0" rIns="0" bIns="0" rtlCol="0" anchor="ctr"/>
+          <a:lstStyle/>
+          <a:p>
+            <a:pPr indent="0" marL="0">
+              <a:buNone/>
+            </a:pPr>
+            <a:r>
+              <a:rPr lang="en-US" sz="1150" dirty="0">
+                <a:solidFill>
+                  <a:srgbClr val="1B2A44"/>
+                </a:solidFill>
+                <a:latin typeface="Calibri" pitchFamily="34" charset="0"/>
+                <a:ea typeface="Calibri" pitchFamily="34" charset="-122"/>
+                <a:cs typeface="Calibri" pitchFamily="34" charset="-120"/>
+              </a:rPr>
+              <a:t>Chaque cas inclut « S'authentifier » (include)</a:t>
+            </a:r>
+            <a:endParaRPr lang="en-US" sz="1150" dirty="0"/>
+          </a:p>
+        </p:txBody>
+      </p:sp>
+      <p:sp>
+        <p:nvSpPr>
+          <p:cNvPr id="13" name="Shape 10"/>
+          <p:cNvSpPr/>
+          <p:nvPr/>
+        </p:nvSpPr>
+        <p:spPr>
+          <a:xfrm>
+            <a:off x="8641080" y="2962656"/>
+            <a:ext cx="109728" cy="109728"/>
+          </a:xfrm>
+          <a:prstGeom prst="ellipse">
+            <a:avLst/>
+          </a:prstGeom>
+          <a:solidFill>
+            <a:srgbClr val="3C6FC3"/>
+          </a:solidFill>
+          <a:ln w="12700">
+            <a:solidFill>
+              <a:srgbClr val="3C6FC3"/>
+            </a:solidFill>
+            <a:prstDash val="solid"/>
+          </a:ln>
+        </p:spPr>
+      </p:sp>
+      <p:sp>
+        <p:nvSpPr>
+          <p:cNvPr id="14" name="Text 11"/>
+          <p:cNvSpPr/>
+          <p:nvPr/>
+        </p:nvSpPr>
+        <p:spPr>
+          <a:xfrm>
+            <a:off x="8915400" y="2816352"/>
+            <a:ext cx="2743200" cy="420624"/>
+          </a:xfrm>
+          <a:prstGeom prst="rect">
+            <a:avLst/>
+          </a:prstGeom>
+          <a:noFill/>
+          <a:ln/>
+        </p:spPr>
+        <p:txBody>
+          <a:bodyPr wrap="square" lIns="0" tIns="0" rIns="0" bIns="0" rtlCol="0" anchor="ctr"/>
+          <a:lstStyle/>
+          <a:p>
+            <a:pPr indent="0" marL="0">
+              <a:buNone/>
+            </a:pPr>
+            <a:r>
+              <a:rPr lang="en-US" sz="1150" dirty="0">
+                <a:solidFill>
+                  <a:srgbClr val="1B2A44"/>
+                </a:solidFill>
+                <a:latin typeface="Calibri" pitchFamily="34" charset="0"/>
+                <a:ea typeface="Calibri" pitchFamily="34" charset="-122"/>
+                <a:cs typeface="Calibri" pitchFamily="34" charset="-120"/>
+              </a:rPr>
+              <a:t>Administrateur : les 13 cas, sans exception</a:t>
+            </a:r>
+            <a:endParaRPr lang="en-US" sz="1150" dirty="0"/>
+          </a:p>
+        </p:txBody>
+      </p:sp>
+      <p:sp>
+        <p:nvSpPr>
+          <p:cNvPr id="15" name="Shape 12"/>
+          <p:cNvSpPr/>
+          <p:nvPr/>
+        </p:nvSpPr>
+        <p:spPr>
+          <a:xfrm>
+            <a:off x="8641080" y="3419856"/>
+            <a:ext cx="109728" cy="109728"/>
+          </a:xfrm>
+          <a:prstGeom prst="ellipse">
+            <a:avLst/>
+          </a:prstGeom>
+          <a:solidFill>
+            <a:srgbClr val="3C6FC3"/>
+          </a:solidFill>
+          <a:ln w="12700">
+            <a:solidFill>
+              <a:srgbClr val="3C6FC3"/>
+            </a:solidFill>
+            <a:prstDash val="solid"/>
+          </a:ln>
+        </p:spPr>
+      </p:sp>
+      <p:sp>
+        <p:nvSpPr>
+          <p:cNvPr id="16" name="Text 13"/>
+          <p:cNvSpPr/>
+          <p:nvPr/>
+        </p:nvSpPr>
+        <p:spPr>
+          <a:xfrm>
+            <a:off x="8915400" y="3273552"/>
+            <a:ext cx="2743200" cy="420624"/>
+          </a:xfrm>
+          <a:prstGeom prst="rect">
+            <a:avLst/>
+          </a:prstGeom>
+          <a:noFill/>
+          <a:ln/>
+        </p:spPr>
+        <p:txBody>
+          <a:bodyPr wrap="square" lIns="0" tIns="0" rIns="0" bIns="0" rtlCol="0" anchor="ctr"/>
+          <a:lstStyle/>
+          <a:p>
+            <a:pPr indent="0" marL="0">
+              <a:buNone/>
+            </a:pPr>
+            <a:r>
+              <a:rPr lang="en-US" sz="1150" dirty="0">
+                <a:solidFill>
+                  <a:srgbClr val="1B2A44"/>
+                </a:solidFill>
+                <a:latin typeface="Calibri" pitchFamily="34" charset="0"/>
+                <a:ea typeface="Calibri" pitchFamily="34" charset="-122"/>
+                <a:cs typeface="Calibri" pitchFamily="34" charset="-120"/>
+              </a:rPr>
+              <a:t>Directeur commercial : 5 cas, dont les employés en consultation</a:t>
+            </a:r>
+            <a:endParaRPr lang="en-US" sz="1150" dirty="0"/>
+          </a:p>
+        </p:txBody>
+      </p:sp>
+      <p:sp>
+        <p:nvSpPr>
+          <p:cNvPr id="17" name="Shape 14"/>
+          <p:cNvSpPr/>
+          <p:nvPr/>
+        </p:nvSpPr>
+        <p:spPr>
+          <a:xfrm>
+            <a:off x="8641080" y="3877056"/>
+            <a:ext cx="109728" cy="109728"/>
+          </a:xfrm>
+          <a:prstGeom prst="ellipse">
+            <a:avLst/>
+          </a:prstGeom>
+          <a:solidFill>
+            <a:srgbClr val="3C6FC3"/>
+          </a:solidFill>
+          <a:ln w="12700">
+            <a:solidFill>
+              <a:srgbClr val="3C6FC3"/>
+            </a:solidFill>
+            <a:prstDash val="solid"/>
+          </a:ln>
+        </p:spPr>
+      </p:sp>
+      <p:sp>
+        <p:nvSpPr>
+          <p:cNvPr id="18" name="Text 15"/>
+          <p:cNvSpPr/>
+          <p:nvPr/>
+        </p:nvSpPr>
+        <p:spPr>
+          <a:xfrm>
+            <a:off x="8915400" y="3730752"/>
+            <a:ext cx="2743200" cy="420624"/>
+          </a:xfrm>
+          <a:prstGeom prst="rect">
+            <a:avLst/>
+          </a:prstGeom>
+          <a:noFill/>
+          <a:ln/>
+        </p:spPr>
+        <p:txBody>
+          <a:bodyPr wrap="square" lIns="0" tIns="0" rIns="0" bIns="0" rtlCol="0" anchor="ctr"/>
+          <a:lstStyle/>
+          <a:p>
+            <a:pPr indent="0" marL="0">
+              <a:buNone/>
+            </a:pPr>
+            <a:r>
+              <a:rPr lang="en-US" sz="1150" dirty="0">
+                <a:solidFill>
+                  <a:srgbClr val="1B2A44"/>
+                </a:solidFill>
+                <a:latin typeface="Calibri" pitchFamily="34" charset="0"/>
+                <a:ea typeface="Calibri" pitchFamily="34" charset="-122"/>
+                <a:cs typeface="Calibri" pitchFamily="34" charset="-120"/>
+              </a:rPr>
+              <a:t>Utilisateur : 3 cas — pointage, demandes, notifications</a:t>
+            </a:r>
+            <a:endParaRPr lang="en-US" sz="1150" dirty="0"/>
+          </a:p>
+        </p:txBody>
+      </p:sp>
     </p:spTree>
   </p:cSld>
   <p:clrMapOvr>

--- a/presentation/Soutenance_PFE_Oussema_Korbosli.pptx
+++ b/presentation/Soutenance_PFE_Oussema_Korbosli.pptx
@@ -10663,8 +10663,8 @@
         </p:blipFill>
         <p:spPr>
           <a:xfrm>
-            <a:off x="1056006" y="1298448"/>
-            <a:ext cx="6885683" cy="4846320"/>
+            <a:off x="1505216" y="1298448"/>
+            <a:ext cx="5987264" cy="4846320"/>
           </a:xfrm>
           <a:prstGeom prst="rect">
             <a:avLst/>

--- a/presentation/Soutenance_PFE_Oussema_Korbosli.pptx
+++ b/presentation/Soutenance_PFE_Oussema_Korbosli.pptx
@@ -10663,8 +10663,8 @@
         </p:blipFill>
         <p:spPr>
           <a:xfrm>
-            <a:off x="1505216" y="1298448"/>
-            <a:ext cx="5987264" cy="4846320"/>
+            <a:off x="1379632" y="1298448"/>
+            <a:ext cx="6238431" cy="4846320"/>
           </a:xfrm>
           <a:prstGeom prst="rect">
             <a:avLst/>

--- a/presentation/Soutenance_PFE_Oussema_Korbosli.pptx
+++ b/presentation/Soutenance_PFE_Oussema_Korbosli.pptx
@@ -10663,8 +10663,8 @@
         </p:blipFill>
         <p:spPr>
           <a:xfrm>
-            <a:off x="1379632" y="1298448"/>
-            <a:ext cx="6238431" cy="4846320"/>
+            <a:off x="1961492" y="1188720"/>
+            <a:ext cx="5074713" cy="5175504"/>
           </a:xfrm>
           <a:prstGeom prst="rect">
             <a:avLst/>

--- a/presentation/Soutenance_PFE_Oussema_Korbosli.pptx
+++ b/presentation/Soutenance_PFE_Oussema_Korbosli.pptx
@@ -10663,8 +10663,8 @@
         </p:blipFill>
         <p:spPr>
           <a:xfrm>
-            <a:off x="1961492" y="1188720"/>
-            <a:ext cx="5074713" cy="5175504"/>
+            <a:off x="1298904" y="1170432"/>
+            <a:ext cx="3985873" cy="5212080"/>
           </a:xfrm>
           <a:prstGeom prst="rect">
             <a:avLst/>
@@ -10679,8 +10679,8 @@
         </p:nvSpPr>
         <p:spPr>
           <a:xfrm>
-            <a:off x="8641080" y="1572768"/>
-            <a:ext cx="3017520" cy="274320"/>
+            <a:off x="6446520" y="1700784"/>
+            <a:ext cx="5120640" cy="274320"/>
           </a:xfrm>
           <a:prstGeom prst="rect">
             <a:avLst/>
@@ -10718,7 +10718,7 @@
         </p:nvSpPr>
         <p:spPr>
           <a:xfrm>
-            <a:off x="8641080" y="2048256"/>
+            <a:off x="6446520" y="2231136"/>
             <a:ext cx="109728" cy="109728"/>
           </a:xfrm>
           <a:prstGeom prst="ellipse">
@@ -10743,8 +10743,8 @@
         </p:nvSpPr>
         <p:spPr>
           <a:xfrm>
-            <a:off x="8915400" y="1901952"/>
-            <a:ext cx="2743200" cy="420624"/>
+            <a:off x="6720840" y="2084832"/>
+            <a:ext cx="4846320" cy="420624"/>
           </a:xfrm>
           <a:prstGeom prst="rect">
             <a:avLst/>
@@ -10760,7 +10760,7 @@
               <a:buNone/>
             </a:pPr>
             <a:r>
-              <a:rPr lang="en-US" sz="1150" dirty="0">
+              <a:rPr lang="en-US" sz="1300" dirty="0">
                 <a:solidFill>
                   <a:srgbClr val="1B2A44"/>
                 </a:solidFill>
@@ -10770,7 +10770,7 @@
               </a:rPr>
               <a:t>Trois acteurs, treize cas d'utilisation</a:t>
             </a:r>
-            <a:endParaRPr lang="en-US" sz="1150" dirty="0"/>
+            <a:endParaRPr lang="en-US" sz="1300" dirty="0"/>
           </a:p>
         </p:txBody>
       </p:sp>
@@ -10782,7 +10782,7 @@
         </p:nvSpPr>
         <p:spPr>
           <a:xfrm>
-            <a:off x="8641080" y="2505456"/>
+            <a:off x="6446520" y="2688336"/>
             <a:ext cx="109728" cy="109728"/>
           </a:xfrm>
           <a:prstGeom prst="ellipse">
@@ -10807,8 +10807,8 @@
         </p:nvSpPr>
         <p:spPr>
           <a:xfrm>
-            <a:off x="8915400" y="2359152"/>
-            <a:ext cx="2743200" cy="420624"/>
+            <a:off x="6720840" y="2542032"/>
+            <a:ext cx="4846320" cy="420624"/>
           </a:xfrm>
           <a:prstGeom prst="rect">
             <a:avLst/>
@@ -10824,7 +10824,7 @@
               <a:buNone/>
             </a:pPr>
             <a:r>
-              <a:rPr lang="en-US" sz="1150" dirty="0">
+              <a:rPr lang="en-US" sz="1300" dirty="0">
                 <a:solidFill>
                   <a:srgbClr val="1B2A44"/>
                 </a:solidFill>
@@ -10834,7 +10834,7 @@
               </a:rPr>
               <a:t>Chaque cas inclut « S'authentifier » (include)</a:t>
             </a:r>
-            <a:endParaRPr lang="en-US" sz="1150" dirty="0"/>
+            <a:endParaRPr lang="en-US" sz="1300" dirty="0"/>
           </a:p>
         </p:txBody>
       </p:sp>
@@ -10846,7 +10846,7 @@
         </p:nvSpPr>
         <p:spPr>
           <a:xfrm>
-            <a:off x="8641080" y="2962656"/>
+            <a:off x="6446520" y="3145536"/>
             <a:ext cx="109728" cy="109728"/>
           </a:xfrm>
           <a:prstGeom prst="ellipse">
@@ -10871,8 +10871,8 @@
         </p:nvSpPr>
         <p:spPr>
           <a:xfrm>
-            <a:off x="8915400" y="2816352"/>
-            <a:ext cx="2743200" cy="420624"/>
+            <a:off x="6720840" y="2999232"/>
+            <a:ext cx="4846320" cy="420624"/>
           </a:xfrm>
           <a:prstGeom prst="rect">
             <a:avLst/>
@@ -10888,7 +10888,7 @@
               <a:buNone/>
             </a:pPr>
             <a:r>
-              <a:rPr lang="en-US" sz="1150" dirty="0">
+              <a:rPr lang="en-US" sz="1300" dirty="0">
                 <a:solidFill>
                   <a:srgbClr val="1B2A44"/>
                 </a:solidFill>
@@ -10898,7 +10898,7 @@
               </a:rPr>
               <a:t>Administrateur : les 13 cas, sans exception</a:t>
             </a:r>
-            <a:endParaRPr lang="en-US" sz="1150" dirty="0"/>
+            <a:endParaRPr lang="en-US" sz="1300" dirty="0"/>
           </a:p>
         </p:txBody>
       </p:sp>
@@ -10910,7 +10910,7 @@
         </p:nvSpPr>
         <p:spPr>
           <a:xfrm>
-            <a:off x="8641080" y="3419856"/>
+            <a:off x="6446520" y="3602736"/>
             <a:ext cx="109728" cy="109728"/>
           </a:xfrm>
           <a:prstGeom prst="ellipse">
@@ -10935,8 +10935,8 @@
         </p:nvSpPr>
         <p:spPr>
           <a:xfrm>
-            <a:off x="8915400" y="3273552"/>
-            <a:ext cx="2743200" cy="420624"/>
+            <a:off x="6720840" y="3456432"/>
+            <a:ext cx="4846320" cy="420624"/>
           </a:xfrm>
           <a:prstGeom prst="rect">
             <a:avLst/>
@@ -10952,7 +10952,7 @@
               <a:buNone/>
             </a:pPr>
             <a:r>
-              <a:rPr lang="en-US" sz="1150" dirty="0">
+              <a:rPr lang="en-US" sz="1300" dirty="0">
                 <a:solidFill>
                   <a:srgbClr val="1B2A44"/>
                 </a:solidFill>
@@ -10962,7 +10962,7 @@
               </a:rPr>
               <a:t>Directeur commercial : 5 cas, dont les employés en consultation</a:t>
             </a:r>
-            <a:endParaRPr lang="en-US" sz="1150" dirty="0"/>
+            <a:endParaRPr lang="en-US" sz="1300" dirty="0"/>
           </a:p>
         </p:txBody>
       </p:sp>
@@ -10974,7 +10974,7 @@
         </p:nvSpPr>
         <p:spPr>
           <a:xfrm>
-            <a:off x="8641080" y="3877056"/>
+            <a:off x="6446520" y="4059936"/>
             <a:ext cx="109728" cy="109728"/>
           </a:xfrm>
           <a:prstGeom prst="ellipse">
@@ -10999,8 +10999,8 @@
         </p:nvSpPr>
         <p:spPr>
           <a:xfrm>
-            <a:off x="8915400" y="3730752"/>
-            <a:ext cx="2743200" cy="420624"/>
+            <a:off x="6720840" y="3913632"/>
+            <a:ext cx="4846320" cy="420624"/>
           </a:xfrm>
           <a:prstGeom prst="rect">
             <a:avLst/>
@@ -11016,7 +11016,7 @@
               <a:buNone/>
             </a:pPr>
             <a:r>
-              <a:rPr lang="en-US" sz="1150" dirty="0">
+              <a:rPr lang="en-US" sz="1300" dirty="0">
                 <a:solidFill>
                   <a:srgbClr val="1B2A44"/>
                 </a:solidFill>
@@ -11026,7 +11026,7 @@
               </a:rPr>
               <a:t>Utilisateur : 3 cas — pointage, demandes, notifications</a:t>
             </a:r>
-            <a:endParaRPr lang="en-US" sz="1150" dirty="0"/>
+            <a:endParaRPr lang="en-US" sz="1300" dirty="0"/>
           </a:p>
         </p:txBody>
       </p:sp>

--- a/presentation/Soutenance_PFE_Oussema_Korbosli.pptx
+++ b/presentation/Soutenance_PFE_Oussema_Korbosli.pptx
@@ -23320,8 +23320,8 @@
         </p:nvSpPr>
         <p:spPr>
           <a:xfrm>
-            <a:off x="566928" y="1600200"/>
-            <a:ext cx="8229600" cy="329184"/>
+            <a:off x="566928" y="1170432"/>
+            <a:ext cx="8229600" cy="310896"/>
           </a:xfrm>
           <a:prstGeom prst="rect">
             <a:avLst/>
@@ -23359,24 +23359,24 @@
         </p:nvSpPr>
         <p:spPr>
           <a:xfrm>
-            <a:off x="566928" y="1993392"/>
-            <a:ext cx="10058400" cy="731520"/>
-          </a:xfrm>
-          <a:prstGeom prst="rect">
-            <a:avLst/>
-          </a:prstGeom>
-          <a:noFill/>
-          <a:ln/>
-        </p:spPr>
-        <p:txBody>
-          <a:bodyPr wrap="square" lIns="0" tIns="0" rIns="0" bIns="0" rtlCol="0" anchor="ctr"/>
-          <a:lstStyle/>
-          <a:p>
-            <a:pPr indent="0" marL="0">
-              <a:buNone/>
-            </a:pPr>
-            <a:r>
-              <a:rPr lang="en-US" sz="3400" b="1" dirty="0">
+            <a:off x="566928" y="1517904"/>
+            <a:ext cx="10515600" cy="640080"/>
+          </a:xfrm>
+          <a:prstGeom prst="rect">
+            <a:avLst/>
+          </a:prstGeom>
+          <a:noFill/>
+          <a:ln/>
+        </p:spPr>
+        <p:txBody>
+          <a:bodyPr wrap="square" lIns="0" tIns="0" rIns="0" bIns="0" rtlCol="0" anchor="ctr"/>
+          <a:lstStyle/>
+          <a:p>
+            <a:pPr indent="0" marL="0">
+              <a:buNone/>
+            </a:pPr>
+            <a:r>
+              <a:rPr lang="en-US" sz="3000" b="1" dirty="0">
                 <a:solidFill>
                   <a:srgbClr val="FFFFFF"/>
                 </a:solidFill>
@@ -23384,9 +23384,9 @@
                 <a:ea typeface="Georgia" pitchFamily="34" charset="-122"/>
                 <a:cs typeface="Georgia" pitchFamily="34" charset="-120"/>
               </a:rPr>
-              <a:t>Démonstration de l'application web</a:t>
-            </a:r>
-            <a:endParaRPr lang="en-US" sz="3400" dirty="0"/>
+              <a:t>Parcours de démonstration — les trois rôles</a:t>
+            </a:r>
+            <a:endParaRPr lang="en-US" sz="3000" dirty="0"/>
           </a:p>
         </p:txBody>
       </p:sp>
@@ -23398,7 +23398,7 @@
         </p:nvSpPr>
         <p:spPr>
           <a:xfrm>
-            <a:off x="566928" y="2816352"/>
+            <a:off x="566928" y="2231136"/>
             <a:ext cx="1234440" cy="27432"/>
           </a:xfrm>
           <a:prstGeom prst="rect">
@@ -23418,24 +23418,24 @@
         </p:nvSpPr>
         <p:spPr>
           <a:xfrm>
-            <a:off x="566928" y="3090672"/>
-            <a:ext cx="10058400" cy="329184"/>
-          </a:xfrm>
-          <a:prstGeom prst="rect">
-            <a:avLst/>
-          </a:prstGeom>
-          <a:noFill/>
-          <a:ln/>
-        </p:spPr>
-        <p:txBody>
-          <a:bodyPr wrap="square" lIns="0" tIns="0" rIns="0" bIns="0" rtlCol="0" anchor="ctr"/>
-          <a:lstStyle/>
-          <a:p>
-            <a:pPr indent="0" marL="0">
-              <a:buNone/>
-            </a:pPr>
-            <a:r>
-              <a:rPr lang="en-US" sz="1400" dirty="0">
+            <a:off x="566928" y="2432304"/>
+            <a:ext cx="10515600" cy="329184"/>
+          </a:xfrm>
+          <a:prstGeom prst="rect">
+            <a:avLst/>
+          </a:prstGeom>
+          <a:noFill/>
+          <a:ln/>
+        </p:spPr>
+        <p:txBody>
+          <a:bodyPr wrap="square" lIns="0" tIns="0" rIns="0" bIns="0" rtlCol="0" anchor="ctr"/>
+          <a:lstStyle/>
+          <a:p>
+            <a:pPr indent="0" marL="0">
+              <a:buNone/>
+            </a:pPr>
+            <a:r>
+              <a:rPr lang="en-US" sz="1300" dirty="0">
                 <a:solidFill>
                   <a:srgbClr val="CBD8EE"/>
                 </a:solidFill>
@@ -23443,9 +23443,9 @@
                 <a:ea typeface="Calibri" pitchFamily="34" charset="-122"/>
                 <a:cs typeface="Calibri" pitchFamily="34" charset="-120"/>
               </a:rPr>
-              <a:t>Parcours présenté en direct :</a:t>
-            </a:r>
-            <a:endParaRPr lang="en-US" sz="1400" dirty="0"/>
+              <a:t>Le même circuit est suivi de bout en bout : on se connecte, on agit, et l'on voit la trace de l'action.</a:t>
+            </a:r>
+            <a:endParaRPr lang="en-US" sz="1300" dirty="0"/>
           </a:p>
         </p:txBody>
       </p:sp>
@@ -23457,12 +23457,12 @@
         </p:nvSpPr>
         <p:spPr>
           <a:xfrm>
-            <a:off x="566928" y="3611880"/>
-            <a:ext cx="2468880" cy="1600200"/>
+            <a:off x="566928" y="2962656"/>
+            <a:ext cx="3502152" cy="1389888"/>
           </a:xfrm>
           <a:prstGeom prst="roundRect">
             <a:avLst>
-              <a:gd name="adj" fmla="val 4571"/>
+              <a:gd name="adj" fmla="val 5263"/>
             </a:avLst>
           </a:prstGeom>
           <a:solidFill>
@@ -23484,8 +23484,8 @@
         </p:nvSpPr>
         <p:spPr>
           <a:xfrm>
-            <a:off x="1600200" y="3803904"/>
-            <a:ext cx="402336" cy="402336"/>
+            <a:off x="749808" y="3145536"/>
+            <a:ext cx="384048" cy="384048"/>
           </a:xfrm>
           <a:prstGeom prst="ellipse">
             <a:avLst/>
@@ -23509,8 +23509,8 @@
         </p:nvSpPr>
         <p:spPr>
           <a:xfrm>
-            <a:off x="1600200" y="3803904"/>
-            <a:ext cx="402336" cy="402336"/>
+            <a:off x="749808" y="3145536"/>
+            <a:ext cx="384048" cy="384048"/>
           </a:xfrm>
           <a:prstGeom prst="rect">
             <a:avLst/>
@@ -23548,24 +23548,24 @@
         </p:nvSpPr>
         <p:spPr>
           <a:xfrm>
-            <a:off x="713232" y="4297680"/>
-            <a:ext cx="2176272" cy="365760"/>
-          </a:xfrm>
-          <a:prstGeom prst="rect">
-            <a:avLst/>
-          </a:prstGeom>
-          <a:noFill/>
-          <a:ln/>
-        </p:spPr>
-        <p:txBody>
-          <a:bodyPr wrap="square" lIns="0" tIns="0" rIns="0" bIns="0" rtlCol="0" anchor="ctr"/>
-          <a:lstStyle/>
-          <a:p>
-            <a:pPr algn="ctr" indent="0" marL="0">
-              <a:buNone/>
-            </a:pPr>
-            <a:r>
-              <a:rPr lang="en-US" sz="1350" b="1" dirty="0">
+            <a:off x="1225296" y="3127248"/>
+            <a:ext cx="1828800" cy="310896"/>
+          </a:xfrm>
+          <a:prstGeom prst="rect">
+            <a:avLst/>
+          </a:prstGeom>
+          <a:noFill/>
+          <a:ln/>
+        </p:spPr>
+        <p:txBody>
+          <a:bodyPr wrap="square" lIns="0" tIns="0" rIns="0" bIns="0" rtlCol="0" anchor="ctr"/>
+          <a:lstStyle/>
+          <a:p>
+            <a:pPr indent="0" marL="0">
+              <a:buNone/>
+            </a:pPr>
+            <a:r>
+              <a:rPr lang="en-US" sz="1400" b="1" dirty="0">
                 <a:solidFill>
                   <a:srgbClr val="FFFFFF"/>
                 </a:solidFill>
@@ -23573,9 +23573,9 @@
                 <a:ea typeface="Georgia" pitchFamily="34" charset="-122"/>
                 <a:cs typeface="Georgia" pitchFamily="34" charset="-120"/>
               </a:rPr>
-              <a:t>Authentification</a:t>
-            </a:r>
-            <a:endParaRPr lang="en-US" sz="1350" dirty="0"/>
+              <a:t>Connexion</a:t>
+            </a:r>
+            <a:endParaRPr lang="en-US" sz="1400" dirty="0"/>
           </a:p>
         </p:txBody>
       </p:sp>
@@ -23587,35 +23587,78 @@
         </p:nvSpPr>
         <p:spPr>
           <a:xfrm>
-            <a:off x="713232" y="4663440"/>
-            <a:ext cx="2176272" cy="457200"/>
-          </a:xfrm>
-          <a:prstGeom prst="rect">
-            <a:avLst/>
-          </a:prstGeom>
-          <a:noFill/>
-          <a:ln/>
-        </p:spPr>
-        <p:txBody>
-          <a:bodyPr wrap="square" lIns="0" tIns="0" rIns="0" bIns="0" rtlCol="0" anchor="t"/>
+            <a:off x="3054096" y="3145536"/>
+            <a:ext cx="868680" cy="274320"/>
+          </a:xfrm>
+          <a:prstGeom prst="rect">
+            <a:avLst>
+              <a:gd name="adj" fmla="val 13333"/>
+            </a:avLst>
+          </a:prstGeom>
+          <a:solidFill>
+            <a:srgbClr val="3C6FC3"/>
+          </a:solidFill>
+          <a:ln/>
+        </p:spPr>
+        <p:txBody>
+          <a:bodyPr wrap="square" lIns="0" tIns="0" rIns="0" bIns="0" rtlCol="0" anchor="ctr"/>
           <a:lstStyle/>
           <a:p>
             <a:pPr algn="ctr" indent="0" marL="0">
-              <a:lnSpc>
-                <a:spcPts val="1400"/>
-              </a:lnSpc>
-              <a:buNone/>
-            </a:pPr>
-            <a:r>
-              <a:rPr lang="en-US" sz="1050" dirty="0">
-                <a:solidFill>
-                  <a:srgbClr val="CBD8EE"/>
+              <a:buNone/>
+            </a:pPr>
+            <a:r>
+              <a:rPr lang="en-US" sz="850" b="1" dirty="0">
+                <a:solidFill>
+                  <a:srgbClr val="0A2558"/>
                 </a:solidFill>
                 <a:latin typeface="Calibri" pitchFamily="34" charset="0"/>
                 <a:ea typeface="Calibri" pitchFamily="34" charset="-122"/>
                 <a:cs typeface="Calibri" pitchFamily="34" charset="-120"/>
               </a:rPr>
-              <a:t>Connexion et contrôle des rôles</a:t>
+              <a:t>ADMIN</a:t>
+            </a:r>
+            <a:endParaRPr lang="en-US" sz="850" dirty="0"/>
+          </a:p>
+        </p:txBody>
+      </p:sp>
+      <p:sp>
+        <p:nvSpPr>
+          <p:cNvPr id="13" name="Text 11"/>
+          <p:cNvSpPr/>
+          <p:nvPr/>
+        </p:nvSpPr>
+        <p:spPr>
+          <a:xfrm>
+            <a:off x="749808" y="3584448"/>
+            <a:ext cx="3154680" cy="640080"/>
+          </a:xfrm>
+          <a:prstGeom prst="rect">
+            <a:avLst/>
+          </a:prstGeom>
+          <a:noFill/>
+          <a:ln/>
+        </p:spPr>
+        <p:txBody>
+          <a:bodyPr wrap="square" lIns="0" tIns="0" rIns="0" bIns="0" rtlCol="0" anchor="t"/>
+          <a:lstStyle/>
+          <a:p>
+            <a:pPr indent="0" marL="0">
+              <a:lnSpc>
+                <a:spcPts val="1300"/>
+              </a:lnSpc>
+              <a:buNone/>
+            </a:pPr>
+            <a:r>
+              <a:rPr lang="en-US" sz="1050" dirty="0">
+                <a:solidFill>
+                  <a:srgbClr val="CBD8EE"/>
+                </a:solidFill>
+                <a:latin typeface="Calibri" pitchFamily="34" charset="0"/>
+                <a:ea typeface="Calibri" pitchFamily="34" charset="-122"/>
+                <a:cs typeface="Calibri" pitchFamily="34" charset="-120"/>
+              </a:rPr>
+              <a:t>Identifiants vérifiés, rôle chargé en session</a:t>
             </a:r>
             <a:endParaRPr lang="en-US" sz="1050" dirty="0"/>
           </a:p>
@@ -23623,18 +23666,18 @@
       </p:sp>
       <p:sp>
         <p:nvSpPr>
-          <p:cNvPr id="13" name="Shape 11"/>
-          <p:cNvSpPr/>
-          <p:nvPr/>
-        </p:nvSpPr>
-        <p:spPr>
-          <a:xfrm>
-            <a:off x="3383280" y="3611880"/>
-            <a:ext cx="2468880" cy="1600200"/>
+          <p:cNvPr id="14" name="Shape 12"/>
+          <p:cNvSpPr/>
+          <p:nvPr/>
+        </p:nvSpPr>
+        <p:spPr>
+          <a:xfrm>
+            <a:off x="4251960" y="2962656"/>
+            <a:ext cx="3502152" cy="1389888"/>
           </a:xfrm>
           <a:prstGeom prst="roundRect">
             <a:avLst>
-              <a:gd name="adj" fmla="val 4571"/>
+              <a:gd name="adj" fmla="val 5263"/>
             </a:avLst>
           </a:prstGeom>
           <a:solidFill>
@@ -23650,14 +23693,14 @@
       </p:sp>
       <p:sp>
         <p:nvSpPr>
-          <p:cNvPr id="14" name="Shape 12"/>
-          <p:cNvSpPr/>
-          <p:nvPr/>
-        </p:nvSpPr>
-        <p:spPr>
-          <a:xfrm>
-            <a:off x="4416552" y="3803904"/>
-            <a:ext cx="402336" cy="402336"/>
+          <p:cNvPr id="15" name="Shape 13"/>
+          <p:cNvSpPr/>
+          <p:nvPr/>
+        </p:nvSpPr>
+        <p:spPr>
+          <a:xfrm>
+            <a:off x="4434840" y="3145536"/>
+            <a:ext cx="384048" cy="384048"/>
           </a:xfrm>
           <a:prstGeom prst="ellipse">
             <a:avLst/>
@@ -23675,14 +23718,14 @@
       </p:sp>
       <p:sp>
         <p:nvSpPr>
-          <p:cNvPr id="15" name="Text 13"/>
-          <p:cNvSpPr/>
-          <p:nvPr/>
-        </p:nvSpPr>
-        <p:spPr>
-          <a:xfrm>
-            <a:off x="4416552" y="3803904"/>
-            <a:ext cx="402336" cy="402336"/>
+          <p:cNvPr id="16" name="Text 14"/>
+          <p:cNvSpPr/>
+          <p:nvPr/>
+        </p:nvSpPr>
+        <p:spPr>
+          <a:xfrm>
+            <a:off x="4434840" y="3145536"/>
+            <a:ext cx="384048" cy="384048"/>
           </a:xfrm>
           <a:prstGeom prst="rect">
             <a:avLst/>
@@ -23714,30 +23757,30 @@
       </p:sp>
       <p:sp>
         <p:nvSpPr>
-          <p:cNvPr id="16" name="Text 14"/>
-          <p:cNvSpPr/>
-          <p:nvPr/>
-        </p:nvSpPr>
-        <p:spPr>
-          <a:xfrm>
-            <a:off x="3529584" y="4297680"/>
-            <a:ext cx="2176272" cy="365760"/>
-          </a:xfrm>
-          <a:prstGeom prst="rect">
-            <a:avLst/>
-          </a:prstGeom>
-          <a:noFill/>
-          <a:ln/>
-        </p:spPr>
-        <p:txBody>
-          <a:bodyPr wrap="square" lIns="0" tIns="0" rIns="0" bIns="0" rtlCol="0" anchor="ctr"/>
-          <a:lstStyle/>
-          <a:p>
-            <a:pPr algn="ctr" indent="0" marL="0">
-              <a:buNone/>
-            </a:pPr>
-            <a:r>
-              <a:rPr lang="en-US" sz="1350" b="1" dirty="0">
+          <p:cNvPr id="17" name="Text 15"/>
+          <p:cNvSpPr/>
+          <p:nvPr/>
+        </p:nvSpPr>
+        <p:spPr>
+          <a:xfrm>
+            <a:off x="4910328" y="3127248"/>
+            <a:ext cx="1828800" cy="310896"/>
+          </a:xfrm>
+          <a:prstGeom prst="rect">
+            <a:avLst/>
+          </a:prstGeom>
+          <a:noFill/>
+          <a:ln/>
+        </p:spPr>
+        <p:txBody>
+          <a:bodyPr wrap="square" lIns="0" tIns="0" rIns="0" bIns="0" rtlCol="0" anchor="ctr"/>
+          <a:lstStyle/>
+          <a:p>
+            <a:pPr indent="0" marL="0">
+              <a:buNone/>
+            </a:pPr>
+            <a:r>
+              <a:rPr lang="en-US" sz="1400" b="1" dirty="0">
                 <a:solidFill>
                   <a:srgbClr val="FFFFFF"/>
                 </a:solidFill>
@@ -23745,49 +23788,92 @@
                 <a:ea typeface="Georgia" pitchFamily="34" charset="-122"/>
                 <a:cs typeface="Georgia" pitchFamily="34" charset="-120"/>
               </a:rPr>
-              <a:t>Gestion du réseau</a:t>
-            </a:r>
-            <a:endParaRPr lang="en-US" sz="1350" dirty="0"/>
-          </a:p>
-        </p:txBody>
-      </p:sp>
-      <p:sp>
-        <p:nvSpPr>
-          <p:cNvPr id="17" name="Text 15"/>
-          <p:cNvSpPr/>
-          <p:nvPr/>
-        </p:nvSpPr>
-        <p:spPr>
-          <a:xfrm>
-            <a:off x="3529584" y="4663440"/>
-            <a:ext cx="2176272" cy="457200"/>
-          </a:xfrm>
-          <a:prstGeom prst="rect">
-            <a:avLst/>
-          </a:prstGeom>
-          <a:noFill/>
-          <a:ln/>
-        </p:spPr>
-        <p:txBody>
-          <a:bodyPr wrap="square" lIns="0" tIns="0" rIns="0" bIns="0" rtlCol="0" anchor="t"/>
+              <a:t>Tableau de bord</a:t>
+            </a:r>
+            <a:endParaRPr lang="en-US" sz="1400" dirty="0"/>
+          </a:p>
+        </p:txBody>
+      </p:sp>
+      <p:sp>
+        <p:nvSpPr>
+          <p:cNvPr id="18" name="Text 16"/>
+          <p:cNvSpPr/>
+          <p:nvPr/>
+        </p:nvSpPr>
+        <p:spPr>
+          <a:xfrm>
+            <a:off x="6739128" y="3145536"/>
+            <a:ext cx="868680" cy="274320"/>
+          </a:xfrm>
+          <a:prstGeom prst="rect">
+            <a:avLst>
+              <a:gd name="adj" fmla="val 13333"/>
+            </a:avLst>
+          </a:prstGeom>
+          <a:solidFill>
+            <a:srgbClr val="3C6FC3"/>
+          </a:solidFill>
+          <a:ln/>
+        </p:spPr>
+        <p:txBody>
+          <a:bodyPr wrap="square" lIns="0" tIns="0" rIns="0" bIns="0" rtlCol="0" anchor="ctr"/>
           <a:lstStyle/>
           <a:p>
             <a:pPr algn="ctr" indent="0" marL="0">
-              <a:lnSpc>
-                <a:spcPts val="1400"/>
-              </a:lnSpc>
-              <a:buNone/>
-            </a:pPr>
-            <a:r>
-              <a:rPr lang="en-US" sz="1050" dirty="0">
-                <a:solidFill>
-                  <a:srgbClr val="CBD8EE"/>
+              <a:buNone/>
+            </a:pPr>
+            <a:r>
+              <a:rPr lang="en-US" sz="850" b="1" dirty="0">
+                <a:solidFill>
+                  <a:srgbClr val="0A2558"/>
                 </a:solidFill>
                 <a:latin typeface="Calibri" pitchFamily="34" charset="0"/>
                 <a:ea typeface="Calibri" pitchFamily="34" charset="-122"/>
                 <a:cs typeface="Calibri" pitchFamily="34" charset="-120"/>
               </a:rPr>
-              <a:t>Agences, employés, clients et objectifs</a:t>
+              <a:t>ADMIN</a:t>
+            </a:r>
+            <a:endParaRPr lang="en-US" sz="850" dirty="0"/>
+          </a:p>
+        </p:txBody>
+      </p:sp>
+      <p:sp>
+        <p:nvSpPr>
+          <p:cNvPr id="19" name="Text 17"/>
+          <p:cNvSpPr/>
+          <p:nvPr/>
+        </p:nvSpPr>
+        <p:spPr>
+          <a:xfrm>
+            <a:off x="4434840" y="3584448"/>
+            <a:ext cx="3154680" cy="640080"/>
+          </a:xfrm>
+          <a:prstGeom prst="rect">
+            <a:avLst/>
+          </a:prstGeom>
+          <a:noFill/>
+          <a:ln/>
+        </p:spPr>
+        <p:txBody>
+          <a:bodyPr wrap="square" lIns="0" tIns="0" rIns="0" bIns="0" rtlCol="0" anchor="t"/>
+          <a:lstStyle/>
+          <a:p>
+            <a:pPr indent="0" marL="0">
+              <a:lnSpc>
+                <a:spcPts val="1300"/>
+              </a:lnSpc>
+              <a:buNone/>
+            </a:pPr>
+            <a:r>
+              <a:rPr lang="en-US" sz="1050" dirty="0">
+                <a:solidFill>
+                  <a:srgbClr val="CBD8EE"/>
+                </a:solidFill>
+                <a:latin typeface="Calibri" pitchFamily="34" charset="0"/>
+                <a:ea typeface="Calibri" pitchFamily="34" charset="-122"/>
+                <a:cs typeface="Calibri" pitchFamily="34" charset="-120"/>
+              </a:rPr>
+              <a:t>Indicateurs, graphiques et actions requises</a:t>
             </a:r>
             <a:endParaRPr lang="en-US" sz="1050" dirty="0"/>
           </a:p>
@@ -23795,18 +23881,18 @@
       </p:sp>
       <p:sp>
         <p:nvSpPr>
-          <p:cNvPr id="18" name="Shape 16"/>
-          <p:cNvSpPr/>
-          <p:nvPr/>
-        </p:nvSpPr>
-        <p:spPr>
-          <a:xfrm>
-            <a:off x="6199632" y="3611880"/>
-            <a:ext cx="2468880" cy="1600200"/>
+          <p:cNvPr id="20" name="Shape 18"/>
+          <p:cNvSpPr/>
+          <p:nvPr/>
+        </p:nvSpPr>
+        <p:spPr>
+          <a:xfrm>
+            <a:off x="7936992" y="2962656"/>
+            <a:ext cx="3502152" cy="1389888"/>
           </a:xfrm>
           <a:prstGeom prst="roundRect">
             <a:avLst>
-              <a:gd name="adj" fmla="val 4571"/>
+              <a:gd name="adj" fmla="val 5263"/>
             </a:avLst>
           </a:prstGeom>
           <a:solidFill>
@@ -23822,14 +23908,14 @@
       </p:sp>
       <p:sp>
         <p:nvSpPr>
-          <p:cNvPr id="19" name="Shape 17"/>
-          <p:cNvSpPr/>
-          <p:nvPr/>
-        </p:nvSpPr>
-        <p:spPr>
-          <a:xfrm>
-            <a:off x="7232904" y="3803904"/>
-            <a:ext cx="402336" cy="402336"/>
+          <p:cNvPr id="21" name="Shape 19"/>
+          <p:cNvSpPr/>
+          <p:nvPr/>
+        </p:nvSpPr>
+        <p:spPr>
+          <a:xfrm>
+            <a:off x="8119872" y="3145536"/>
+            <a:ext cx="384048" cy="384048"/>
           </a:xfrm>
           <a:prstGeom prst="ellipse">
             <a:avLst/>
@@ -23847,14 +23933,14 @@
       </p:sp>
       <p:sp>
         <p:nvSpPr>
-          <p:cNvPr id="20" name="Text 18"/>
-          <p:cNvSpPr/>
-          <p:nvPr/>
-        </p:nvSpPr>
-        <p:spPr>
-          <a:xfrm>
-            <a:off x="7232904" y="3803904"/>
-            <a:ext cx="402336" cy="402336"/>
+          <p:cNvPr id="22" name="Text 20"/>
+          <p:cNvSpPr/>
+          <p:nvPr/>
+        </p:nvSpPr>
+        <p:spPr>
+          <a:xfrm>
+            <a:off x="8119872" y="3145536"/>
+            <a:ext cx="384048" cy="384048"/>
           </a:xfrm>
           <a:prstGeom prst="rect">
             <a:avLst/>
@@ -23886,30 +23972,30 @@
       </p:sp>
       <p:sp>
         <p:nvSpPr>
-          <p:cNvPr id="21" name="Text 19"/>
-          <p:cNvSpPr/>
-          <p:nvPr/>
-        </p:nvSpPr>
-        <p:spPr>
-          <a:xfrm>
-            <a:off x="6345936" y="4297680"/>
-            <a:ext cx="2176272" cy="365760"/>
-          </a:xfrm>
-          <a:prstGeom prst="rect">
-            <a:avLst/>
-          </a:prstGeom>
-          <a:noFill/>
-          <a:ln/>
-        </p:spPr>
-        <p:txBody>
-          <a:bodyPr wrap="square" lIns="0" tIns="0" rIns="0" bIns="0" rtlCol="0" anchor="ctr"/>
-          <a:lstStyle/>
-          <a:p>
-            <a:pPr algn="ctr" indent="0" marL="0">
-              <a:buNone/>
-            </a:pPr>
-            <a:r>
-              <a:rPr lang="en-US" sz="1350" b="1" dirty="0">
+          <p:cNvPr id="23" name="Text 21"/>
+          <p:cNvSpPr/>
+          <p:nvPr/>
+        </p:nvSpPr>
+        <p:spPr>
+          <a:xfrm>
+            <a:off x="8595360" y="3127248"/>
+            <a:ext cx="1828800" cy="310896"/>
+          </a:xfrm>
+          <a:prstGeom prst="rect">
+            <a:avLst/>
+          </a:prstGeom>
+          <a:noFill/>
+          <a:ln/>
+        </p:spPr>
+        <p:txBody>
+          <a:bodyPr wrap="square" lIns="0" tIns="0" rIns="0" bIns="0" rtlCol="0" anchor="ctr"/>
+          <a:lstStyle/>
+          <a:p>
+            <a:pPr indent="0" marL="0">
+              <a:buNone/>
+            </a:pPr>
+            <a:r>
+              <a:rPr lang="en-US" sz="1400" b="1" dirty="0">
                 <a:solidFill>
                   <a:srgbClr val="FFFFFF"/>
                 </a:solidFill>
@@ -23917,49 +24003,92 @@
                 <a:ea typeface="Georgia" pitchFamily="34" charset="-122"/>
                 <a:cs typeface="Georgia" pitchFamily="34" charset="-120"/>
               </a:rPr>
-              <a:t>Pointage</a:t>
-            </a:r>
-            <a:endParaRPr lang="en-US" sz="1350" dirty="0"/>
-          </a:p>
-        </p:txBody>
-      </p:sp>
-      <p:sp>
-        <p:nvSpPr>
-          <p:cNvPr id="22" name="Text 20"/>
-          <p:cNvSpPr/>
-          <p:nvPr/>
-        </p:nvSpPr>
-        <p:spPr>
-          <a:xfrm>
-            <a:off x="6345936" y="4663440"/>
-            <a:ext cx="2176272" cy="457200"/>
-          </a:xfrm>
-          <a:prstGeom prst="rect">
-            <a:avLst/>
-          </a:prstGeom>
-          <a:noFill/>
-          <a:ln/>
-        </p:spPr>
-        <p:txBody>
-          <a:bodyPr wrap="square" lIns="0" tIns="0" rIns="0" bIns="0" rtlCol="0" anchor="t"/>
+              <a:t>Employés</a:t>
+            </a:r>
+            <a:endParaRPr lang="en-US" sz="1400" dirty="0"/>
+          </a:p>
+        </p:txBody>
+      </p:sp>
+      <p:sp>
+        <p:nvSpPr>
+          <p:cNvPr id="24" name="Text 22"/>
+          <p:cNvSpPr/>
+          <p:nvPr/>
+        </p:nvSpPr>
+        <p:spPr>
+          <a:xfrm>
+            <a:off x="10424160" y="3145536"/>
+            <a:ext cx="868680" cy="274320"/>
+          </a:xfrm>
+          <a:prstGeom prst="rect">
+            <a:avLst>
+              <a:gd name="adj" fmla="val 13333"/>
+            </a:avLst>
+          </a:prstGeom>
+          <a:solidFill>
+            <a:srgbClr val="3C6FC3"/>
+          </a:solidFill>
+          <a:ln/>
+        </p:spPr>
+        <p:txBody>
+          <a:bodyPr wrap="square" lIns="0" tIns="0" rIns="0" bIns="0" rtlCol="0" anchor="ctr"/>
           <a:lstStyle/>
           <a:p>
             <a:pPr algn="ctr" indent="0" marL="0">
-              <a:lnSpc>
-                <a:spcPts val="1400"/>
-              </a:lnSpc>
-              <a:buNone/>
-            </a:pPr>
-            <a:r>
-              <a:rPr lang="en-US" sz="1050" dirty="0">
-                <a:solidFill>
-                  <a:srgbClr val="CBD8EE"/>
+              <a:buNone/>
+            </a:pPr>
+            <a:r>
+              <a:rPr lang="en-US" sz="850" b="1" dirty="0">
+                <a:solidFill>
+                  <a:srgbClr val="0A2558"/>
                 </a:solidFill>
                 <a:latin typeface="Calibri" pitchFamily="34" charset="0"/>
                 <a:ea typeface="Calibri" pitchFamily="34" charset="-122"/>
                 <a:cs typeface="Calibri" pitchFamily="34" charset="-120"/>
               </a:rPr>
-              <a:t>Arrivée, départ et statut de présence</a:t>
+              <a:t>ADMIN</a:t>
+            </a:r>
+            <a:endParaRPr lang="en-US" sz="850" dirty="0"/>
+          </a:p>
+        </p:txBody>
+      </p:sp>
+      <p:sp>
+        <p:nvSpPr>
+          <p:cNvPr id="25" name="Text 23"/>
+          <p:cNvSpPr/>
+          <p:nvPr/>
+        </p:nvSpPr>
+        <p:spPr>
+          <a:xfrm>
+            <a:off x="8119872" y="3584448"/>
+            <a:ext cx="3154680" cy="640080"/>
+          </a:xfrm>
+          <a:prstGeom prst="rect">
+            <a:avLst/>
+          </a:prstGeom>
+          <a:noFill/>
+          <a:ln/>
+        </p:spPr>
+        <p:txBody>
+          <a:bodyPr wrap="square" lIns="0" tIns="0" rIns="0" bIns="0" rtlCol="0" anchor="t"/>
+          <a:lstStyle/>
+          <a:p>
+            <a:pPr indent="0" marL="0">
+              <a:lnSpc>
+                <a:spcPts val="1300"/>
+              </a:lnSpc>
+              <a:buNone/>
+            </a:pPr>
+            <a:r>
+              <a:rPr lang="en-US" sz="1050" dirty="0">
+                <a:solidFill>
+                  <a:srgbClr val="CBD8EE"/>
+                </a:solidFill>
+                <a:latin typeface="Calibri" pitchFamily="34" charset="0"/>
+                <a:ea typeface="Calibri" pitchFamily="34" charset="-122"/>
+                <a:cs typeface="Calibri" pitchFamily="34" charset="-120"/>
+              </a:rPr>
+              <a:t>Ajout d'un employé, filtre et liste</a:t>
             </a:r>
             <a:endParaRPr lang="en-US" sz="1050" dirty="0"/>
           </a:p>
@@ -23967,18 +24096,18 @@
       </p:sp>
       <p:sp>
         <p:nvSpPr>
-          <p:cNvPr id="23" name="Shape 21"/>
-          <p:cNvSpPr/>
-          <p:nvPr/>
-        </p:nvSpPr>
-        <p:spPr>
-          <a:xfrm>
-            <a:off x="9015984" y="3611880"/>
-            <a:ext cx="2468880" cy="1600200"/>
+          <p:cNvPr id="26" name="Shape 24"/>
+          <p:cNvSpPr/>
+          <p:nvPr/>
+        </p:nvSpPr>
+        <p:spPr>
+          <a:xfrm>
+            <a:off x="566928" y="4535424"/>
+            <a:ext cx="3502152" cy="1389888"/>
           </a:xfrm>
           <a:prstGeom prst="roundRect">
             <a:avLst>
-              <a:gd name="adj" fmla="val 4571"/>
+              <a:gd name="adj" fmla="val 5263"/>
             </a:avLst>
           </a:prstGeom>
           <a:solidFill>
@@ -23994,14 +24123,14 @@
       </p:sp>
       <p:sp>
         <p:nvSpPr>
-          <p:cNvPr id="24" name="Shape 22"/>
-          <p:cNvSpPr/>
-          <p:nvPr/>
-        </p:nvSpPr>
-        <p:spPr>
-          <a:xfrm>
-            <a:off x="10049256" y="3803904"/>
-            <a:ext cx="402336" cy="402336"/>
+          <p:cNvPr id="27" name="Shape 25"/>
+          <p:cNvSpPr/>
+          <p:nvPr/>
+        </p:nvSpPr>
+        <p:spPr>
+          <a:xfrm>
+            <a:off x="749808" y="4718304"/>
+            <a:ext cx="384048" cy="384048"/>
           </a:xfrm>
           <a:prstGeom prst="ellipse">
             <a:avLst/>
@@ -24019,14 +24148,14 @@
       </p:sp>
       <p:sp>
         <p:nvSpPr>
-          <p:cNvPr id="25" name="Text 23"/>
-          <p:cNvSpPr/>
-          <p:nvPr/>
-        </p:nvSpPr>
-        <p:spPr>
-          <a:xfrm>
-            <a:off x="10049256" y="3803904"/>
-            <a:ext cx="402336" cy="402336"/>
+          <p:cNvPr id="28" name="Text 26"/>
+          <p:cNvSpPr/>
+          <p:nvPr/>
+        </p:nvSpPr>
+        <p:spPr>
+          <a:xfrm>
+            <a:off x="749808" y="4718304"/>
+            <a:ext cx="384048" cy="384048"/>
           </a:xfrm>
           <a:prstGeom prst="rect">
             <a:avLst/>
@@ -24058,30 +24187,30 @@
       </p:sp>
       <p:sp>
         <p:nvSpPr>
-          <p:cNvPr id="26" name="Text 24"/>
-          <p:cNvSpPr/>
-          <p:nvPr/>
-        </p:nvSpPr>
-        <p:spPr>
-          <a:xfrm>
-            <a:off x="9162288" y="4297680"/>
-            <a:ext cx="2176272" cy="365760"/>
-          </a:xfrm>
-          <a:prstGeom prst="rect">
-            <a:avLst/>
-          </a:prstGeom>
-          <a:noFill/>
-          <a:ln/>
-        </p:spPr>
-        <p:txBody>
-          <a:bodyPr wrap="square" lIns="0" tIns="0" rIns="0" bIns="0" rtlCol="0" anchor="ctr"/>
-          <a:lstStyle/>
-          <a:p>
-            <a:pPr algn="ctr" indent="0" marL="0">
-              <a:buNone/>
-            </a:pPr>
-            <a:r>
-              <a:rPr lang="en-US" sz="1350" b="1" dirty="0">
+          <p:cNvPr id="29" name="Text 27"/>
+          <p:cNvSpPr/>
+          <p:nvPr/>
+        </p:nvSpPr>
+        <p:spPr>
+          <a:xfrm>
+            <a:off x="1225296" y="4700016"/>
+            <a:ext cx="1828800" cy="310896"/>
+          </a:xfrm>
+          <a:prstGeom prst="rect">
+            <a:avLst/>
+          </a:prstGeom>
+          <a:noFill/>
+          <a:ln/>
+        </p:spPr>
+        <p:txBody>
+          <a:bodyPr wrap="square" lIns="0" tIns="0" rIns="0" bIns="0" rtlCol="0" anchor="ctr"/>
+          <a:lstStyle/>
+          <a:p>
+            <a:pPr indent="0" marL="0">
+              <a:buNone/>
+            </a:pPr>
+            <a:r>
+              <a:rPr lang="en-US" sz="1400" b="1" dirty="0">
                 <a:solidFill>
                   <a:srgbClr val="FFFFFF"/>
                 </a:solidFill>
@@ -24089,90 +24218,563 @@
                 <a:ea typeface="Georgia" pitchFamily="34" charset="-122"/>
                 <a:cs typeface="Georgia" pitchFamily="34" charset="-120"/>
               </a:rPr>
-              <a:t>Tableau de bord</a:t>
-            </a:r>
-            <a:endParaRPr lang="en-US" sz="1350" dirty="0"/>
-          </a:p>
-        </p:txBody>
-      </p:sp>
-      <p:sp>
-        <p:nvSpPr>
-          <p:cNvPr id="27" name="Text 25"/>
-          <p:cNvSpPr/>
-          <p:nvPr/>
-        </p:nvSpPr>
-        <p:spPr>
-          <a:xfrm>
-            <a:off x="9162288" y="4663440"/>
-            <a:ext cx="2176272" cy="457200"/>
-          </a:xfrm>
-          <a:prstGeom prst="rect">
-            <a:avLst/>
-          </a:prstGeom>
-          <a:noFill/>
-          <a:ln/>
-        </p:spPr>
-        <p:txBody>
-          <a:bodyPr wrap="square" lIns="0" tIns="0" rIns="0" bIns="0" rtlCol="0" anchor="t"/>
+              <a:t>Agences</a:t>
+            </a:r>
+            <a:endParaRPr lang="en-US" sz="1400" dirty="0"/>
+          </a:p>
+        </p:txBody>
+      </p:sp>
+      <p:sp>
+        <p:nvSpPr>
+          <p:cNvPr id="30" name="Text 28"/>
+          <p:cNvSpPr/>
+          <p:nvPr/>
+        </p:nvSpPr>
+        <p:spPr>
+          <a:xfrm>
+            <a:off x="3054096" y="4718304"/>
+            <a:ext cx="868680" cy="274320"/>
+          </a:xfrm>
+          <a:prstGeom prst="rect">
+            <a:avLst>
+              <a:gd name="adj" fmla="val 13333"/>
+            </a:avLst>
+          </a:prstGeom>
+          <a:solidFill>
+            <a:srgbClr val="3C6FC3"/>
+          </a:solidFill>
+          <a:ln/>
+        </p:spPr>
+        <p:txBody>
+          <a:bodyPr wrap="square" lIns="0" tIns="0" rIns="0" bIns="0" rtlCol="0" anchor="ctr"/>
           <a:lstStyle/>
           <a:p>
             <a:pPr algn="ctr" indent="0" marL="0">
-              <a:lnSpc>
-                <a:spcPts val="1400"/>
-              </a:lnSpc>
-              <a:buNone/>
-            </a:pPr>
-            <a:r>
-              <a:rPr lang="en-US" sz="1050" dirty="0">
-                <a:solidFill>
-                  <a:srgbClr val="CBD8EE"/>
+              <a:buNone/>
+            </a:pPr>
+            <a:r>
+              <a:rPr lang="en-US" sz="850" b="1" dirty="0">
+                <a:solidFill>
+                  <a:srgbClr val="0A2558"/>
                 </a:solidFill>
                 <a:latin typeface="Calibri" pitchFamily="34" charset="0"/>
                 <a:ea typeface="Calibri" pitchFamily="34" charset="-122"/>
                 <a:cs typeface="Calibri" pitchFamily="34" charset="-120"/>
               </a:rPr>
-              <a:t>Indicateurs de synthèse de l'application</a:t>
-            </a:r>
-            <a:endParaRPr lang="en-US" sz="1050" dirty="0"/>
-          </a:p>
-        </p:txBody>
-      </p:sp>
-      <p:sp>
-        <p:nvSpPr>
-          <p:cNvPr id="28" name="Text 26"/>
-          <p:cNvSpPr/>
-          <p:nvPr/>
-        </p:nvSpPr>
-        <p:spPr>
-          <a:xfrm>
-            <a:off x="566928" y="5440680"/>
-            <a:ext cx="10058400" cy="365760"/>
-          </a:xfrm>
-          <a:prstGeom prst="rect">
-            <a:avLst/>
-          </a:prstGeom>
-          <a:noFill/>
-          <a:ln/>
-        </p:spPr>
-        <p:txBody>
-          <a:bodyPr wrap="square" lIns="0" tIns="0" rIns="0" bIns="0" rtlCol="0" anchor="ctr"/>
-          <a:lstStyle/>
-          <a:p>
-            <a:pPr indent="0" marL="0">
-              <a:buNone/>
-            </a:pPr>
-            <a:r>
-              <a:rPr lang="en-US" sz="1200" i="1" dirty="0">
-                <a:solidFill>
-                  <a:srgbClr val="9FB6DC"/>
+              <a:t>ADMIN</a:t>
+            </a:r>
+            <a:endParaRPr lang="en-US" sz="850" dirty="0"/>
+          </a:p>
+        </p:txBody>
+      </p:sp>
+      <p:sp>
+        <p:nvSpPr>
+          <p:cNvPr id="31" name="Text 29"/>
+          <p:cNvSpPr/>
+          <p:nvPr/>
+        </p:nvSpPr>
+        <p:spPr>
+          <a:xfrm>
+            <a:off x="749808" y="5157216"/>
+            <a:ext cx="3154680" cy="640080"/>
+          </a:xfrm>
+          <a:prstGeom prst="rect">
+            <a:avLst/>
+          </a:prstGeom>
+          <a:noFill/>
+          <a:ln/>
+        </p:spPr>
+        <p:txBody>
+          <a:bodyPr wrap="square" lIns="0" tIns="0" rIns="0" bIns="0" rtlCol="0" anchor="t"/>
+          <a:lstStyle/>
+          <a:p>
+            <a:pPr indent="0" marL="0">
+              <a:lnSpc>
+                <a:spcPts val="1300"/>
+              </a:lnSpc>
+              <a:buNone/>
+            </a:pPr>
+            <a:r>
+              <a:rPr lang="en-US" sz="1050" dirty="0">
+                <a:solidFill>
+                  <a:srgbClr val="CBD8EE"/>
                 </a:solidFill>
                 <a:latin typeface="Calibri" pitchFamily="34" charset="0"/>
                 <a:ea typeface="Calibri" pitchFamily="34" charset="-122"/>
                 <a:cs typeface="Calibri" pitchFamily="34" charset="-120"/>
               </a:rPr>
-              <a:t>Les rapports Power BI ont été présentés en images dans la partie précédente.</a:t>
-            </a:r>
-            <a:endParaRPr lang="en-US" sz="1200" dirty="0"/>
+              <a:t>Création et suppression d'une agence</a:t>
+            </a:r>
+            <a:endParaRPr lang="en-US" sz="1050" dirty="0"/>
+          </a:p>
+        </p:txBody>
+      </p:sp>
+      <p:sp>
+        <p:nvSpPr>
+          <p:cNvPr id="32" name="Shape 30"/>
+          <p:cNvSpPr/>
+          <p:nvPr/>
+        </p:nvSpPr>
+        <p:spPr>
+          <a:xfrm>
+            <a:off x="4251960" y="4535424"/>
+            <a:ext cx="3502152" cy="1389888"/>
+          </a:xfrm>
+          <a:prstGeom prst="roundRect">
+            <a:avLst>
+              <a:gd name="adj" fmla="val 5263"/>
+            </a:avLst>
+          </a:prstGeom>
+          <a:solidFill>
+            <a:srgbClr val="1D4EA0"/>
+          </a:solidFill>
+          <a:ln w="12700">
+            <a:solidFill>
+              <a:srgbClr val="1D4EA0"/>
+            </a:solidFill>
+            <a:prstDash val="solid"/>
+          </a:ln>
+        </p:spPr>
+      </p:sp>
+      <p:sp>
+        <p:nvSpPr>
+          <p:cNvPr id="33" name="Shape 31"/>
+          <p:cNvSpPr/>
+          <p:nvPr/>
+        </p:nvSpPr>
+        <p:spPr>
+          <a:xfrm>
+            <a:off x="4434840" y="4718304"/>
+            <a:ext cx="384048" cy="384048"/>
+          </a:xfrm>
+          <a:prstGeom prst="ellipse">
+            <a:avLst/>
+          </a:prstGeom>
+          <a:solidFill>
+            <a:srgbClr val="0A2558"/>
+          </a:solidFill>
+          <a:ln w="12700">
+            <a:solidFill>
+              <a:srgbClr val="0A2558"/>
+            </a:solidFill>
+            <a:prstDash val="solid"/>
+          </a:ln>
+        </p:spPr>
+      </p:sp>
+      <p:sp>
+        <p:nvSpPr>
+          <p:cNvPr id="34" name="Text 32"/>
+          <p:cNvSpPr/>
+          <p:nvPr/>
+        </p:nvSpPr>
+        <p:spPr>
+          <a:xfrm>
+            <a:off x="4434840" y="4718304"/>
+            <a:ext cx="384048" cy="384048"/>
+          </a:xfrm>
+          <a:prstGeom prst="rect">
+            <a:avLst/>
+          </a:prstGeom>
+          <a:noFill/>
+          <a:ln/>
+        </p:spPr>
+        <p:txBody>
+          <a:bodyPr wrap="square" lIns="0" tIns="0" rIns="0" bIns="0" rtlCol="0" anchor="ctr"/>
+          <a:lstStyle/>
+          <a:p>
+            <a:pPr algn="ctr" indent="0" marL="0">
+              <a:buNone/>
+            </a:pPr>
+            <a:r>
+              <a:rPr lang="en-US" sz="1300" b="1" dirty="0">
+                <a:solidFill>
+                  <a:srgbClr val="FFFFFF"/>
+                </a:solidFill>
+                <a:latin typeface="Georgia" pitchFamily="34" charset="0"/>
+                <a:ea typeface="Georgia" pitchFamily="34" charset="-122"/>
+                <a:cs typeface="Georgia" pitchFamily="34" charset="-120"/>
+              </a:rPr>
+              <a:t>5</a:t>
+            </a:r>
+            <a:endParaRPr lang="en-US" sz="1300" dirty="0"/>
+          </a:p>
+        </p:txBody>
+      </p:sp>
+      <p:sp>
+        <p:nvSpPr>
+          <p:cNvPr id="35" name="Text 33"/>
+          <p:cNvSpPr/>
+          <p:nvPr/>
+        </p:nvSpPr>
+        <p:spPr>
+          <a:xfrm>
+            <a:off x="4910328" y="4700016"/>
+            <a:ext cx="1828800" cy="310896"/>
+          </a:xfrm>
+          <a:prstGeom prst="rect">
+            <a:avLst/>
+          </a:prstGeom>
+          <a:noFill/>
+          <a:ln/>
+        </p:spPr>
+        <p:txBody>
+          <a:bodyPr wrap="square" lIns="0" tIns="0" rIns="0" bIns="0" rtlCol="0" anchor="ctr"/>
+          <a:lstStyle/>
+          <a:p>
+            <a:pPr indent="0" marL="0">
+              <a:buNone/>
+            </a:pPr>
+            <a:r>
+              <a:rPr lang="en-US" sz="1400" b="1" dirty="0">
+                <a:solidFill>
+                  <a:srgbClr val="FFFFFF"/>
+                </a:solidFill>
+                <a:latin typeface="Georgia" pitchFamily="34" charset="0"/>
+                <a:ea typeface="Georgia" pitchFamily="34" charset="-122"/>
+                <a:cs typeface="Georgia" pitchFamily="34" charset="-120"/>
+              </a:rPr>
+              <a:t>Pointage</a:t>
+            </a:r>
+            <a:endParaRPr lang="en-US" sz="1400" dirty="0"/>
+          </a:p>
+        </p:txBody>
+      </p:sp>
+      <p:sp>
+        <p:nvSpPr>
+          <p:cNvPr id="36" name="Text 34"/>
+          <p:cNvSpPr/>
+          <p:nvPr/>
+        </p:nvSpPr>
+        <p:spPr>
+          <a:xfrm>
+            <a:off x="6739128" y="4718304"/>
+            <a:ext cx="868680" cy="274320"/>
+          </a:xfrm>
+          <a:prstGeom prst="rect">
+            <a:avLst>
+              <a:gd name="adj" fmla="val 13333"/>
+            </a:avLst>
+          </a:prstGeom>
+          <a:solidFill>
+            <a:srgbClr val="3C6FC3"/>
+          </a:solidFill>
+          <a:ln/>
+        </p:spPr>
+        <p:txBody>
+          <a:bodyPr wrap="square" lIns="0" tIns="0" rIns="0" bIns="0" rtlCol="0" anchor="ctr"/>
+          <a:lstStyle/>
+          <a:p>
+            <a:pPr algn="ctr" indent="0" marL="0">
+              <a:buNone/>
+            </a:pPr>
+            <a:r>
+              <a:rPr lang="en-US" sz="850" b="1" dirty="0">
+                <a:solidFill>
+                  <a:srgbClr val="0A2558"/>
+                </a:solidFill>
+                <a:latin typeface="Calibri" pitchFamily="34" charset="0"/>
+                <a:ea typeface="Calibri" pitchFamily="34" charset="-122"/>
+                <a:cs typeface="Calibri" pitchFamily="34" charset="-120"/>
+              </a:rPr>
+              <a:t>USER</a:t>
+            </a:r>
+            <a:endParaRPr lang="en-US" sz="850" dirty="0"/>
+          </a:p>
+        </p:txBody>
+      </p:sp>
+      <p:sp>
+        <p:nvSpPr>
+          <p:cNvPr id="37" name="Text 35"/>
+          <p:cNvSpPr/>
+          <p:nvPr/>
+        </p:nvSpPr>
+        <p:spPr>
+          <a:xfrm>
+            <a:off x="4434840" y="5157216"/>
+            <a:ext cx="3154680" cy="640080"/>
+          </a:xfrm>
+          <a:prstGeom prst="rect">
+            <a:avLst/>
+          </a:prstGeom>
+          <a:noFill/>
+          <a:ln/>
+        </p:spPr>
+        <p:txBody>
+          <a:bodyPr wrap="square" lIns="0" tIns="0" rIns="0" bIns="0" rtlCol="0" anchor="t"/>
+          <a:lstStyle/>
+          <a:p>
+            <a:pPr indent="0" marL="0">
+              <a:lnSpc>
+                <a:spcPts val="1300"/>
+              </a:lnSpc>
+              <a:buNone/>
+            </a:pPr>
+            <a:r>
+              <a:rPr lang="en-US" sz="1050" dirty="0">
+                <a:solidFill>
+                  <a:srgbClr val="CBD8EE"/>
+                </a:solidFill>
+                <a:latin typeface="Calibri" pitchFamily="34" charset="0"/>
+                <a:ea typeface="Calibri" pitchFamily="34" charset="-122"/>
+                <a:cs typeface="Calibri" pitchFamily="34" charset="-120"/>
+              </a:rPr>
+              <a:t>Arrivée, départ et statut calculé</a:t>
+            </a:r>
+            <a:endParaRPr lang="en-US" sz="1050" dirty="0"/>
+          </a:p>
+        </p:txBody>
+      </p:sp>
+      <p:sp>
+        <p:nvSpPr>
+          <p:cNvPr id="38" name="Shape 36"/>
+          <p:cNvSpPr/>
+          <p:nvPr/>
+        </p:nvSpPr>
+        <p:spPr>
+          <a:xfrm>
+            <a:off x="7936992" y="4535424"/>
+            <a:ext cx="3502152" cy="1389888"/>
+          </a:xfrm>
+          <a:prstGeom prst="roundRect">
+            <a:avLst>
+              <a:gd name="adj" fmla="val 5263"/>
+            </a:avLst>
+          </a:prstGeom>
+          <a:solidFill>
+            <a:srgbClr val="1D4EA0"/>
+          </a:solidFill>
+          <a:ln w="12700">
+            <a:solidFill>
+              <a:srgbClr val="1D4EA0"/>
+            </a:solidFill>
+            <a:prstDash val="solid"/>
+          </a:ln>
+        </p:spPr>
+      </p:sp>
+      <p:sp>
+        <p:nvSpPr>
+          <p:cNvPr id="39" name="Shape 37"/>
+          <p:cNvSpPr/>
+          <p:nvPr/>
+        </p:nvSpPr>
+        <p:spPr>
+          <a:xfrm>
+            <a:off x="8119872" y="4718304"/>
+            <a:ext cx="384048" cy="384048"/>
+          </a:xfrm>
+          <a:prstGeom prst="ellipse">
+            <a:avLst/>
+          </a:prstGeom>
+          <a:solidFill>
+            <a:srgbClr val="0A2558"/>
+          </a:solidFill>
+          <a:ln w="12700">
+            <a:solidFill>
+              <a:srgbClr val="0A2558"/>
+            </a:solidFill>
+            <a:prstDash val="solid"/>
+          </a:ln>
+        </p:spPr>
+      </p:sp>
+      <p:sp>
+        <p:nvSpPr>
+          <p:cNvPr id="40" name="Text 38"/>
+          <p:cNvSpPr/>
+          <p:nvPr/>
+        </p:nvSpPr>
+        <p:spPr>
+          <a:xfrm>
+            <a:off x="8119872" y="4718304"/>
+            <a:ext cx="384048" cy="384048"/>
+          </a:xfrm>
+          <a:prstGeom prst="rect">
+            <a:avLst/>
+          </a:prstGeom>
+          <a:noFill/>
+          <a:ln/>
+        </p:spPr>
+        <p:txBody>
+          <a:bodyPr wrap="square" lIns="0" tIns="0" rIns="0" bIns="0" rtlCol="0" anchor="ctr"/>
+          <a:lstStyle/>
+          <a:p>
+            <a:pPr algn="ctr" indent="0" marL="0">
+              <a:buNone/>
+            </a:pPr>
+            <a:r>
+              <a:rPr lang="en-US" sz="1300" b="1" dirty="0">
+                <a:solidFill>
+                  <a:srgbClr val="FFFFFF"/>
+                </a:solidFill>
+                <a:latin typeface="Georgia" pitchFamily="34" charset="0"/>
+                <a:ea typeface="Georgia" pitchFamily="34" charset="-122"/>
+                <a:cs typeface="Georgia" pitchFamily="34" charset="-120"/>
+              </a:rPr>
+              <a:t>6</a:t>
+            </a:r>
+            <a:endParaRPr lang="en-US" sz="1300" dirty="0"/>
+          </a:p>
+        </p:txBody>
+      </p:sp>
+      <p:sp>
+        <p:nvSpPr>
+          <p:cNvPr id="41" name="Text 39"/>
+          <p:cNvSpPr/>
+          <p:nvPr/>
+        </p:nvSpPr>
+        <p:spPr>
+          <a:xfrm>
+            <a:off x="8595360" y="4700016"/>
+            <a:ext cx="1828800" cy="310896"/>
+          </a:xfrm>
+          <a:prstGeom prst="rect">
+            <a:avLst/>
+          </a:prstGeom>
+          <a:noFill/>
+          <a:ln/>
+        </p:spPr>
+        <p:txBody>
+          <a:bodyPr wrap="square" lIns="0" tIns="0" rIns="0" bIns="0" rtlCol="0" anchor="ctr"/>
+          <a:lstStyle/>
+          <a:p>
+            <a:pPr indent="0" marL="0">
+              <a:buNone/>
+            </a:pPr>
+            <a:r>
+              <a:rPr lang="en-US" sz="1400" b="1" dirty="0">
+                <a:solidFill>
+                  <a:srgbClr val="FFFFFF"/>
+                </a:solidFill>
+                <a:latin typeface="Georgia" pitchFamily="34" charset="0"/>
+                <a:ea typeface="Georgia" pitchFamily="34" charset="-122"/>
+                <a:cs typeface="Georgia" pitchFamily="34" charset="-120"/>
+              </a:rPr>
+              <a:t>Validation</a:t>
+            </a:r>
+            <a:endParaRPr lang="en-US" sz="1400" dirty="0"/>
+          </a:p>
+        </p:txBody>
+      </p:sp>
+      <p:sp>
+        <p:nvSpPr>
+          <p:cNvPr id="42" name="Text 40"/>
+          <p:cNvSpPr/>
+          <p:nvPr/>
+        </p:nvSpPr>
+        <p:spPr>
+          <a:xfrm>
+            <a:off x="10424160" y="4718304"/>
+            <a:ext cx="868680" cy="274320"/>
+          </a:xfrm>
+          <a:prstGeom prst="rect">
+            <a:avLst>
+              <a:gd name="adj" fmla="val 13333"/>
+            </a:avLst>
+          </a:prstGeom>
+          <a:solidFill>
+            <a:srgbClr val="3C6FC3"/>
+          </a:solidFill>
+          <a:ln/>
+        </p:spPr>
+        <p:txBody>
+          <a:bodyPr wrap="square" lIns="0" tIns="0" rIns="0" bIns="0" rtlCol="0" anchor="ctr"/>
+          <a:lstStyle/>
+          <a:p>
+            <a:pPr algn="ctr" indent="0" marL="0">
+              <a:buNone/>
+            </a:pPr>
+            <a:r>
+              <a:rPr lang="en-US" sz="850" b="1" dirty="0">
+                <a:solidFill>
+                  <a:srgbClr val="0A2558"/>
+                </a:solidFill>
+                <a:latin typeface="Calibri" pitchFamily="34" charset="0"/>
+                <a:ea typeface="Calibri" pitchFamily="34" charset="-122"/>
+                <a:cs typeface="Calibri" pitchFamily="34" charset="-120"/>
+              </a:rPr>
+              <a:t>DIRECTEUR</a:t>
+            </a:r>
+            <a:endParaRPr lang="en-US" sz="850" dirty="0"/>
+          </a:p>
+        </p:txBody>
+      </p:sp>
+      <p:sp>
+        <p:nvSpPr>
+          <p:cNvPr id="43" name="Text 41"/>
+          <p:cNvSpPr/>
+          <p:nvPr/>
+        </p:nvSpPr>
+        <p:spPr>
+          <a:xfrm>
+            <a:off x="8119872" y="5157216"/>
+            <a:ext cx="3154680" cy="640080"/>
+          </a:xfrm>
+          <a:prstGeom prst="rect">
+            <a:avLst/>
+          </a:prstGeom>
+          <a:noFill/>
+          <a:ln/>
+        </p:spPr>
+        <p:txBody>
+          <a:bodyPr wrap="square" lIns="0" tIns="0" rIns="0" bIns="0" rtlCol="0" anchor="t"/>
+          <a:lstStyle/>
+          <a:p>
+            <a:pPr indent="0" marL="0">
+              <a:lnSpc>
+                <a:spcPts val="1300"/>
+              </a:lnSpc>
+              <a:buNone/>
+            </a:pPr>
+            <a:r>
+              <a:rPr lang="en-US" sz="1050" dirty="0">
+                <a:solidFill>
+                  <a:srgbClr val="CBD8EE"/>
+                </a:solidFill>
+                <a:latin typeface="Calibri" pitchFamily="34" charset="0"/>
+                <a:ea typeface="Calibri" pitchFamily="34" charset="-122"/>
+                <a:cs typeface="Calibri" pitchFamily="34" charset="-120"/>
+              </a:rPr>
+              <a:t>Approbation d'une demande de modification</a:t>
+            </a:r>
+            <a:endParaRPr lang="en-US" sz="1050" dirty="0"/>
+          </a:p>
+        </p:txBody>
+      </p:sp>
+      <p:sp>
+        <p:nvSpPr>
+          <p:cNvPr id="44" name="Text 42"/>
+          <p:cNvSpPr/>
+          <p:nvPr/>
+        </p:nvSpPr>
+        <p:spPr>
+          <a:xfrm>
+            <a:off x="566928" y="6144768"/>
+            <a:ext cx="10515600" cy="292608"/>
+          </a:xfrm>
+          <a:prstGeom prst="rect">
+            <a:avLst/>
+          </a:prstGeom>
+          <a:noFill/>
+          <a:ln/>
+        </p:spPr>
+        <p:txBody>
+          <a:bodyPr wrap="square" lIns="0" tIns="0" rIns="0" bIns="0" rtlCol="0" anchor="ctr"/>
+          <a:lstStyle/>
+          <a:p>
+            <a:pPr indent="0" marL="0">
+              <a:buNone/>
+            </a:pPr>
+            <a:r>
+              <a:rPr lang="en-US" sz="1150" i="1" dirty="0">
+                <a:solidFill>
+                  <a:srgbClr val="9FB6DC"/>
+                </a:solidFill>
+                <a:latin typeface="Calibri" pitchFamily="34" charset="0"/>
+                <a:ea typeface="Calibri" pitchFamily="34" charset="-122"/>
+                <a:cs typeface="Calibri" pitchFamily="34" charset="-120"/>
+              </a:rPr>
+              <a:t>Les quatre pages Power BI ont été présentées dans la partie précédente.</a:t>
+            </a:r>
+            <a:endParaRPr lang="en-US" sz="1150" dirty="0"/>
           </a:p>
         </p:txBody>
       </p:sp>

--- a/presentation/Soutenance_PFE_Oussema_Korbosli.pptx
+++ b/presentation/Soutenance_PFE_Oussema_Korbosli.pptx
@@ -25766,98 +25766,33 @@
           </a:p>
         </p:txBody>
       </p:sp>
-      <p:sp>
-        <p:nvSpPr>
-          <p:cNvPr id="7" name="Shape 5"/>
-          <p:cNvSpPr/>
-          <p:nvPr/>
-        </p:nvSpPr>
-        <p:spPr>
-          <a:xfrm>
-            <a:off x="566928" y="1188720"/>
-            <a:ext cx="11064240" cy="4434840"/>
-          </a:xfrm>
-          <a:prstGeom prst="roundRect">
-            <a:avLst>
-              <a:gd name="adj" fmla="val 1237"/>
-            </a:avLst>
-          </a:prstGeom>
-          <a:solidFill>
-            <a:srgbClr val="F0F3F8"/>
-          </a:solidFill>
-          <a:ln w="19050">
-            <a:solidFill>
-              <a:srgbClr val="3C6FC3"/>
-            </a:solidFill>
-            <a:prstDash val="dash"/>
-          </a:ln>
-        </p:spPr>
-      </p:sp>
-      <p:sp>
-        <p:nvSpPr>
-          <p:cNvPr id="8" name="Text 6"/>
-          <p:cNvSpPr/>
-          <p:nvPr/>
-        </p:nvSpPr>
-        <p:spPr>
-          <a:xfrm>
-            <a:off x="566928" y="1188720"/>
-            <a:ext cx="11064240" cy="4434840"/>
-          </a:xfrm>
-          <a:prstGeom prst="rect">
-            <a:avLst/>
-          </a:prstGeom>
-          <a:noFill/>
-          <a:ln/>
-        </p:spPr>
-        <p:txBody>
-          <a:bodyPr wrap="square" lIns="0" tIns="0" rIns="0" bIns="0" rtlCol="0" anchor="ctr"/>
-          <a:lstStyle/>
-          <a:p>
-            <a:pPr algn="ctr" indent="0" marL="0">
-              <a:lnSpc>
-                <a:spcPts val="1800"/>
-              </a:lnSpc>
-              <a:buNone/>
-            </a:pPr>
-            <a:r>
-              <a:rPr lang="en-US" sz="1200" dirty="0">
-                <a:solidFill>
-                  <a:srgbClr val="6B7A90"/>
-                </a:solidFill>
-                <a:latin typeface="Calibri" pitchFamily="34" charset="0"/>
-                <a:ea typeface="Calibri" pitchFamily="34" charset="-122"/>
-                <a:cs typeface="Calibri" pitchFamily="34" charset="-120"/>
-              </a:rPr>
-              <a:t>Capture attendue</a:t>
-            </a:r>
-            <a:endParaRPr lang="en-US" sz="1200" dirty="0"/>
-          </a:p>
-          <a:p>
-            <a:pPr algn="ctr" indent="0" marL="0">
-              <a:lnSpc>
-                <a:spcPts val="1800"/>
-              </a:lnSpc>
-              <a:buNone/>
-            </a:pPr>
-            <a:r>
-              <a:rPr lang="en-US" sz="1200" dirty="0">
-                <a:solidFill>
-                  <a:srgbClr val="6B7A90"/>
-                </a:solidFill>
-                <a:latin typeface="Calibri" pitchFamily="34" charset="0"/>
-                <a:ea typeface="Calibri" pitchFamily="34" charset="-122"/>
-                <a:cs typeface="Calibri" pitchFamily="34" charset="-120"/>
-              </a:rPr>
-              <a:t>../presentation/captures/01-auth-admin.png</a:t>
-            </a:r>
-            <a:endParaRPr lang="en-US" sz="1200" dirty="0"/>
-          </a:p>
-        </p:txBody>
-      </p:sp>
-      <p:sp>
-        <p:nvSpPr>
-          <p:cNvPr id="9" name="Shape 7"/>
+      <p:pic>
+        <p:nvPicPr>
+          <p:cNvPr id="7" name="Image 0" descr="/home/user/oussema_korbosli/presentation/captures/01-auth-admin.png">    </p:cNvPr>
+          <p:cNvPicPr>
+            <a:picLocks noChangeAspect="1"/>
+          </p:cNvPicPr>
+          <p:nvPr/>
+        </p:nvPicPr>
+        <p:blipFill>
+          <a:blip r:embed="rId1"/>
+          <a:stretch>
+            <a:fillRect/>
+          </a:stretch>
+        </p:blipFill>
+        <p:spPr>
+          <a:xfrm>
+            <a:off x="1453371" y="1188720"/>
+            <a:ext cx="9291353" cy="4434840"/>
+          </a:xfrm>
+          <a:prstGeom prst="rect">
+            <a:avLst/>
+          </a:prstGeom>
+        </p:spPr>
+      </p:pic>
+      <p:sp>
+        <p:nvSpPr>
+          <p:cNvPr id="8" name="Shape 5"/>
           <p:cNvSpPr/>
           <p:nvPr/>
         </p:nvSpPr>
@@ -25877,7 +25812,7 @@
       </p:sp>
       <p:sp>
         <p:nvSpPr>
-          <p:cNvPr id="10" name="Text 8"/>
+          <p:cNvPr id="9" name="Text 6"/>
           <p:cNvSpPr/>
           <p:nvPr/>
         </p:nvSpPr>
@@ -26106,98 +26041,33 @@
           </a:p>
         </p:txBody>
       </p:sp>
-      <p:sp>
-        <p:nvSpPr>
-          <p:cNvPr id="7" name="Shape 5"/>
-          <p:cNvSpPr/>
-          <p:nvPr/>
-        </p:nvSpPr>
-        <p:spPr>
-          <a:xfrm>
-            <a:off x="566928" y="1188720"/>
-            <a:ext cx="11064240" cy="4434840"/>
-          </a:xfrm>
-          <a:prstGeom prst="roundRect">
-            <a:avLst>
-              <a:gd name="adj" fmla="val 1237"/>
-            </a:avLst>
-          </a:prstGeom>
-          <a:solidFill>
-            <a:srgbClr val="F0F3F8"/>
-          </a:solidFill>
-          <a:ln w="19050">
-            <a:solidFill>
-              <a:srgbClr val="3C6FC3"/>
-            </a:solidFill>
-            <a:prstDash val="dash"/>
-          </a:ln>
-        </p:spPr>
-      </p:sp>
-      <p:sp>
-        <p:nvSpPr>
-          <p:cNvPr id="8" name="Text 6"/>
-          <p:cNvSpPr/>
-          <p:nvPr/>
-        </p:nvSpPr>
-        <p:spPr>
-          <a:xfrm>
-            <a:off x="566928" y="1188720"/>
-            <a:ext cx="11064240" cy="4434840"/>
-          </a:xfrm>
-          <a:prstGeom prst="rect">
-            <a:avLst/>
-          </a:prstGeom>
-          <a:noFill/>
-          <a:ln/>
-        </p:spPr>
-        <p:txBody>
-          <a:bodyPr wrap="square" lIns="0" tIns="0" rIns="0" bIns="0" rtlCol="0" anchor="ctr"/>
-          <a:lstStyle/>
-          <a:p>
-            <a:pPr algn="ctr" indent="0" marL="0">
-              <a:lnSpc>
-                <a:spcPts val="1800"/>
-              </a:lnSpc>
-              <a:buNone/>
-            </a:pPr>
-            <a:r>
-              <a:rPr lang="en-US" sz="1200" dirty="0">
-                <a:solidFill>
-                  <a:srgbClr val="6B7A90"/>
-                </a:solidFill>
-                <a:latin typeface="Calibri" pitchFamily="34" charset="0"/>
-                <a:ea typeface="Calibri" pitchFamily="34" charset="-122"/>
-                <a:cs typeface="Calibri" pitchFamily="34" charset="-120"/>
-              </a:rPr>
-              <a:t>Capture attendue</a:t>
-            </a:r>
-            <a:endParaRPr lang="en-US" sz="1200" dirty="0"/>
-          </a:p>
-          <a:p>
-            <a:pPr algn="ctr" indent="0" marL="0">
-              <a:lnSpc>
-                <a:spcPts val="1800"/>
-              </a:lnSpc>
-              <a:buNone/>
-            </a:pPr>
-            <a:r>
-              <a:rPr lang="en-US" sz="1200" dirty="0">
-                <a:solidFill>
-                  <a:srgbClr val="6B7A90"/>
-                </a:solidFill>
-                <a:latin typeface="Calibri" pitchFamily="34" charset="0"/>
-                <a:ea typeface="Calibri" pitchFamily="34" charset="-122"/>
-                <a:cs typeface="Calibri" pitchFamily="34" charset="-120"/>
-              </a:rPr>
-              <a:t>../presentation/captures/02-ajout-employe.png</a:t>
-            </a:r>
-            <a:endParaRPr lang="en-US" sz="1200" dirty="0"/>
-          </a:p>
-        </p:txBody>
-      </p:sp>
-      <p:sp>
-        <p:nvSpPr>
-          <p:cNvPr id="9" name="Shape 7"/>
+      <p:pic>
+        <p:nvPicPr>
+          <p:cNvPr id="7" name="Image 0" descr="/home/user/oussema_korbosli/presentation/captures/02-ajout-employe.png">    </p:cNvPr>
+          <p:cNvPicPr>
+            <a:picLocks noChangeAspect="1"/>
+          </p:cNvPicPr>
+          <p:nvPr/>
+        </p:nvPicPr>
+        <p:blipFill>
+          <a:blip r:embed="rId1"/>
+          <a:stretch>
+            <a:fillRect/>
+          </a:stretch>
+        </p:blipFill>
+        <p:spPr>
+          <a:xfrm>
+            <a:off x="1458443" y="1188720"/>
+            <a:ext cx="9281210" cy="4434840"/>
+          </a:xfrm>
+          <a:prstGeom prst="rect">
+            <a:avLst/>
+          </a:prstGeom>
+        </p:spPr>
+      </p:pic>
+      <p:sp>
+        <p:nvSpPr>
+          <p:cNvPr id="8" name="Shape 5"/>
           <p:cNvSpPr/>
           <p:nvPr/>
         </p:nvSpPr>
@@ -26217,7 +26087,7 @@
       </p:sp>
       <p:sp>
         <p:nvSpPr>
-          <p:cNvPr id="10" name="Text 8"/>
+          <p:cNvPr id="9" name="Text 6"/>
           <p:cNvSpPr/>
           <p:nvPr/>
         </p:nvSpPr>
@@ -26446,98 +26316,33 @@
           </a:p>
         </p:txBody>
       </p:sp>
-      <p:sp>
-        <p:nvSpPr>
-          <p:cNvPr id="7" name="Shape 5"/>
-          <p:cNvSpPr/>
-          <p:nvPr/>
-        </p:nvSpPr>
-        <p:spPr>
-          <a:xfrm>
-            <a:off x="566928" y="1188720"/>
-            <a:ext cx="11064240" cy="4434840"/>
-          </a:xfrm>
-          <a:prstGeom prst="roundRect">
-            <a:avLst>
-              <a:gd name="adj" fmla="val 1237"/>
-            </a:avLst>
-          </a:prstGeom>
-          <a:solidFill>
-            <a:srgbClr val="F0F3F8"/>
-          </a:solidFill>
-          <a:ln w="19050">
-            <a:solidFill>
-              <a:srgbClr val="3C6FC3"/>
-            </a:solidFill>
-            <a:prstDash val="dash"/>
-          </a:ln>
-        </p:spPr>
-      </p:sp>
-      <p:sp>
-        <p:nvSpPr>
-          <p:cNvPr id="8" name="Text 6"/>
-          <p:cNvSpPr/>
-          <p:nvPr/>
-        </p:nvSpPr>
-        <p:spPr>
-          <a:xfrm>
-            <a:off x="566928" y="1188720"/>
-            <a:ext cx="11064240" cy="4434840"/>
-          </a:xfrm>
-          <a:prstGeom prst="rect">
-            <a:avLst/>
-          </a:prstGeom>
-          <a:noFill/>
-          <a:ln/>
-        </p:spPr>
-        <p:txBody>
-          <a:bodyPr wrap="square" lIns="0" tIns="0" rIns="0" bIns="0" rtlCol="0" anchor="ctr"/>
-          <a:lstStyle/>
-          <a:p>
-            <a:pPr algn="ctr" indent="0" marL="0">
-              <a:lnSpc>
-                <a:spcPts val="1800"/>
-              </a:lnSpc>
-              <a:buNone/>
-            </a:pPr>
-            <a:r>
-              <a:rPr lang="en-US" sz="1200" dirty="0">
-                <a:solidFill>
-                  <a:srgbClr val="6B7A90"/>
-                </a:solidFill>
-                <a:latin typeface="Calibri" pitchFamily="34" charset="0"/>
-                <a:ea typeface="Calibri" pitchFamily="34" charset="-122"/>
-                <a:cs typeface="Calibri" pitchFamily="34" charset="-120"/>
-              </a:rPr>
-              <a:t>Capture attendue</a:t>
-            </a:r>
-            <a:endParaRPr lang="en-US" sz="1200" dirty="0"/>
-          </a:p>
-          <a:p>
-            <a:pPr algn="ctr" indent="0" marL="0">
-              <a:lnSpc>
-                <a:spcPts val="1800"/>
-              </a:lnSpc>
-              <a:buNone/>
-            </a:pPr>
-            <a:r>
-              <a:rPr lang="en-US" sz="1200" dirty="0">
-                <a:solidFill>
-                  <a:srgbClr val="6B7A90"/>
-                </a:solidFill>
-                <a:latin typeface="Calibri" pitchFamily="34" charset="0"/>
-                <a:ea typeface="Calibri" pitchFamily="34" charset="-122"/>
-                <a:cs typeface="Calibri" pitchFamily="34" charset="-120"/>
-              </a:rPr>
-              <a:t>../presentation/captures/03-pointage-utilisateur.png</a:t>
-            </a:r>
-            <a:endParaRPr lang="en-US" sz="1200" dirty="0"/>
-          </a:p>
-        </p:txBody>
-      </p:sp>
-      <p:sp>
-        <p:nvSpPr>
-          <p:cNvPr id="9" name="Shape 7"/>
+      <p:pic>
+        <p:nvPicPr>
+          <p:cNvPr id="7" name="Image 0" descr="/home/user/oussema_korbosli/presentation/captures/03-pointage-utilisateur.png">    </p:cNvPr>
+          <p:cNvPicPr>
+            <a:picLocks noChangeAspect="1"/>
+          </p:cNvPicPr>
+          <p:nvPr/>
+        </p:nvPicPr>
+        <p:blipFill>
+          <a:blip r:embed="rId1"/>
+          <a:stretch>
+            <a:fillRect/>
+          </a:stretch>
+        </p:blipFill>
+        <p:spPr>
+          <a:xfrm>
+            <a:off x="1438090" y="1188720"/>
+            <a:ext cx="9321917" cy="4434840"/>
+          </a:xfrm>
+          <a:prstGeom prst="rect">
+            <a:avLst/>
+          </a:prstGeom>
+        </p:spPr>
+      </p:pic>
+      <p:sp>
+        <p:nvSpPr>
+          <p:cNvPr id="8" name="Shape 5"/>
           <p:cNvSpPr/>
           <p:nvPr/>
         </p:nvSpPr>
@@ -26557,7 +26362,7 @@
       </p:sp>
       <p:sp>
         <p:nvSpPr>
-          <p:cNvPr id="10" name="Text 8"/>
+          <p:cNvPr id="9" name="Text 6"/>
           <p:cNvSpPr/>
           <p:nvPr/>
         </p:nvSpPr>
@@ -26786,98 +26591,33 @@
           </a:p>
         </p:txBody>
       </p:sp>
-      <p:sp>
-        <p:nvSpPr>
-          <p:cNvPr id="7" name="Shape 5"/>
-          <p:cNvSpPr/>
-          <p:nvPr/>
-        </p:nvSpPr>
-        <p:spPr>
-          <a:xfrm>
-            <a:off x="566928" y="1188720"/>
-            <a:ext cx="11064240" cy="4434840"/>
-          </a:xfrm>
-          <a:prstGeom prst="roundRect">
-            <a:avLst>
-              <a:gd name="adj" fmla="val 1237"/>
-            </a:avLst>
-          </a:prstGeom>
-          <a:solidFill>
-            <a:srgbClr val="F0F3F8"/>
-          </a:solidFill>
-          <a:ln w="19050">
-            <a:solidFill>
-              <a:srgbClr val="3C6FC3"/>
-            </a:solidFill>
-            <a:prstDash val="dash"/>
-          </a:ln>
-        </p:spPr>
-      </p:sp>
-      <p:sp>
-        <p:nvSpPr>
-          <p:cNvPr id="8" name="Text 6"/>
-          <p:cNvSpPr/>
-          <p:nvPr/>
-        </p:nvSpPr>
-        <p:spPr>
-          <a:xfrm>
-            <a:off x="566928" y="1188720"/>
-            <a:ext cx="11064240" cy="4434840"/>
-          </a:xfrm>
-          <a:prstGeom prst="rect">
-            <a:avLst/>
-          </a:prstGeom>
-          <a:noFill/>
-          <a:ln/>
-        </p:spPr>
-        <p:txBody>
-          <a:bodyPr wrap="square" lIns="0" tIns="0" rIns="0" bIns="0" rtlCol="0" anchor="ctr"/>
-          <a:lstStyle/>
-          <a:p>
-            <a:pPr algn="ctr" indent="0" marL="0">
-              <a:lnSpc>
-                <a:spcPts val="1800"/>
-              </a:lnSpc>
-              <a:buNone/>
-            </a:pPr>
-            <a:r>
-              <a:rPr lang="en-US" sz="1200" dirty="0">
-                <a:solidFill>
-                  <a:srgbClr val="6B7A90"/>
-                </a:solidFill>
-                <a:latin typeface="Calibri" pitchFamily="34" charset="0"/>
-                <a:ea typeface="Calibri" pitchFamily="34" charset="-122"/>
-                <a:cs typeface="Calibri" pitchFamily="34" charset="-120"/>
-              </a:rPr>
-              <a:t>Capture attendue</a:t>
-            </a:r>
-            <a:endParaRPr lang="en-US" sz="1200" dirty="0"/>
-          </a:p>
-          <a:p>
-            <a:pPr algn="ctr" indent="0" marL="0">
-              <a:lnSpc>
-                <a:spcPts val="1800"/>
-              </a:lnSpc>
-              <a:buNone/>
-            </a:pPr>
-            <a:r>
-              <a:rPr lang="en-US" sz="1200" dirty="0">
-                <a:solidFill>
-                  <a:srgbClr val="6B7A90"/>
-                </a:solidFill>
-                <a:latin typeface="Calibri" pitchFamily="34" charset="0"/>
-                <a:ea typeface="Calibri" pitchFamily="34" charset="-122"/>
-                <a:cs typeface="Calibri" pitchFamily="34" charset="-120"/>
-              </a:rPr>
-              <a:t>../presentation/captures/04-demande-directeur.png</a:t>
-            </a:r>
-            <a:endParaRPr lang="en-US" sz="1200" dirty="0"/>
-          </a:p>
-        </p:txBody>
-      </p:sp>
-      <p:sp>
-        <p:nvSpPr>
-          <p:cNvPr id="9" name="Shape 7"/>
+      <p:pic>
+        <p:nvPicPr>
+          <p:cNvPr id="7" name="Image 0" descr="/home/user/oussema_korbosli/presentation/captures/04-demande-directeur.png">    </p:cNvPr>
+          <p:cNvPicPr>
+            <a:picLocks noChangeAspect="1"/>
+          </p:cNvPicPr>
+          <p:nvPr/>
+        </p:nvPicPr>
+        <p:blipFill>
+          <a:blip r:embed="rId1"/>
+          <a:stretch>
+            <a:fillRect/>
+          </a:stretch>
+        </p:blipFill>
+        <p:spPr>
+          <a:xfrm>
+            <a:off x="1443195" y="1188720"/>
+            <a:ext cx="9311707" cy="4434840"/>
+          </a:xfrm>
+          <a:prstGeom prst="rect">
+            <a:avLst/>
+          </a:prstGeom>
+        </p:spPr>
+      </p:pic>
+      <p:sp>
+        <p:nvSpPr>
+          <p:cNvPr id="8" name="Shape 5"/>
           <p:cNvSpPr/>
           <p:nvPr/>
         </p:nvSpPr>
@@ -26897,7 +26637,7 @@
       </p:sp>
       <p:sp>
         <p:nvSpPr>
-          <p:cNvPr id="10" name="Text 8"/>
+          <p:cNvPr id="9" name="Text 6"/>
           <p:cNvSpPr/>
           <p:nvPr/>
         </p:nvSpPr>
@@ -27126,98 +26866,33 @@
           </a:p>
         </p:txBody>
       </p:sp>
-      <p:sp>
-        <p:nvSpPr>
-          <p:cNvPr id="7" name="Shape 5"/>
-          <p:cNvSpPr/>
-          <p:nvPr/>
-        </p:nvSpPr>
-        <p:spPr>
-          <a:xfrm>
-            <a:off x="566928" y="1188720"/>
-            <a:ext cx="11064240" cy="4434840"/>
-          </a:xfrm>
-          <a:prstGeom prst="roundRect">
-            <a:avLst>
-              <a:gd name="adj" fmla="val 1237"/>
-            </a:avLst>
-          </a:prstGeom>
-          <a:solidFill>
-            <a:srgbClr val="F0F3F8"/>
-          </a:solidFill>
-          <a:ln w="19050">
-            <a:solidFill>
-              <a:srgbClr val="3C6FC3"/>
-            </a:solidFill>
-            <a:prstDash val="dash"/>
-          </a:ln>
-        </p:spPr>
-      </p:sp>
-      <p:sp>
-        <p:nvSpPr>
-          <p:cNvPr id="8" name="Text 6"/>
-          <p:cNvSpPr/>
-          <p:nvPr/>
-        </p:nvSpPr>
-        <p:spPr>
-          <a:xfrm>
-            <a:off x="566928" y="1188720"/>
-            <a:ext cx="11064240" cy="4434840"/>
-          </a:xfrm>
-          <a:prstGeom prst="rect">
-            <a:avLst/>
-          </a:prstGeom>
-          <a:noFill/>
-          <a:ln/>
-        </p:spPr>
-        <p:txBody>
-          <a:bodyPr wrap="square" lIns="0" tIns="0" rIns="0" bIns="0" rtlCol="0" anchor="ctr"/>
-          <a:lstStyle/>
-          <a:p>
-            <a:pPr algn="ctr" indent="0" marL="0">
-              <a:lnSpc>
-                <a:spcPts val="1800"/>
-              </a:lnSpc>
-              <a:buNone/>
-            </a:pPr>
-            <a:r>
-              <a:rPr lang="en-US" sz="1200" dirty="0">
-                <a:solidFill>
-                  <a:srgbClr val="6B7A90"/>
-                </a:solidFill>
-                <a:latin typeface="Calibri" pitchFamily="34" charset="0"/>
-                <a:ea typeface="Calibri" pitchFamily="34" charset="-122"/>
-                <a:cs typeface="Calibri" pitchFamily="34" charset="-120"/>
-              </a:rPr>
-              <a:t>Capture attendue</a:t>
-            </a:r>
-            <a:endParaRPr lang="en-US" sz="1200" dirty="0"/>
-          </a:p>
-          <a:p>
-            <a:pPr algn="ctr" indent="0" marL="0">
-              <a:lnSpc>
-                <a:spcPts val="1800"/>
-              </a:lnSpc>
-              <a:buNone/>
-            </a:pPr>
-            <a:r>
-              <a:rPr lang="en-US" sz="1200" dirty="0">
-                <a:solidFill>
-                  <a:srgbClr val="6B7A90"/>
-                </a:solidFill>
-                <a:latin typeface="Calibri" pitchFamily="34" charset="0"/>
-                <a:ea typeface="Calibri" pitchFamily="34" charset="-122"/>
-                <a:cs typeface="Calibri" pitchFamily="34" charset="-120"/>
-              </a:rPr>
-              <a:t>../presentation/captures/05-assistant.png</a:t>
-            </a:r>
-            <a:endParaRPr lang="en-US" sz="1200" dirty="0"/>
-          </a:p>
-        </p:txBody>
-      </p:sp>
-      <p:sp>
-        <p:nvSpPr>
-          <p:cNvPr id="9" name="Shape 7"/>
+      <p:pic>
+        <p:nvPicPr>
+          <p:cNvPr id="7" name="Image 0" descr="/home/user/oussema_korbosli/presentation/captures/05-assistant.png">    </p:cNvPr>
+          <p:cNvPicPr>
+            <a:picLocks noChangeAspect="1"/>
+          </p:cNvPicPr>
+          <p:nvPr/>
+        </p:nvPicPr>
+        <p:blipFill>
+          <a:blip r:embed="rId1"/>
+          <a:stretch>
+            <a:fillRect/>
+          </a:stretch>
+        </p:blipFill>
+        <p:spPr>
+          <a:xfrm>
+            <a:off x="1417557" y="1188720"/>
+            <a:ext cx="9362983" cy="4434840"/>
+          </a:xfrm>
+          <a:prstGeom prst="rect">
+            <a:avLst/>
+          </a:prstGeom>
+        </p:spPr>
+      </p:pic>
+      <p:sp>
+        <p:nvSpPr>
+          <p:cNvPr id="8" name="Shape 5"/>
           <p:cNvSpPr/>
           <p:nvPr/>
         </p:nvSpPr>
@@ -27237,7 +26912,7 @@
       </p:sp>
       <p:sp>
         <p:nvSpPr>
-          <p:cNvPr id="10" name="Text 8"/>
+          <p:cNvPr id="9" name="Text 6"/>
           <p:cNvSpPr/>
           <p:nvPr/>
         </p:nvSpPr>

--- a/presentation/Soutenance_PFE_Oussema_Korbosli.pptx
+++ b/presentation/Soutenance_PFE_Oussema_Korbosli.pptx
@@ -24348,7 +24348,7 @@
         <p:spPr>
           <a:xfrm>
             <a:off x="1225296" y="3127248"/>
-            <a:ext cx="1828800" cy="310896"/>
+            <a:ext cx="1883664" cy="310896"/>
           </a:xfrm>
           <a:prstGeom prst="rect">
             <a:avLst/>
@@ -24364,7 +24364,7 @@
               <a:buNone/>
             </a:pPr>
             <a:r>
-              <a:rPr lang="en-US" sz="1400" b="1" dirty="0">
+              <a:rPr lang="en-US" sz="1300" b="1" dirty="0">
                 <a:solidFill>
                   <a:srgbClr val="FFFFFF"/>
                 </a:solidFill>
@@ -24372,9 +24372,9 @@
                 <a:ea typeface="Georgia" pitchFamily="34" charset="-122"/>
                 <a:cs typeface="Georgia" pitchFamily="34" charset="-120"/>
               </a:rPr>
-              <a:t>Connexion</a:t>
-            </a:r>
-            <a:endParaRPr lang="en-US" sz="1400" dirty="0"/>
+              <a:t>Authentification</a:t>
+            </a:r>
+            <a:endParaRPr lang="en-US" sz="1300" dirty="0"/>
           </a:p>
         </p:txBody>
       </p:sp>
@@ -24386,8 +24386,8 @@
         </p:nvSpPr>
         <p:spPr>
           <a:xfrm>
-            <a:off x="3054096" y="3145536"/>
-            <a:ext cx="868680" cy="274320"/>
+            <a:off x="3145536" y="3145536"/>
+            <a:ext cx="777240" cy="274320"/>
           </a:xfrm>
           <a:prstGeom prst="rect">
             <a:avLst>
@@ -24563,7 +24563,7 @@
         <p:spPr>
           <a:xfrm>
             <a:off x="4910328" y="3127248"/>
-            <a:ext cx="1828800" cy="310896"/>
+            <a:ext cx="1883664" cy="310896"/>
           </a:xfrm>
           <a:prstGeom prst="rect">
             <a:avLst/>
@@ -24579,7 +24579,7 @@
               <a:buNone/>
             </a:pPr>
             <a:r>
-              <a:rPr lang="en-US" sz="1400" b="1" dirty="0">
+              <a:rPr lang="en-US" sz="1300" b="1" dirty="0">
                 <a:solidFill>
                   <a:srgbClr val="FFFFFF"/>
                 </a:solidFill>
@@ -24587,9 +24587,9 @@
                 <a:ea typeface="Georgia" pitchFamily="34" charset="-122"/>
                 <a:cs typeface="Georgia" pitchFamily="34" charset="-120"/>
               </a:rPr>
-              <a:t>Tableau de bord</a:t>
-            </a:r>
-            <a:endParaRPr lang="en-US" sz="1400" dirty="0"/>
+              <a:t>Ajout d'un employé</a:t>
+            </a:r>
+            <a:endParaRPr lang="en-US" sz="1300" dirty="0"/>
           </a:p>
         </p:txBody>
       </p:sp>
@@ -24601,8 +24601,8 @@
         </p:nvSpPr>
         <p:spPr>
           <a:xfrm>
-            <a:off x="6739128" y="3145536"/>
-            <a:ext cx="868680" cy="274320"/>
+            <a:off x="6830568" y="3145536"/>
+            <a:ext cx="777240" cy="274320"/>
           </a:xfrm>
           <a:prstGeom prst="rect">
             <a:avLst>
@@ -24672,7 +24672,7 @@
                 <a:ea typeface="Calibri" pitchFamily="34" charset="-122"/>
                 <a:cs typeface="Calibri" pitchFamily="34" charset="-120"/>
               </a:rPr>
-              <a:t>Indicateurs, graphiques et actions requises</a:t>
+              <a:t>Employé, compte de connexion et rattachement à l'agence</a:t>
             </a:r>
             <a:endParaRPr lang="en-US" sz="1050" dirty="0"/>
           </a:p>
@@ -24778,7 +24778,7 @@
         <p:spPr>
           <a:xfrm>
             <a:off x="8595360" y="3127248"/>
-            <a:ext cx="1828800" cy="310896"/>
+            <a:ext cx="1883664" cy="310896"/>
           </a:xfrm>
           <a:prstGeom prst="rect">
             <a:avLst/>
@@ -24794,7 +24794,7 @@
               <a:buNone/>
             </a:pPr>
             <a:r>
-              <a:rPr lang="en-US" sz="1400" b="1" dirty="0">
+              <a:rPr lang="en-US" sz="1300" b="1" dirty="0">
                 <a:solidFill>
                   <a:srgbClr val="FFFFFF"/>
                 </a:solidFill>
@@ -24802,9 +24802,9 @@
                 <a:ea typeface="Georgia" pitchFamily="34" charset="-122"/>
                 <a:cs typeface="Georgia" pitchFamily="34" charset="-120"/>
               </a:rPr>
-              <a:t>Employés</a:t>
-            </a:r>
-            <a:endParaRPr lang="en-US" sz="1400" dirty="0"/>
+              <a:t>Pointage</a:t>
+            </a:r>
+            <a:endParaRPr lang="en-US" sz="1300" dirty="0"/>
           </a:p>
         </p:txBody>
       </p:sp>
@@ -24816,8 +24816,8 @@
         </p:nvSpPr>
         <p:spPr>
           <a:xfrm>
-            <a:off x="10424160" y="3145536"/>
-            <a:ext cx="868680" cy="274320"/>
+            <a:off x="10515600" y="3145536"/>
+            <a:ext cx="777240" cy="274320"/>
           </a:xfrm>
           <a:prstGeom prst="rect">
             <a:avLst>
@@ -24845,7 +24845,7 @@
                 <a:ea typeface="Calibri" pitchFamily="34" charset="-122"/>
                 <a:cs typeface="Calibri" pitchFamily="34" charset="-120"/>
               </a:rPr>
-              <a:t>ADMIN</a:t>
+              <a:t>USER</a:t>
             </a:r>
             <a:endParaRPr lang="en-US" sz="850" dirty="0"/>
           </a:p>
@@ -24887,7 +24887,7 @@
                 <a:ea typeface="Calibri" pitchFamily="34" charset="-122"/>
                 <a:cs typeface="Calibri" pitchFamily="34" charset="-120"/>
               </a:rPr>
-              <a:t>Ajout d'un employé, filtre et liste</a:t>
+              <a:t>Arrivée, départ et statut calculé par le serveur</a:t>
             </a:r>
             <a:endParaRPr lang="en-US" sz="1050" dirty="0"/>
           </a:p>
@@ -24901,7 +24901,7 @@
         </p:nvSpPr>
         <p:spPr>
           <a:xfrm>
-            <a:off x="566928" y="4535424"/>
+            <a:off x="2505456" y="4535424"/>
             <a:ext cx="3502152" cy="1389888"/>
           </a:xfrm>
           <a:prstGeom prst="roundRect">
@@ -24928,7 +24928,7 @@
         </p:nvSpPr>
         <p:spPr>
           <a:xfrm>
-            <a:off x="749808" y="4718304"/>
+            <a:off x="2688336" y="4718304"/>
             <a:ext cx="384048" cy="384048"/>
           </a:xfrm>
           <a:prstGeom prst="ellipse">
@@ -24953,7 +24953,7 @@
         </p:nvSpPr>
         <p:spPr>
           <a:xfrm>
-            <a:off x="749808" y="4718304"/>
+            <a:off x="2688336" y="4718304"/>
             <a:ext cx="384048" cy="384048"/>
           </a:xfrm>
           <a:prstGeom prst="rect">
@@ -24992,8 +24992,8 @@
         </p:nvSpPr>
         <p:spPr>
           <a:xfrm>
-            <a:off x="1225296" y="4700016"/>
-            <a:ext cx="1828800" cy="310896"/>
+            <a:off x="3163824" y="4700016"/>
+            <a:ext cx="1883664" cy="310896"/>
           </a:xfrm>
           <a:prstGeom prst="rect">
             <a:avLst/>
@@ -25009,7 +25009,7 @@
               <a:buNone/>
             </a:pPr>
             <a:r>
-              <a:rPr lang="en-US" sz="1400" b="1" dirty="0">
+              <a:rPr lang="en-US" sz="1300" b="1" dirty="0">
                 <a:solidFill>
                   <a:srgbClr val="FFFFFF"/>
                 </a:solidFill>
@@ -25017,9 +25017,9 @@
                 <a:ea typeface="Georgia" pitchFamily="34" charset="-122"/>
                 <a:cs typeface="Georgia" pitchFamily="34" charset="-120"/>
               </a:rPr>
-              <a:t>Agences</a:t>
-            </a:r>
-            <a:endParaRPr lang="en-US" sz="1400" dirty="0"/>
+              <a:t>Demande à valider</a:t>
+            </a:r>
+            <a:endParaRPr lang="en-US" sz="1300" dirty="0"/>
           </a:p>
         </p:txBody>
       </p:sp>
@@ -25031,8 +25031,8 @@
         </p:nvSpPr>
         <p:spPr>
           <a:xfrm>
-            <a:off x="3054096" y="4718304"/>
-            <a:ext cx="868680" cy="274320"/>
+            <a:off x="5084064" y="4718304"/>
+            <a:ext cx="777240" cy="274320"/>
           </a:xfrm>
           <a:prstGeom prst="rect">
             <a:avLst>
@@ -25060,7 +25060,7 @@
                 <a:ea typeface="Calibri" pitchFamily="34" charset="-122"/>
                 <a:cs typeface="Calibri" pitchFamily="34" charset="-120"/>
               </a:rPr>
-              <a:t>ADMIN</a:t>
+              <a:t>DIRECTEUR</a:t>
             </a:r>
             <a:endParaRPr lang="en-US" sz="850" dirty="0"/>
           </a:p>
@@ -25074,7 +25074,7 @@
         </p:nvSpPr>
         <p:spPr>
           <a:xfrm>
-            <a:off x="749808" y="5157216"/>
+            <a:off x="2688336" y="5157216"/>
             <a:ext cx="3154680" cy="640080"/>
           </a:xfrm>
           <a:prstGeom prst="rect">
@@ -25102,7 +25102,7 @@
                 <a:ea typeface="Calibri" pitchFamily="34" charset="-122"/>
                 <a:cs typeface="Calibri" pitchFamily="34" charset="-120"/>
               </a:rPr>
-              <a:t>Création et suppression d'une agence</a:t>
+              <a:t>La demande de modification arrive dans sa file d'attente</a:t>
             </a:r>
             <a:endParaRPr lang="en-US" sz="1050" dirty="0"/>
           </a:p>
@@ -25116,7 +25116,7 @@
         </p:nvSpPr>
         <p:spPr>
           <a:xfrm>
-            <a:off x="4251960" y="4535424"/>
+            <a:off x="6190488" y="4535424"/>
             <a:ext cx="3502152" cy="1389888"/>
           </a:xfrm>
           <a:prstGeom prst="roundRect">
@@ -25143,7 +25143,7 @@
         </p:nvSpPr>
         <p:spPr>
           <a:xfrm>
-            <a:off x="4434840" y="4718304"/>
+            <a:off x="6373368" y="4718304"/>
             <a:ext cx="384048" cy="384048"/>
           </a:xfrm>
           <a:prstGeom prst="ellipse">
@@ -25168,7 +25168,7 @@
         </p:nvSpPr>
         <p:spPr>
           <a:xfrm>
-            <a:off x="4434840" y="4718304"/>
+            <a:off x="6373368" y="4718304"/>
             <a:ext cx="384048" cy="384048"/>
           </a:xfrm>
           <a:prstGeom prst="rect">
@@ -25207,8 +25207,8 @@
         </p:nvSpPr>
         <p:spPr>
           <a:xfrm>
-            <a:off x="4910328" y="4700016"/>
-            <a:ext cx="1828800" cy="310896"/>
+            <a:off x="6848856" y="4700016"/>
+            <a:ext cx="1883664" cy="310896"/>
           </a:xfrm>
           <a:prstGeom prst="rect">
             <a:avLst/>
@@ -25224,7 +25224,7 @@
               <a:buNone/>
             </a:pPr>
             <a:r>
-              <a:rPr lang="en-US" sz="1400" b="1" dirty="0">
+              <a:rPr lang="en-US" sz="1300" b="1" dirty="0">
                 <a:solidFill>
                   <a:srgbClr val="FFFFFF"/>
                 </a:solidFill>
@@ -25232,9 +25232,9 @@
                 <a:ea typeface="Georgia" pitchFamily="34" charset="-122"/>
                 <a:cs typeface="Georgia" pitchFamily="34" charset="-120"/>
               </a:rPr>
-              <a:t>Pointage</a:t>
-            </a:r>
-            <a:endParaRPr lang="en-US" sz="1400" dirty="0"/>
+              <a:t>Assistant intégré</a:t>
+            </a:r>
+            <a:endParaRPr lang="en-US" sz="1300" dirty="0"/>
           </a:p>
         </p:txBody>
       </p:sp>
@@ -25246,8 +25246,8 @@
         </p:nvSpPr>
         <p:spPr>
           <a:xfrm>
-            <a:off x="6739128" y="4718304"/>
-            <a:ext cx="868680" cy="274320"/>
+            <a:off x="8769096" y="4718304"/>
+            <a:ext cx="777240" cy="274320"/>
           </a:xfrm>
           <a:prstGeom prst="rect">
             <a:avLst>
@@ -25275,7 +25275,7 @@
                 <a:ea typeface="Calibri" pitchFamily="34" charset="-122"/>
                 <a:cs typeface="Calibri" pitchFamily="34" charset="-120"/>
               </a:rPr>
-              <a:t>USER</a:t>
+              <a:t>ADMIN</a:t>
             </a:r>
             <a:endParaRPr lang="en-US" sz="850" dirty="0"/>
           </a:p>
@@ -25289,7 +25289,7 @@
         </p:nvSpPr>
         <p:spPr>
           <a:xfrm>
-            <a:off x="4434840" y="5157216"/>
+            <a:off x="6373368" y="5157216"/>
             <a:ext cx="3154680" cy="640080"/>
           </a:xfrm>
           <a:prstGeom prst="rect">
@@ -25317,7 +25317,7 @@
                 <a:ea typeface="Calibri" pitchFamily="34" charset="-122"/>
                 <a:cs typeface="Calibri" pitchFamily="34" charset="-120"/>
               </a:rPr>
-              <a:t>Arrivée, départ et statut calculé</a:t>
+              <a:t>Questions en langage naturel sur les données de l'application</a:t>
             </a:r>
             <a:endParaRPr lang="en-US" sz="1050" dirty="0"/>
           </a:p>
@@ -25325,105 +25325,14 @@
       </p:sp>
       <p:sp>
         <p:nvSpPr>
-          <p:cNvPr id="38" name="Shape 36"/>
-          <p:cNvSpPr/>
-          <p:nvPr/>
-        </p:nvSpPr>
-        <p:spPr>
-          <a:xfrm>
-            <a:off x="7936992" y="4535424"/>
-            <a:ext cx="3502152" cy="1389888"/>
-          </a:xfrm>
-          <a:prstGeom prst="roundRect">
-            <a:avLst>
-              <a:gd name="adj" fmla="val 5263"/>
-            </a:avLst>
-          </a:prstGeom>
-          <a:solidFill>
-            <a:srgbClr val="1D4EA0"/>
-          </a:solidFill>
-          <a:ln w="12700">
-            <a:solidFill>
-              <a:srgbClr val="1D4EA0"/>
-            </a:solidFill>
-            <a:prstDash val="solid"/>
-          </a:ln>
-        </p:spPr>
-      </p:sp>
-      <p:sp>
-        <p:nvSpPr>
-          <p:cNvPr id="39" name="Shape 37"/>
-          <p:cNvSpPr/>
-          <p:nvPr/>
-        </p:nvSpPr>
-        <p:spPr>
-          <a:xfrm>
-            <a:off x="8119872" y="4718304"/>
-            <a:ext cx="384048" cy="384048"/>
-          </a:xfrm>
-          <a:prstGeom prst="ellipse">
-            <a:avLst/>
-          </a:prstGeom>
-          <a:solidFill>
-            <a:srgbClr val="0A2558"/>
-          </a:solidFill>
-          <a:ln w="12700">
-            <a:solidFill>
-              <a:srgbClr val="0A2558"/>
-            </a:solidFill>
-            <a:prstDash val="solid"/>
-          </a:ln>
-        </p:spPr>
-      </p:sp>
-      <p:sp>
-        <p:nvSpPr>
-          <p:cNvPr id="40" name="Text 38"/>
-          <p:cNvSpPr/>
-          <p:nvPr/>
-        </p:nvSpPr>
-        <p:spPr>
-          <a:xfrm>
-            <a:off x="8119872" y="4718304"/>
-            <a:ext cx="384048" cy="384048"/>
-          </a:xfrm>
-          <a:prstGeom prst="rect">
-            <a:avLst/>
-          </a:prstGeom>
-          <a:noFill/>
-          <a:ln/>
-        </p:spPr>
-        <p:txBody>
-          <a:bodyPr wrap="square" lIns="0" tIns="0" rIns="0" bIns="0" rtlCol="0" anchor="ctr"/>
-          <a:lstStyle/>
-          <a:p>
-            <a:pPr algn="ctr" indent="0" marL="0">
-              <a:buNone/>
-            </a:pPr>
-            <a:r>
-              <a:rPr lang="en-US" sz="1300" b="1" dirty="0">
-                <a:solidFill>
-                  <a:srgbClr val="FFFFFF"/>
-                </a:solidFill>
-                <a:latin typeface="Georgia" pitchFamily="34" charset="0"/>
-                <a:ea typeface="Georgia" pitchFamily="34" charset="-122"/>
-                <a:cs typeface="Georgia" pitchFamily="34" charset="-120"/>
-              </a:rPr>
-              <a:t>6</a:t>
-            </a:r>
-            <a:endParaRPr lang="en-US" sz="1300" dirty="0"/>
-          </a:p>
-        </p:txBody>
-      </p:sp>
-      <p:sp>
-        <p:nvSpPr>
-          <p:cNvPr id="41" name="Text 39"/>
-          <p:cNvSpPr/>
-          <p:nvPr/>
-        </p:nvSpPr>
-        <p:spPr>
-          <a:xfrm>
-            <a:off x="8595360" y="4700016"/>
-            <a:ext cx="1828800" cy="310896"/>
+          <p:cNvPr id="38" name="Text 36"/>
+          <p:cNvSpPr/>
+          <p:nvPr/>
+        </p:nvSpPr>
+        <p:spPr>
+          <a:xfrm>
+            <a:off x="566928" y="6144768"/>
+            <a:ext cx="10515600" cy="292608"/>
           </a:xfrm>
           <a:prstGeom prst="rect">
             <a:avLst/>
@@ -25439,139 +25348,15 @@
               <a:buNone/>
             </a:pPr>
             <a:r>
-              <a:rPr lang="en-US" sz="1400" b="1" dirty="0">
-                <a:solidFill>
-                  <a:srgbClr val="FFFFFF"/>
-                </a:solidFill>
-                <a:latin typeface="Georgia" pitchFamily="34" charset="0"/>
-                <a:ea typeface="Georgia" pitchFamily="34" charset="-122"/>
-                <a:cs typeface="Georgia" pitchFamily="34" charset="-120"/>
-              </a:rPr>
-              <a:t>Validation</a:t>
-            </a:r>
-            <a:endParaRPr lang="en-US" sz="1400" dirty="0"/>
-          </a:p>
-        </p:txBody>
-      </p:sp>
-      <p:sp>
-        <p:nvSpPr>
-          <p:cNvPr id="42" name="Text 40"/>
-          <p:cNvSpPr/>
-          <p:nvPr/>
-        </p:nvSpPr>
-        <p:spPr>
-          <a:xfrm>
-            <a:off x="10424160" y="4718304"/>
-            <a:ext cx="868680" cy="274320"/>
-          </a:xfrm>
-          <a:prstGeom prst="rect">
-            <a:avLst>
-              <a:gd name="adj" fmla="val 13333"/>
-            </a:avLst>
-          </a:prstGeom>
-          <a:solidFill>
-            <a:srgbClr val="3C6FC3"/>
-          </a:solidFill>
-          <a:ln/>
-        </p:spPr>
-        <p:txBody>
-          <a:bodyPr wrap="square" lIns="0" tIns="0" rIns="0" bIns="0" rtlCol="0" anchor="ctr"/>
-          <a:lstStyle/>
-          <a:p>
-            <a:pPr algn="ctr" indent="0" marL="0">
-              <a:buNone/>
-            </a:pPr>
-            <a:r>
-              <a:rPr lang="en-US" sz="850" b="1" dirty="0">
-                <a:solidFill>
-                  <a:srgbClr val="0A2558"/>
+              <a:rPr lang="en-US" sz="1150" i="1" dirty="0">
+                <a:solidFill>
+                  <a:srgbClr val="9FB6DC"/>
                 </a:solidFill>
                 <a:latin typeface="Calibri" pitchFamily="34" charset="0"/>
                 <a:ea typeface="Calibri" pitchFamily="34" charset="-122"/>
                 <a:cs typeface="Calibri" pitchFamily="34" charset="-120"/>
               </a:rPr>
-              <a:t>DIRECTEUR</a:t>
-            </a:r>
-            <a:endParaRPr lang="en-US" sz="850" dirty="0"/>
-          </a:p>
-        </p:txBody>
-      </p:sp>
-      <p:sp>
-        <p:nvSpPr>
-          <p:cNvPr id="43" name="Text 41"/>
-          <p:cNvSpPr/>
-          <p:nvPr/>
-        </p:nvSpPr>
-        <p:spPr>
-          <a:xfrm>
-            <a:off x="8119872" y="5157216"/>
-            <a:ext cx="3154680" cy="640080"/>
-          </a:xfrm>
-          <a:prstGeom prst="rect">
-            <a:avLst/>
-          </a:prstGeom>
-          <a:noFill/>
-          <a:ln/>
-        </p:spPr>
-        <p:txBody>
-          <a:bodyPr wrap="square" lIns="0" tIns="0" rIns="0" bIns="0" rtlCol="0" anchor="t"/>
-          <a:lstStyle/>
-          <a:p>
-            <a:pPr indent="0" marL="0">
-              <a:lnSpc>
-                <a:spcPts val="1300"/>
-              </a:lnSpc>
-              <a:buNone/>
-            </a:pPr>
-            <a:r>
-              <a:rPr lang="en-US" sz="1050" dirty="0">
-                <a:solidFill>
-                  <a:srgbClr val="CBD8EE"/>
-                </a:solidFill>
-                <a:latin typeface="Calibri" pitchFamily="34" charset="0"/>
-                <a:ea typeface="Calibri" pitchFamily="34" charset="-122"/>
-                <a:cs typeface="Calibri" pitchFamily="34" charset="-120"/>
-              </a:rPr>
-              <a:t>Approbation d'une demande de modification</a:t>
-            </a:r>
-            <a:endParaRPr lang="en-US" sz="1050" dirty="0"/>
-          </a:p>
-        </p:txBody>
-      </p:sp>
-      <p:sp>
-        <p:nvSpPr>
-          <p:cNvPr id="44" name="Text 42"/>
-          <p:cNvSpPr/>
-          <p:nvPr/>
-        </p:nvSpPr>
-        <p:spPr>
-          <a:xfrm>
-            <a:off x="566928" y="6144768"/>
-            <a:ext cx="10515600" cy="292608"/>
-          </a:xfrm>
-          <a:prstGeom prst="rect">
-            <a:avLst/>
-          </a:prstGeom>
-          <a:noFill/>
-          <a:ln/>
-        </p:spPr>
-        <p:txBody>
-          <a:bodyPr wrap="square" lIns="0" tIns="0" rIns="0" bIns="0" rtlCol="0" anchor="ctr"/>
-          <a:lstStyle/>
-          <a:p>
-            <a:pPr indent="0" marL="0">
-              <a:buNone/>
-            </a:pPr>
-            <a:r>
-              <a:rPr lang="en-US" sz="1150" i="1" dirty="0">
-                <a:solidFill>
-                  <a:srgbClr val="9FB6DC"/>
-                </a:solidFill>
-                <a:latin typeface="Calibri" pitchFamily="34" charset="0"/>
-                <a:ea typeface="Calibri" pitchFamily="34" charset="-122"/>
-                <a:cs typeface="Calibri" pitchFamily="34" charset="-120"/>
-              </a:rPr>
-              <a:t>Les quatre pages Power BI ont été présentées dans la partie précédente.</a:t>
+              <a:t>Chacune de ces cinq étapes est reprise sur la diapositive suivante, capture à l'appui.</a:t>
             </a:r>
             <a:endParaRPr lang="en-US" sz="1150" dirty="0"/>
           </a:p>

--- a/presentation/Soutenance_PFE_Oussema_Korbosli.pptx
+++ b/presentation/Soutenance_PFE_Oussema_Korbosli.pptx
@@ -15268,7 +15268,7 @@
                 <a:ea typeface="Calibri" pitchFamily="34" charset="-122"/>
                 <a:cs typeface="Calibri" pitchFamily="34" charset="-120"/>
               </a:rPr>
-              <a:t>Valeurs manquantes, arrondis et journal</a:t>
+              <a:t>Valeurs manquantes et arrondis</a:t>
             </a:r>
             <a:endParaRPr lang="en-US" sz="1100" dirty="0"/>
           </a:p>

--- a/presentation/Soutenance_PFE_Oussema_Korbosli.pptx
+++ b/presentation/Soutenance_PFE_Oussema_Korbosli.pptx
@@ -31993,7 +31993,7 @@
                 <a:ea typeface="Calibri" pitchFamily="34" charset="-122"/>
                 <a:cs typeface="Calibri" pitchFamily="34" charset="-120"/>
               </a:rPr>
-              <a:t>Chiffres issus du datamart réel produit par la chaîne ETL du projet</a:t>
+              <a:t>Ces chiffres sont issus des données réelles de la base BTK</a:t>
             </a:r>
             <a:endParaRPr lang="en-US" sz="1250" dirty="0"/>
           </a:p>
